--- a/docs/planning/EasyInvoice-Module2-Presentation.pptx
+++ b/docs/planning/EasyInvoice-Module2-Presentation.pptx
@@ -1,31 +1,126 @@
 
 <file path=ppt/presentation.xml><?xml version="1.0" encoding="utf-8"?>
-<p:presentation xmlns:p="http://schemas.openxmlformats.org/presentationml/2006/main">
+<p:presentation xmlns:a="http://schemas.openxmlformats.org/drawingml/2006/main" xmlns:r="http://schemas.openxmlformats.org/officeDocument/2006/relationships" xmlns:p="http://schemas.openxmlformats.org/presentationml/2006/main">
   <p:sldMasterIdLst>
-    <p:sldMasterId xmlns:r="http://schemas.openxmlformats.org/officeDocument/2006/relationships" id="2147483648" r:id="R6d4e81a46e9d4cad"/>
+    <p:sldMasterId id="2147483648" r:id="rId1"/>
   </p:sldMasterIdLst>
   <p:notesMasterIdLst>
-    <p:notesMasterId xmlns:r="http://schemas.openxmlformats.org/officeDocument/2006/relationships" r:id="R900b16da8ae9463e"/>
+    <p:notesMasterId r:id="rId8"/>
   </p:notesMasterIdLst>
   <p:sldIdLst>
-    <p:sldId xmlns:r="http://schemas.openxmlformats.org/officeDocument/2006/relationships" id="256" r:id="R6f8b6d033f1b499f"/>
-    <p:sldId xmlns:r="http://schemas.openxmlformats.org/officeDocument/2006/relationships" id="257" r:id="Rdb2cedc40eb14ed2"/>
-    <p:sldId xmlns:r="http://schemas.openxmlformats.org/officeDocument/2006/relationships" id="258" r:id="Rd29c45c937b641e5"/>
-    <p:sldId xmlns:r="http://schemas.openxmlformats.org/officeDocument/2006/relationships" id="259" r:id="Rc349bb09b0344763"/>
-    <p:sldId xmlns:r="http://schemas.openxmlformats.org/officeDocument/2006/relationships" id="260" r:id="R3f3944dd3fdd46c1"/>
-    <p:sldId xmlns:r="http://schemas.openxmlformats.org/officeDocument/2006/relationships" id="261" r:id="R915ce8c241104464"/>
+    <p:sldId id="256" r:id="rId2"/>
+    <p:sldId id="257" r:id="rId3"/>
+    <p:sldId id="258" r:id="rId4"/>
+    <p:sldId id="259" r:id="rId5"/>
+    <p:sldId id="260" r:id="rId6"/>
+    <p:sldId id="261" r:id="rId7"/>
   </p:sldIdLst>
   <p:sldSz cx="12192000" cy="6858000"/>
   <p:notesSz cx="6858000" cy="9144000"/>
+  <p:defaultTextStyle>
+    <a:defPPr>
+      <a:defRPr lang="en-US"/>
+    </a:defPPr>
+    <a:lvl1pPr marL="0" algn="l" defTabSz="914400" rtl="0" eaLnBrk="1" latinLnBrk="0" hangingPunct="1">
+      <a:defRPr sz="1800" kern="1200">
+        <a:solidFill>
+          <a:schemeClr val="tx1"/>
+        </a:solidFill>
+        <a:latin typeface="+mn-lt"/>
+        <a:ea typeface="+mn-ea"/>
+        <a:cs typeface="+mn-cs"/>
+      </a:defRPr>
+    </a:lvl1pPr>
+    <a:lvl2pPr marL="457200" algn="l" defTabSz="914400" rtl="0" eaLnBrk="1" latinLnBrk="0" hangingPunct="1">
+      <a:defRPr sz="1800" kern="1200">
+        <a:solidFill>
+          <a:schemeClr val="tx1"/>
+        </a:solidFill>
+        <a:latin typeface="+mn-lt"/>
+        <a:ea typeface="+mn-ea"/>
+        <a:cs typeface="+mn-cs"/>
+      </a:defRPr>
+    </a:lvl2pPr>
+    <a:lvl3pPr marL="914400" algn="l" defTabSz="914400" rtl="0" eaLnBrk="1" latinLnBrk="0" hangingPunct="1">
+      <a:defRPr sz="1800" kern="1200">
+        <a:solidFill>
+          <a:schemeClr val="tx1"/>
+        </a:solidFill>
+        <a:latin typeface="+mn-lt"/>
+        <a:ea typeface="+mn-ea"/>
+        <a:cs typeface="+mn-cs"/>
+      </a:defRPr>
+    </a:lvl3pPr>
+    <a:lvl4pPr marL="1371600" algn="l" defTabSz="914400" rtl="0" eaLnBrk="1" latinLnBrk="0" hangingPunct="1">
+      <a:defRPr sz="1800" kern="1200">
+        <a:solidFill>
+          <a:schemeClr val="tx1"/>
+        </a:solidFill>
+        <a:latin typeface="+mn-lt"/>
+        <a:ea typeface="+mn-ea"/>
+        <a:cs typeface="+mn-cs"/>
+      </a:defRPr>
+    </a:lvl4pPr>
+    <a:lvl5pPr marL="1828800" algn="l" defTabSz="914400" rtl="0" eaLnBrk="1" latinLnBrk="0" hangingPunct="1">
+      <a:defRPr sz="1800" kern="1200">
+        <a:solidFill>
+          <a:schemeClr val="tx1"/>
+        </a:solidFill>
+        <a:latin typeface="+mn-lt"/>
+        <a:ea typeface="+mn-ea"/>
+        <a:cs typeface="+mn-cs"/>
+      </a:defRPr>
+    </a:lvl5pPr>
+    <a:lvl6pPr marL="2286000" algn="l" defTabSz="914400" rtl="0" eaLnBrk="1" latinLnBrk="0" hangingPunct="1">
+      <a:defRPr sz="1800" kern="1200">
+        <a:solidFill>
+          <a:schemeClr val="tx1"/>
+        </a:solidFill>
+        <a:latin typeface="+mn-lt"/>
+        <a:ea typeface="+mn-ea"/>
+        <a:cs typeface="+mn-cs"/>
+      </a:defRPr>
+    </a:lvl6pPr>
+    <a:lvl7pPr marL="2743200" algn="l" defTabSz="914400" rtl="0" eaLnBrk="1" latinLnBrk="0" hangingPunct="1">
+      <a:defRPr sz="1800" kern="1200">
+        <a:solidFill>
+          <a:schemeClr val="tx1"/>
+        </a:solidFill>
+        <a:latin typeface="+mn-lt"/>
+        <a:ea typeface="+mn-ea"/>
+        <a:cs typeface="+mn-cs"/>
+      </a:defRPr>
+    </a:lvl7pPr>
+    <a:lvl8pPr marL="3200400" algn="l" defTabSz="914400" rtl="0" eaLnBrk="1" latinLnBrk="0" hangingPunct="1">
+      <a:defRPr sz="1800" kern="1200">
+        <a:solidFill>
+          <a:schemeClr val="tx1"/>
+        </a:solidFill>
+        <a:latin typeface="+mn-lt"/>
+        <a:ea typeface="+mn-ea"/>
+        <a:cs typeface="+mn-cs"/>
+      </a:defRPr>
+    </a:lvl8pPr>
+    <a:lvl9pPr marL="3657600" algn="l" defTabSz="914400" rtl="0" eaLnBrk="1" latinLnBrk="0" hangingPunct="1">
+      <a:defRPr sz="1800" kern="1200">
+        <a:solidFill>
+          <a:schemeClr val="tx1"/>
+        </a:solidFill>
+        <a:latin typeface="+mn-lt"/>
+        <a:ea typeface="+mn-ea"/>
+        <a:cs typeface="+mn-cs"/>
+      </a:defRPr>
+    </a:lvl9pPr>
+  </p:defaultTextStyle>
 </p:presentation>
 </file>
 
 <file path=ppt/notesMasters/notesMaster1.xml><?xml version="1.0" encoding="utf-8"?>
-<p:notesMaster xmlns:p="http://schemas.openxmlformats.org/presentationml/2006/main">
+<p:notesMaster xmlns:a="http://schemas.openxmlformats.org/drawingml/2006/main" xmlns:r="http://schemas.openxmlformats.org/officeDocument/2006/relationships" xmlns:p="http://schemas.openxmlformats.org/presentationml/2006/main">
   <p:cSld>
     <p:bg>
       <p:bgRef idx="1001">
-        <a:schemeClr xmlns:a="http://schemas.openxmlformats.org/drawingml/2006/main" val="bg1"/>
+        <a:schemeClr val="bg1"/>
       </p:bgRef>
     </p:bg>
     <p:spTree>
@@ -35,380 +130,164 @@
         <p:nvPr/>
       </p:nvGrpSpPr>
       <p:grpSpPr>
-        <a:xfrm xmlns:a="http://schemas.openxmlformats.org/drawingml/2006/main"/>
+        <a:xfrm>
+          <a:off x="0" y="0"/>
+          <a:ext cx="0" cy="0"/>
+          <a:chOff x="0" y="0"/>
+          <a:chExt cx="0" cy="0"/>
+        </a:xfrm>
       </p:grpSpPr>
       <p:sp>
         <p:nvSpPr>
           <p:cNvPr id="2" name="Header Placeholder"/>
-          <p:cNvSpPr/>
+          <p:cNvSpPr>
+            <a:spLocks noGrp="1"/>
+          </p:cNvSpPr>
           <p:nvPr>
             <p:ph type="hdr" sz="quarter"/>
           </p:nvPr>
         </p:nvSpPr>
         <p:spPr>
-          <a:prstGeom xmlns:a="http://schemas.openxmlformats.org/drawingml/2006/main" prst="rect">
-            <a:avLst/>
-          </a:prstGeom>
-        </p:spPr>
-        <p:txBody>
-          <a:bodyPr xmlns:a="http://schemas.openxmlformats.org/drawingml/2006/main"/>
-          <a:lstStyle xmlns:a="http://schemas.openxmlformats.org/drawingml/2006/main"/>
-          <a:p xmlns:a="http://schemas.openxmlformats.org/drawingml/2006/main"/>
+          <a:prstGeom prst="rect">
+            <a:avLst/>
+          </a:prstGeom>
+        </p:spPr>
+        <p:txBody>
+          <a:bodyPr/>
+          <a:lstStyle/>
+          <a:p>
+            <a:endParaRPr/>
+          </a:p>
         </p:txBody>
       </p:sp>
       <p:sp>
         <p:nvSpPr>
           <p:cNvPr id="3" name="Date Placeholder"/>
-          <p:cNvSpPr/>
+          <p:cNvSpPr>
+            <a:spLocks noGrp="1"/>
+          </p:cNvSpPr>
           <p:nvPr>
             <p:ph type="dt" sz="quarter" idx="1"/>
           </p:nvPr>
         </p:nvSpPr>
         <p:spPr>
-          <a:prstGeom xmlns:a="http://schemas.openxmlformats.org/drawingml/2006/main" prst="rect">
-            <a:avLst/>
-          </a:prstGeom>
-        </p:spPr>
-        <p:txBody>
-          <a:bodyPr xmlns:a="http://schemas.openxmlformats.org/drawingml/2006/main"/>
-          <a:lstStyle xmlns:a="http://schemas.openxmlformats.org/drawingml/2006/main"/>
-          <a:p xmlns:a="http://schemas.openxmlformats.org/drawingml/2006/main"/>
+          <a:prstGeom prst="rect">
+            <a:avLst/>
+          </a:prstGeom>
+        </p:spPr>
+        <p:txBody>
+          <a:bodyPr/>
+          <a:lstStyle/>
+          <a:p>
+            <a:endParaRPr/>
+          </a:p>
         </p:txBody>
       </p:sp>
       <p:sp>
         <p:nvSpPr>
           <p:cNvPr id="4" name="Slide Image Placeholder"/>
-          <p:cNvSpPr/>
+          <p:cNvSpPr>
+            <a:spLocks noGrp="1" noRot="1" noChangeAspect="1"/>
+          </p:cNvSpPr>
           <p:nvPr>
             <p:ph type="sldImg" idx="2"/>
           </p:nvPr>
         </p:nvSpPr>
         <p:spPr>
-          <a:prstGeom xmlns:a="http://schemas.openxmlformats.org/drawingml/2006/main" prst="rect">
-            <a:avLst/>
-          </a:prstGeom>
-        </p:spPr>
-        <p:txBody>
-          <a:bodyPr xmlns:a="http://schemas.openxmlformats.org/drawingml/2006/main"/>
-          <a:lstStyle xmlns:a="http://schemas.openxmlformats.org/drawingml/2006/main"/>
-          <a:p xmlns:a="http://schemas.openxmlformats.org/drawingml/2006/main"/>
+          <a:prstGeom prst="rect">
+            <a:avLst/>
+          </a:prstGeom>
+        </p:spPr>
+        <p:txBody>
+          <a:bodyPr/>
+          <a:lstStyle/>
+          <a:p>
+            <a:endParaRPr/>
+          </a:p>
         </p:txBody>
       </p:sp>
       <p:sp>
         <p:nvSpPr>
           <p:cNvPr id="5" name="Notes Placeholder"/>
-          <p:cNvSpPr/>
+          <p:cNvSpPr>
+            <a:spLocks noGrp="1"/>
+          </p:cNvSpPr>
           <p:nvPr>
             <p:ph type="body" sz="quarter" idx="3"/>
           </p:nvPr>
         </p:nvSpPr>
         <p:spPr>
-          <a:prstGeom xmlns:a="http://schemas.openxmlformats.org/drawingml/2006/main" prst="rect">
-            <a:avLst/>
-          </a:prstGeom>
-        </p:spPr>
-        <p:txBody>
-          <a:bodyPr xmlns:a="http://schemas.openxmlformats.org/drawingml/2006/main"/>
-          <a:lstStyle xmlns:a="http://schemas.openxmlformats.org/drawingml/2006/main"/>
-          <a:p xmlns:a="http://schemas.openxmlformats.org/drawingml/2006/main"/>
+          <a:prstGeom prst="rect">
+            <a:avLst/>
+          </a:prstGeom>
+        </p:spPr>
+        <p:txBody>
+          <a:bodyPr/>
+          <a:lstStyle/>
+          <a:p>
+            <a:endParaRPr/>
+          </a:p>
         </p:txBody>
       </p:sp>
       <p:sp>
         <p:nvSpPr>
           <p:cNvPr id="6" name="Footer Placeholder"/>
-          <p:cNvSpPr/>
+          <p:cNvSpPr>
+            <a:spLocks noGrp="1"/>
+          </p:cNvSpPr>
           <p:nvPr>
             <p:ph type="ftr" sz="quarter" idx="4"/>
           </p:nvPr>
         </p:nvSpPr>
         <p:spPr>
-          <a:prstGeom xmlns:a="http://schemas.openxmlformats.org/drawingml/2006/main" prst="rect">
-            <a:avLst/>
-          </a:prstGeom>
-        </p:spPr>
-        <p:txBody>
-          <a:bodyPr xmlns:a="http://schemas.openxmlformats.org/drawingml/2006/main"/>
-          <a:lstStyle xmlns:a="http://schemas.openxmlformats.org/drawingml/2006/main"/>
-          <a:p xmlns:a="http://schemas.openxmlformats.org/drawingml/2006/main"/>
+          <a:prstGeom prst="rect">
+            <a:avLst/>
+          </a:prstGeom>
+        </p:spPr>
+        <p:txBody>
+          <a:bodyPr/>
+          <a:lstStyle/>
+          <a:p>
+            <a:endParaRPr/>
+          </a:p>
         </p:txBody>
       </p:sp>
       <p:sp>
         <p:nvSpPr>
           <p:cNvPr id="7" name="Slide Number Placeholder"/>
-          <p:cNvSpPr/>
+          <p:cNvSpPr>
+            <a:spLocks noGrp="1"/>
+          </p:cNvSpPr>
           <p:nvPr>
             <p:ph type="sldNum" sz="quarter" idx="5"/>
           </p:nvPr>
         </p:nvSpPr>
         <p:spPr>
-          <a:prstGeom xmlns:a="http://schemas.openxmlformats.org/drawingml/2006/main" prst="rect">
-            <a:avLst/>
-          </a:prstGeom>
-        </p:spPr>
-        <p:txBody>
-          <a:bodyPr xmlns:a="http://schemas.openxmlformats.org/drawingml/2006/main"/>
-          <a:lstStyle xmlns:a="http://schemas.openxmlformats.org/drawingml/2006/main"/>
-          <a:p xmlns:a="http://schemas.openxmlformats.org/drawingml/2006/main"/>
+          <a:prstGeom prst="rect">
+            <a:avLst/>
+          </a:prstGeom>
+        </p:spPr>
+        <p:txBody>
+          <a:bodyPr/>
+          <a:lstStyle/>
+          <a:p>
+            <a:endParaRPr/>
+          </a:p>
         </p:txBody>
       </p:sp>
     </p:spTree>
   </p:cSld>
   <p:clrMap bg1="lt1" tx1="dk1" bg2="lt2" tx2="dk2" accent1="accent1" accent2="accent2" accent3="accent3" accent4="accent4" accent5="accent5" accent6="accent6" hlink="hlink" folHlink="folHlink"/>
   <p:notesStyle>
-    <a:lvl1pPr xmlns:a="http://schemas.openxmlformats.org/drawingml/2006/main" marL="0" algn="l" defTabSz="914400" rtl="0" eaLnBrk="1" latinLnBrk="0" hangingPunct="1">
+    <a:lvl1pPr marL="0" algn="l" defTabSz="914400" rtl="0" eaLnBrk="1" latinLnBrk="0" hangingPunct="1">
       <a:defRPr sz="1200" kern="1200"/>
     </a:lvl1pPr>
   </p:notesStyle>
 </p:notesMaster>
 </file>
 
-<file path=ppt/notesMasters/theme/theme3.xml><?xml version="1.0" encoding="utf-8"?>
-<a:theme xmlns:a="http://schemas.openxmlformats.org/drawingml/2006/main" name="ChatGPT">
-  <a:themeElements>
-    <a:clrScheme name="ChatGPT">
-      <a:dk1>
-        <a:srgbClr val="000000"/>
-      </a:dk1>
-      <a:lt1>
-        <a:srgbClr val="FFFFFF"/>
-      </a:lt1>
-      <a:dk2>
-        <a:srgbClr val="0E2841"/>
-      </a:dk2>
-      <a:lt2>
-        <a:srgbClr val="E8E8E8"/>
-      </a:lt2>
-      <a:accent1>
-        <a:srgbClr val="156082"/>
-      </a:accent1>
-      <a:accent2>
-        <a:srgbClr val="E97132"/>
-      </a:accent2>
-      <a:accent3>
-        <a:srgbClr val="196B24"/>
-      </a:accent3>
-      <a:accent4>
-        <a:srgbClr val="0F9ED5"/>
-      </a:accent4>
-      <a:accent5>
-        <a:srgbClr val="A02B93"/>
-      </a:accent5>
-      <a:accent6>
-        <a:srgbClr val="4EA72E"/>
-      </a:accent6>
-      <a:hlink>
-        <a:srgbClr val="467886"/>
-      </a:hlink>
-      <a:folHlink>
-        <a:srgbClr val="96607D"/>
-      </a:folHlink>
-    </a:clrScheme>
-    <a:fontScheme name="Office">
-      <a:majorFont>
-        <a:latin typeface="Calibri Light"/>
-        <a:ea typeface="Calibri Light"/>
-        <a:cs typeface="Calibri Light"/>
-      </a:majorFont>
-      <a:minorFont>
-        <a:latin typeface="Calibri"/>
-        <a:ea typeface="Calibri"/>
-        <a:cs typeface="Calibri"/>
-      </a:minorFont>
-    </a:fontScheme>
-    <a:fmtScheme name="ChatGPT">
-      <a:fillStyleLst>
-        <a:solidFill>
-          <a:schemeClr val="phClr"/>
-        </a:solidFill>
-        <a:gradFill>
-          <a:gsLst>
-            <a:gs pos="0">
-              <a:schemeClr val="phClr">
-                <a:tint val="67000"/>
-                <a:lumMod val="110000"/>
-                <a:satMod val="105000"/>
-              </a:schemeClr>
-            </a:gs>
-            <a:gs pos="50000">
-              <a:schemeClr val="phClr">
-                <a:tint val="73000"/>
-                <a:lumMod val="105000"/>
-                <a:satMod val="103000"/>
-              </a:schemeClr>
-            </a:gs>
-            <a:gs pos="100000">
-              <a:schemeClr val="phClr">
-                <a:tint val="81000"/>
-                <a:lumMod val="105000"/>
-                <a:satMod val="109000"/>
-              </a:schemeClr>
-            </a:gs>
-          </a:gsLst>
-          <a:lin ang="5400000" scaled="0"/>
-        </a:gradFill>
-        <a:gradFill>
-          <a:gsLst>
-            <a:gs pos="0">
-              <a:schemeClr val="phClr">
-                <a:tint val="94000"/>
-                <a:lumMod val="102000"/>
-                <a:satMod val="103000"/>
-              </a:schemeClr>
-            </a:gs>
-            <a:gs pos="50000">
-              <a:schemeClr val="phClr">
-                <a:shade val="100000"/>
-                <a:lumMod val="100000"/>
-                <a:satMod val="110000"/>
-              </a:schemeClr>
-            </a:gs>
-            <a:gs pos="100000">
-              <a:schemeClr val="phClr">
-                <a:shade val="78000"/>
-                <a:lumMod val="99000"/>
-                <a:satMod val="120000"/>
-              </a:schemeClr>
-            </a:gs>
-          </a:gsLst>
-          <a:lin ang="5400000" scaled="0"/>
-        </a:gradFill>
-      </a:fillStyleLst>
-      <a:lnStyleLst>
-        <a:ln w="12700">
-          <a:solidFill>
-            <a:schemeClr val="phClr"/>
-          </a:solidFill>
-          <a:prstDash val="solid"/>
-        </a:ln>
-        <a:ln w="19050">
-          <a:solidFill>
-            <a:schemeClr val="phClr"/>
-          </a:solidFill>
-          <a:prstDash val="solid"/>
-        </a:ln>
-        <a:ln w="25400">
-          <a:solidFill>
-            <a:schemeClr val="phClr"/>
-          </a:solidFill>
-          <a:prstDash val="solid"/>
-        </a:ln>
-      </a:lnStyleLst>
-      <a:effectStyleLst>
-        <a:effectStyle>
-          <a:effectLst/>
-        </a:effectStyle>
-        <a:effectStyle>
-          <a:effectLst/>
-        </a:effectStyle>
-        <a:effectStyle>
-          <a:effectLst>
-            <a:outerShdw blurRad="57150" dist="19050" dir="5400000">
-              <a:srgbClr val="000000">
-                <a:alpha val="16000"/>
-              </a:srgbClr>
-            </a:outerShdw>
-          </a:effectLst>
-        </a:effectStyle>
-        <a:effectStyle>
-          <a:effectLst>
-            <a:outerShdw blurRad="19050" dist="9525" dir="5400000">
-              <a:srgbClr val="000000">
-                <a:alpha val="6000"/>
-              </a:srgbClr>
-            </a:outerShdw>
-          </a:effectLst>
-        </a:effectStyle>
-        <a:effectStyle>
-          <a:effectLst>
-            <a:outerShdw blurRad="28575" dist="9525" dir="5400000">
-              <a:srgbClr val="000000">
-                <a:alpha val="8000"/>
-              </a:srgbClr>
-            </a:outerShdw>
-          </a:effectLst>
-        </a:effectStyle>
-        <a:effectStyle>
-          <a:effectLst>
-            <a:outerShdw blurRad="57150" dist="19050" dir="5400000">
-              <a:srgbClr val="000000">
-                <a:alpha val="10000"/>
-              </a:srgbClr>
-            </a:outerShdw>
-          </a:effectLst>
-        </a:effectStyle>
-        <a:effectStyle>
-          <a:effectLst>
-            <a:outerShdw blurRad="114300" dist="38100" dir="5400000">
-              <a:srgbClr val="000000">
-                <a:alpha val="12000"/>
-              </a:srgbClr>
-            </a:outerShdw>
-          </a:effectLst>
-        </a:effectStyle>
-        <a:effectStyle>
-          <a:effectLst>
-            <a:outerShdw blurRad="171450" dist="57150" dir="5400000">
-              <a:srgbClr val="000000">
-                <a:alpha val="16000"/>
-              </a:srgbClr>
-            </a:outerShdw>
-          </a:effectLst>
-        </a:effectStyle>
-        <a:effectStyle>
-          <a:effectLst>
-            <a:outerShdw blurRad="266700" dist="95250" dir="5400000">
-              <a:srgbClr val="000000">
-                <a:alpha val="24000"/>
-              </a:srgbClr>
-            </a:outerShdw>
-          </a:effectLst>
-        </a:effectStyle>
-      </a:effectStyleLst>
-      <a:bgFillStyleLst>
-        <a:solidFill>
-          <a:schemeClr val="phClr"/>
-        </a:solidFill>
-        <a:solidFill>
-          <a:schemeClr val="phClr">
-            <a:tint val="95000"/>
-            <a:satMod val="170000"/>
-          </a:schemeClr>
-        </a:solidFill>
-        <a:gradFill>
-          <a:gsLst>
-            <a:gs pos="0">
-              <a:schemeClr val="phClr">
-                <a:tint val="93000"/>
-                <a:shade val="98000"/>
-                <a:lumMod val="102000"/>
-                <a:satMod val="150000"/>
-              </a:schemeClr>
-            </a:gs>
-            <a:gs pos="50000">
-              <a:schemeClr val="phClr">
-                <a:tint val="98000"/>
-                <a:shade val="90000"/>
-                <a:lumMod val="103000"/>
-                <a:satMod val="130000"/>
-              </a:schemeClr>
-            </a:gs>
-            <a:gs pos="100000">
-              <a:schemeClr val="phClr">
-                <a:shade val="63000"/>
-                <a:satMod val="120000"/>
-              </a:schemeClr>
-            </a:gs>
-          </a:gsLst>
-          <a:lin ang="5400000" scaled="0"/>
-        </a:gradFill>
-      </a:bgFillStyleLst>
-    </a:fmtScheme>
-  </a:themeElements>
-</a:theme>
-</file>
-
 <file path=ppt/notesSlides/notesSlide1.xml><?xml version="1.0" encoding="utf-8"?>
-<p:notes xmlns:p="http://schemas.openxmlformats.org/presentationml/2006/main">
+<p:notes xmlns:a="http://schemas.openxmlformats.org/drawingml/2006/main" xmlns:r="http://schemas.openxmlformats.org/officeDocument/2006/relationships" xmlns:p="http://schemas.openxmlformats.org/presentationml/2006/main">
   <p:cSld>
     <p:spTree>
       <p:nvGrpSpPr>
@@ -417,16 +296,21 @@
         <p:nvPr/>
       </p:nvGrpSpPr>
       <p:grpSpPr>
-        <a:xfrm xmlns:a="http://schemas.openxmlformats.org/drawingml/2006/main"/>
+        <a:xfrm>
+          <a:off x="0" y="0"/>
+          <a:ext cx="0" cy="0"/>
+          <a:chOff x="0" y="0"/>
+          <a:chExt cx="0" cy="0"/>
+        </a:xfrm>
       </p:grpSpPr>
       <p:sp>
         <p:nvSpPr>
           <p:cNvPr id="2" name="Slide Image Placeholder 1"/>
           <p:cNvSpPr>
-            <a:spLocks xmlns:a="http://schemas.openxmlformats.org/drawingml/2006/main" noGrp="1"/>
+            <a:spLocks noGrp="1" noRot="1" noChangeAspect="1"/>
           </p:cNvSpPr>
           <p:nvPr>
-            <p:ph type="sldImg" idx="0"/>
+            <p:ph type="sldImg"/>
           </p:nvPr>
         </p:nvSpPr>
         <p:spPr/>
@@ -435,7 +319,7 @@
         <p:nvSpPr>
           <p:cNvPr id="3" name="Notes Placeholder 2"/>
           <p:cNvSpPr>
-            <a:spLocks xmlns:a="http://schemas.openxmlformats.org/drawingml/2006/main" noGrp="1"/>
+            <a:spLocks noGrp="1"/>
           </p:cNvSpPr>
           <p:nvPr>
             <p:ph type="body" idx="1"/>
@@ -443,9 +327,9 @@
         </p:nvSpPr>
         <p:spPr/>
         <p:txBody>
-          <a:bodyPr xmlns:a="http://schemas.openxmlformats.org/drawingml/2006/main"/>
-          <a:lstStyle xmlns:a="http://schemas.openxmlformats.org/drawingml/2006/main"/>
-          <a:p xmlns:a="http://schemas.openxmlformats.org/drawingml/2006/main">
+          <a:bodyPr/>
+          <a:lstStyle/>
+          <a:p>
             <a:r>
               <a:t>Timing: 25 seconds. Introduce EasyInvoice as the team's React learning project. The slides take about four minutes, followed by the working demo. Sources: README.md and docs/planning/presentation-outline.md.</a:t>
             </a:r>
@@ -456,7 +340,7 @@
         <p:nvSpPr>
           <p:cNvPr id="4" name="Slide Number Placeholder 3"/>
           <p:cNvSpPr>
-            <a:spLocks xmlns:a="http://schemas.openxmlformats.org/drawingml/2006/main" noGrp="1"/>
+            <a:spLocks noGrp="1"/>
           </p:cNvSpPr>
           <p:nvPr>
             <p:ph type="sldNum" idx="5"/>
@@ -464,21 +348,23 @@
         </p:nvSpPr>
         <p:spPr/>
         <p:txBody>
-          <a:bodyPr xmlns:a="http://schemas.openxmlformats.org/drawingml/2006/main"/>
-          <a:lstStyle xmlns:a="http://schemas.openxmlformats.org/drawingml/2006/main"/>
-          <a:p xmlns:a="http://schemas.openxmlformats.org/drawingml/2006/main"/>
+          <a:bodyPr/>
+          <a:lstStyle/>
+          <a:p>
+            <a:endParaRPr/>
+          </a:p>
         </p:txBody>
       </p:sp>
     </p:spTree>
   </p:cSld>
   <p:clrMapOvr>
-    <a:masterClrMapping xmlns:a="http://schemas.openxmlformats.org/drawingml/2006/main"/>
+    <a:masterClrMapping/>
   </p:clrMapOvr>
 </p:notes>
 </file>
 
 <file path=ppt/notesSlides/notesSlide2.xml><?xml version="1.0" encoding="utf-8"?>
-<p:notes xmlns:p="http://schemas.openxmlformats.org/presentationml/2006/main">
+<p:notes xmlns:a="http://schemas.openxmlformats.org/drawingml/2006/main" xmlns:r="http://schemas.openxmlformats.org/officeDocument/2006/relationships" xmlns:p="http://schemas.openxmlformats.org/presentationml/2006/main">
   <p:cSld>
     <p:spTree>
       <p:nvGrpSpPr>
@@ -487,16 +373,21 @@
         <p:nvPr/>
       </p:nvGrpSpPr>
       <p:grpSpPr>
-        <a:xfrm xmlns:a="http://schemas.openxmlformats.org/drawingml/2006/main"/>
+        <a:xfrm>
+          <a:off x="0" y="0"/>
+          <a:ext cx="0" cy="0"/>
+          <a:chOff x="0" y="0"/>
+          <a:chExt cx="0" cy="0"/>
+        </a:xfrm>
       </p:grpSpPr>
       <p:sp>
         <p:nvSpPr>
           <p:cNvPr id="2" name="Slide Image Placeholder 1"/>
           <p:cNvSpPr>
-            <a:spLocks xmlns:a="http://schemas.openxmlformats.org/drawingml/2006/main" noGrp="1"/>
+            <a:spLocks noGrp="1" noRot="1" noChangeAspect="1"/>
           </p:cNvSpPr>
           <p:nvPr>
-            <p:ph type="sldImg" idx="0"/>
+            <p:ph type="sldImg"/>
           </p:nvPr>
         </p:nvSpPr>
         <p:spPr/>
@@ -505,7 +396,7 @@
         <p:nvSpPr>
           <p:cNvPr id="3" name="Notes Placeholder 2"/>
           <p:cNvSpPr>
-            <a:spLocks xmlns:a="http://schemas.openxmlformats.org/drawingml/2006/main" noGrp="1"/>
+            <a:spLocks noGrp="1"/>
           </p:cNvSpPr>
           <p:nvPr>
             <p:ph type="body" idx="1"/>
@@ -513,11 +404,44 @@
         </p:nvSpPr>
         <p:spPr/>
         <p:txBody>
-          <a:bodyPr xmlns:a="http://schemas.openxmlformats.org/drawingml/2006/main"/>
-          <a:lstStyle xmlns:a="http://schemas.openxmlformats.org/drawingml/2006/main"/>
-          <a:p xmlns:a="http://schemas.openxmlformats.org/drawingml/2006/main">
-            <a:r>
-              <a:t>Timing: 40 seconds. Explain that small finance teams need one view of invoice creation, transmission and collection status. EasyInvoice demonstrates that workflow but does not connect to the real InvoiceNow network. Sources: README.md and docs/images/Peppol-InvoiceNow.png.</a:t>
+          <a:bodyPr/>
+          <a:lstStyle/>
+          <a:p>
+            <a:r>
+              <a:rPr dirty="0"/>
+              <a:t>Timing: 40 seconds. Explain that small finance teams need one view of invoice creation, transmission and collection status. </a:t>
+            </a:r>
+            <a:r>
+              <a:rPr dirty="0" err="1"/>
+              <a:t>EasyInvoice</a:t>
+            </a:r>
+            <a:r>
+              <a:rPr dirty="0"/>
+              <a:t> demonstrates that workflow but does not connect to the real </a:t>
+            </a:r>
+            <a:r>
+              <a:rPr dirty="0" err="1"/>
+              <a:t>InvoiceNow</a:t>
+            </a:r>
+            <a:r>
+              <a:rPr dirty="0"/>
+              <a:t> network. Sources: </a:t>
+            </a:r>
+            <a:r>
+              <a:rPr dirty="0" err="1"/>
+              <a:t>README.md</a:t>
+            </a:r>
+            <a:r>
+              <a:rPr dirty="0"/>
+              <a:t> and docs/images/</a:t>
+            </a:r>
+            <a:r>
+              <a:rPr dirty="0" err="1"/>
+              <a:t>Peppol-InvoiceNow.png</a:t>
+            </a:r>
+            <a:r>
+              <a:rPr dirty="0"/>
+              <a:t>.</a:t>
             </a:r>
           </a:p>
         </p:txBody>
@@ -526,7 +450,7 @@
         <p:nvSpPr>
           <p:cNvPr id="4" name="Slide Number Placeholder 3"/>
           <p:cNvSpPr>
-            <a:spLocks xmlns:a="http://schemas.openxmlformats.org/drawingml/2006/main" noGrp="1"/>
+            <a:spLocks noGrp="1"/>
           </p:cNvSpPr>
           <p:nvPr>
             <p:ph type="sldNum" idx="5"/>
@@ -534,21 +458,23 @@
         </p:nvSpPr>
         <p:spPr/>
         <p:txBody>
-          <a:bodyPr xmlns:a="http://schemas.openxmlformats.org/drawingml/2006/main"/>
-          <a:lstStyle xmlns:a="http://schemas.openxmlformats.org/drawingml/2006/main"/>
-          <a:p xmlns:a="http://schemas.openxmlformats.org/drawingml/2006/main"/>
+          <a:bodyPr/>
+          <a:lstStyle/>
+          <a:p>
+            <a:endParaRPr/>
+          </a:p>
         </p:txBody>
       </p:sp>
     </p:spTree>
   </p:cSld>
   <p:clrMapOvr>
-    <a:masterClrMapping xmlns:a="http://schemas.openxmlformats.org/drawingml/2006/main"/>
+    <a:masterClrMapping/>
   </p:clrMapOvr>
 </p:notes>
 </file>
 
 <file path=ppt/notesSlides/notesSlide3.xml><?xml version="1.0" encoding="utf-8"?>
-<p:notes xmlns:p="http://schemas.openxmlformats.org/presentationml/2006/main">
+<p:notes xmlns:a="http://schemas.openxmlformats.org/drawingml/2006/main" xmlns:r="http://schemas.openxmlformats.org/officeDocument/2006/relationships" xmlns:p="http://schemas.openxmlformats.org/presentationml/2006/main">
   <p:cSld>
     <p:spTree>
       <p:nvGrpSpPr>
@@ -557,16 +483,21 @@
         <p:nvPr/>
       </p:nvGrpSpPr>
       <p:grpSpPr>
-        <a:xfrm xmlns:a="http://schemas.openxmlformats.org/drawingml/2006/main"/>
+        <a:xfrm>
+          <a:off x="0" y="0"/>
+          <a:ext cx="0" cy="0"/>
+          <a:chOff x="0" y="0"/>
+          <a:chExt cx="0" cy="0"/>
+        </a:xfrm>
       </p:grpSpPr>
       <p:sp>
         <p:nvSpPr>
           <p:cNvPr id="2" name="Slide Image Placeholder 1"/>
           <p:cNvSpPr>
-            <a:spLocks xmlns:a="http://schemas.openxmlformats.org/drawingml/2006/main" noGrp="1"/>
+            <a:spLocks noGrp="1" noRot="1" noChangeAspect="1"/>
           </p:cNvSpPr>
           <p:nvPr>
-            <p:ph type="sldImg" idx="0"/>
+            <p:ph type="sldImg"/>
           </p:nvPr>
         </p:nvSpPr>
         <p:spPr/>
@@ -575,7 +506,7 @@
         <p:nvSpPr>
           <p:cNvPr id="3" name="Notes Placeholder 2"/>
           <p:cNvSpPr>
-            <a:spLocks xmlns:a="http://schemas.openxmlformats.org/drawingml/2006/main" noGrp="1"/>
+            <a:spLocks noGrp="1"/>
           </p:cNvSpPr>
           <p:nvPr>
             <p:ph type="body" idx="1"/>
@@ -583,9 +514,9 @@
         </p:nvSpPr>
         <p:spPr/>
         <p:txBody>
-          <a:bodyPr xmlns:a="http://schemas.openxmlformats.org/drawingml/2006/main"/>
-          <a:lstStyle xmlns:a="http://schemas.openxmlformats.org/drawingml/2006/main"/>
-          <a:p xmlns:a="http://schemas.openxmlformats.org/drawingml/2006/main">
+          <a:bodyPr/>
+          <a:lstStyle/>
+          <a:p>
             <a:r>
               <a:t>Timing: 40 seconds. Point out the dashboard's operational view and the controlled create form. The live demo will show search, invoice creation, simulated transmission and status changes. Sources: docs/images/dashboard.png and docs/images/create-invoice.png.</a:t>
             </a:r>
@@ -596,7 +527,7 @@
         <p:nvSpPr>
           <p:cNvPr id="4" name="Slide Number Placeholder 3"/>
           <p:cNvSpPr>
-            <a:spLocks xmlns:a="http://schemas.openxmlformats.org/drawingml/2006/main" noGrp="1"/>
+            <a:spLocks noGrp="1"/>
           </p:cNvSpPr>
           <p:nvPr>
             <p:ph type="sldNum" idx="5"/>
@@ -604,21 +535,23 @@
         </p:nvSpPr>
         <p:spPr/>
         <p:txBody>
-          <a:bodyPr xmlns:a="http://schemas.openxmlformats.org/drawingml/2006/main"/>
-          <a:lstStyle xmlns:a="http://schemas.openxmlformats.org/drawingml/2006/main"/>
-          <a:p xmlns:a="http://schemas.openxmlformats.org/drawingml/2006/main"/>
+          <a:bodyPr/>
+          <a:lstStyle/>
+          <a:p>
+            <a:endParaRPr/>
+          </a:p>
         </p:txBody>
       </p:sp>
     </p:spTree>
   </p:cSld>
   <p:clrMapOvr>
-    <a:masterClrMapping xmlns:a="http://schemas.openxmlformats.org/drawingml/2006/main"/>
+    <a:masterClrMapping/>
   </p:clrMapOvr>
 </p:notes>
 </file>
 
 <file path=ppt/notesSlides/notesSlide4.xml><?xml version="1.0" encoding="utf-8"?>
-<p:notes xmlns:p="http://schemas.openxmlformats.org/presentationml/2006/main">
+<p:notes xmlns:a="http://schemas.openxmlformats.org/drawingml/2006/main" xmlns:r="http://schemas.openxmlformats.org/officeDocument/2006/relationships" xmlns:p="http://schemas.openxmlformats.org/presentationml/2006/main">
   <p:cSld>
     <p:spTree>
       <p:nvGrpSpPr>
@@ -627,16 +560,21 @@
         <p:nvPr/>
       </p:nvGrpSpPr>
       <p:grpSpPr>
-        <a:xfrm xmlns:a="http://schemas.openxmlformats.org/drawingml/2006/main"/>
+        <a:xfrm>
+          <a:off x="0" y="0"/>
+          <a:ext cx="0" cy="0"/>
+          <a:chOff x="0" y="0"/>
+          <a:chExt cx="0" cy="0"/>
+        </a:xfrm>
       </p:grpSpPr>
       <p:sp>
         <p:nvSpPr>
           <p:cNvPr id="2" name="Slide Image Placeholder 1"/>
           <p:cNvSpPr>
-            <a:spLocks xmlns:a="http://schemas.openxmlformats.org/drawingml/2006/main" noGrp="1"/>
+            <a:spLocks noGrp="1" noRot="1" noChangeAspect="1"/>
           </p:cNvSpPr>
           <p:nvPr>
-            <p:ph type="sldImg" idx="0"/>
+            <p:ph type="sldImg"/>
           </p:nvPr>
         </p:nvSpPr>
         <p:spPr/>
@@ -645,7 +583,7 @@
         <p:nvSpPr>
           <p:cNvPr id="3" name="Notes Placeholder 2"/>
           <p:cNvSpPr>
-            <a:spLocks xmlns:a="http://schemas.openxmlformats.org/drawingml/2006/main" noGrp="1"/>
+            <a:spLocks noGrp="1"/>
           </p:cNvSpPr>
           <p:nvPr>
             <p:ph type="body" idx="1"/>
@@ -653,9 +591,9 @@
         </p:nvSpPr>
         <p:spPr/>
         <p:txBody>
-          <a:bodyPr xmlns:a="http://schemas.openxmlformats.org/drawingml/2006/main"/>
-          <a:lstStyle xmlns:a="http://schemas.openxmlformats.org/drawingml/2006/main"/>
-          <a:p xmlns:a="http://schemas.openxmlformats.org/drawingml/2006/main">
+          <a:bodyPr/>
+          <a:lstStyle/>
+          <a:p>
             <a:r>
               <a:t>Timing: 50 seconds. Explain why each technology was chosen. MockAPI provides shared persistence without a custom backend. The free tier allowed two resources, so customers and products share referenceData. Sources: README.md, docs/engineering/architecture-design.md and docs/images/referenceData-customers.png.</a:t>
             </a:r>
@@ -666,7 +604,7 @@
         <p:nvSpPr>
           <p:cNvPr id="4" name="Slide Number Placeholder 3"/>
           <p:cNvSpPr>
-            <a:spLocks xmlns:a="http://schemas.openxmlformats.org/drawingml/2006/main" noGrp="1"/>
+            <a:spLocks noGrp="1"/>
           </p:cNvSpPr>
           <p:nvPr>
             <p:ph type="sldNum" idx="5"/>
@@ -674,21 +612,23 @@
         </p:nvSpPr>
         <p:spPr/>
         <p:txBody>
-          <a:bodyPr xmlns:a="http://schemas.openxmlformats.org/drawingml/2006/main"/>
-          <a:lstStyle xmlns:a="http://schemas.openxmlformats.org/drawingml/2006/main"/>
-          <a:p xmlns:a="http://schemas.openxmlformats.org/drawingml/2006/main"/>
+          <a:bodyPr/>
+          <a:lstStyle/>
+          <a:p>
+            <a:endParaRPr/>
+          </a:p>
         </p:txBody>
       </p:sp>
     </p:spTree>
   </p:cSld>
   <p:clrMapOvr>
-    <a:masterClrMapping xmlns:a="http://schemas.openxmlformats.org/drawingml/2006/main"/>
+    <a:masterClrMapping/>
   </p:clrMapOvr>
 </p:notes>
 </file>
 
 <file path=ppt/notesSlides/notesSlide5.xml><?xml version="1.0" encoding="utf-8"?>
-<p:notes xmlns:p="http://schemas.openxmlformats.org/presentationml/2006/main">
+<p:notes xmlns:a="http://schemas.openxmlformats.org/drawingml/2006/main" xmlns:r="http://schemas.openxmlformats.org/officeDocument/2006/relationships" xmlns:p="http://schemas.openxmlformats.org/presentationml/2006/main">
   <p:cSld>
     <p:spTree>
       <p:nvGrpSpPr>
@@ -697,16 +637,21 @@
         <p:nvPr/>
       </p:nvGrpSpPr>
       <p:grpSpPr>
-        <a:xfrm xmlns:a="http://schemas.openxmlformats.org/drawingml/2006/main"/>
+        <a:xfrm>
+          <a:off x="0" y="0"/>
+          <a:ext cx="0" cy="0"/>
+          <a:chOff x="0" y="0"/>
+          <a:chExt cx="0" cy="0"/>
+        </a:xfrm>
       </p:grpSpPr>
       <p:sp>
         <p:nvSpPr>
           <p:cNvPr id="2" name="Slide Image Placeholder 1"/>
           <p:cNvSpPr>
-            <a:spLocks xmlns:a="http://schemas.openxmlformats.org/drawingml/2006/main" noGrp="1"/>
+            <a:spLocks noGrp="1" noRot="1" noChangeAspect="1"/>
           </p:cNvSpPr>
           <p:nvPr>
-            <p:ph type="sldImg" idx="0"/>
+            <p:ph type="sldImg"/>
           </p:nvPr>
         </p:nvSpPr>
         <p:spPr/>
@@ -715,7 +660,7 @@
         <p:nvSpPr>
           <p:cNvPr id="3" name="Notes Placeholder 2"/>
           <p:cNvSpPr>
-            <a:spLocks xmlns:a="http://schemas.openxmlformats.org/drawingml/2006/main" noGrp="1"/>
+            <a:spLocks noGrp="1"/>
           </p:cNvSpPr>
           <p:nvPr>
             <p:ph type="body" idx="1"/>
@@ -723,9 +668,9 @@
         </p:nvSpPr>
         <p:spPr/>
         <p:txBody>
-          <a:bodyPr xmlns:a="http://schemas.openxmlformats.org/drawingml/2006/main"/>
-          <a:lstStyle xmlns:a="http://schemas.openxmlformats.org/drawingml/2006/main"/>
-          <a:p xmlns:a="http://schemas.openxmlformats.org/drawingml/2006/main">
+          <a:bodyPr/>
+          <a:lstStyle/>
+          <a:p>
             <a:r>
               <a:t>Timing: 45 seconds. Summarise each member's learning focus. Ralph built the initial React application, Jenn established behavioural testing, and John integrated persistence, permissions and repository automation. Sources: docs/planning/presentation-outline.md, README.md and docs/images/Full_tour_with_code.png.</a:t>
             </a:r>
@@ -736,7 +681,7 @@
         <p:nvSpPr>
           <p:cNvPr id="4" name="Slide Number Placeholder 3"/>
           <p:cNvSpPr>
-            <a:spLocks xmlns:a="http://schemas.openxmlformats.org/drawingml/2006/main" noGrp="1"/>
+            <a:spLocks noGrp="1"/>
           </p:cNvSpPr>
           <p:nvPr>
             <p:ph type="sldNum" idx="5"/>
@@ -744,21 +689,23 @@
         </p:nvSpPr>
         <p:spPr/>
         <p:txBody>
-          <a:bodyPr xmlns:a="http://schemas.openxmlformats.org/drawingml/2006/main"/>
-          <a:lstStyle xmlns:a="http://schemas.openxmlformats.org/drawingml/2006/main"/>
-          <a:p xmlns:a="http://schemas.openxmlformats.org/drawingml/2006/main"/>
+          <a:bodyPr/>
+          <a:lstStyle/>
+          <a:p>
+            <a:endParaRPr/>
+          </a:p>
         </p:txBody>
       </p:sp>
     </p:spTree>
   </p:cSld>
   <p:clrMapOvr>
-    <a:masterClrMapping xmlns:a="http://schemas.openxmlformats.org/drawingml/2006/main"/>
+    <a:masterClrMapping/>
   </p:clrMapOvr>
 </p:notes>
 </file>
 
 <file path=ppt/notesSlides/notesSlide6.xml><?xml version="1.0" encoding="utf-8"?>
-<p:notes xmlns:p="http://schemas.openxmlformats.org/presentationml/2006/main">
+<p:notes xmlns:a="http://schemas.openxmlformats.org/drawingml/2006/main" xmlns:r="http://schemas.openxmlformats.org/officeDocument/2006/relationships" xmlns:p="http://schemas.openxmlformats.org/presentationml/2006/main">
   <p:cSld>
     <p:spTree>
       <p:nvGrpSpPr>
@@ -767,16 +714,21 @@
         <p:nvPr/>
       </p:nvGrpSpPr>
       <p:grpSpPr>
-        <a:xfrm xmlns:a="http://schemas.openxmlformats.org/drawingml/2006/main"/>
+        <a:xfrm>
+          <a:off x="0" y="0"/>
+          <a:ext cx="0" cy="0"/>
+          <a:chOff x="0" y="0"/>
+          <a:chExt cx="0" cy="0"/>
+        </a:xfrm>
       </p:grpSpPr>
       <p:sp>
         <p:nvSpPr>
           <p:cNvPr id="2" name="Slide Image Placeholder 1"/>
           <p:cNvSpPr>
-            <a:spLocks xmlns:a="http://schemas.openxmlformats.org/drawingml/2006/main" noGrp="1"/>
+            <a:spLocks noGrp="1" noRot="1" noChangeAspect="1"/>
           </p:cNvSpPr>
           <p:nvPr>
-            <p:ph type="sldImg" idx="0"/>
+            <p:ph type="sldImg"/>
           </p:nvPr>
         </p:nvSpPr>
         <p:spPr/>
@@ -785,7 +737,7 @@
         <p:nvSpPr>
           <p:cNvPr id="3" name="Notes Placeholder 2"/>
           <p:cNvSpPr>
-            <a:spLocks xmlns:a="http://schemas.openxmlformats.org/drawingml/2006/main" noGrp="1"/>
+            <a:spLocks noGrp="1"/>
           </p:cNvSpPr>
           <p:nvPr>
             <p:ph type="body" idx="1"/>
@@ -793,9 +745,9 @@
         </p:nvSpPr>
         <p:spPr/>
         <p:txBody>
-          <a:bodyPr xmlns:a="http://schemas.openxmlformats.org/drawingml/2006/main"/>
-          <a:lstStyle xmlns:a="http://schemas.openxmlformats.org/drawingml/2006/main"/>
-          <a:p xmlns:a="http://schemas.openxmlformats.org/drawingml/2006/main">
+          <a:bodyPr/>
+          <a:lstStyle/>
+          <a:p>
             <a:r>
               <a:t>Timing: 50 seconds. Describe the resource-limit decision, the destructive schema-editor risk and the integration bug found by tests. Then move directly to the live demo: compare viewer and editor access, create and transmit an invoice, and mark a transmitted invoice paid. Sources: docs/planning/presentation-outline.md, docs/decisions/decisions-log.md and docs/images/Hints-ON.png.</a:t>
             </a:r>
@@ -806,7 +758,7 @@
         <p:nvSpPr>
           <p:cNvPr id="4" name="Slide Number Placeholder 3"/>
           <p:cNvSpPr>
-            <a:spLocks xmlns:a="http://schemas.openxmlformats.org/drawingml/2006/main" noGrp="1"/>
+            <a:spLocks noGrp="1"/>
           </p:cNvSpPr>
           <p:nvPr>
             <p:ph type="sldNum" idx="5"/>
@@ -814,21 +766,23 @@
         </p:nvSpPr>
         <p:spPr/>
         <p:txBody>
-          <a:bodyPr xmlns:a="http://schemas.openxmlformats.org/drawingml/2006/main"/>
-          <a:lstStyle xmlns:a="http://schemas.openxmlformats.org/drawingml/2006/main"/>
-          <a:p xmlns:a="http://schemas.openxmlformats.org/drawingml/2006/main"/>
+          <a:bodyPr/>
+          <a:lstStyle/>
+          <a:p>
+            <a:endParaRPr/>
+          </a:p>
         </p:txBody>
       </p:sp>
     </p:spTree>
   </p:cSld>
   <p:clrMapOvr>
-    <a:masterClrMapping xmlns:a="http://schemas.openxmlformats.org/drawingml/2006/main"/>
+    <a:masterClrMapping/>
   </p:clrMapOvr>
 </p:notes>
 </file>
 
 <file path=ppt/slideLayouts/slideLayout1.xml><?xml version="1.0" encoding="utf-8"?>
-<p:sldLayout xmlns:p="http://schemas.openxmlformats.org/presentationml/2006/main" type="title">
+<p:sldLayout xmlns:a="http://schemas.openxmlformats.org/drawingml/2006/main" xmlns:r="http://schemas.openxmlformats.org/officeDocument/2006/relationships" xmlns:p="http://schemas.openxmlformats.org/presentationml/2006/main" type="title">
   <p:cSld name="Title Slide">
     <p:spTree>
       <p:nvGrpSpPr>
@@ -837,19 +791,27 @@
         <p:nvPr/>
       </p:nvGrpSpPr>
       <p:grpSpPr>
-        <a:xfrm xmlns:a="http://schemas.openxmlformats.org/drawingml/2006/main"/>
+        <a:xfrm>
+          <a:off x="0" y="0"/>
+          <a:ext cx="0" cy="0"/>
+          <a:chOff x="0" y="0"/>
+          <a:chExt cx="0" cy="0"/>
+        </a:xfrm>
       </p:grpSpPr>
     </p:spTree>
   </p:cSld>
+  <p:clrMapOvr>
+    <a:masterClrMapping/>
+  </p:clrMapOvr>
 </p:sldLayout>
 </file>
 
 <file path=ppt/slideMasters/slideMaster1.xml><?xml version="1.0" encoding="utf-8"?>
-<p:sldMaster xmlns:p="http://schemas.openxmlformats.org/presentationml/2006/main">
+<p:sldMaster xmlns:a="http://schemas.openxmlformats.org/drawingml/2006/main" xmlns:r="http://schemas.openxmlformats.org/officeDocument/2006/relationships" xmlns:p="http://schemas.openxmlformats.org/presentationml/2006/main">
   <p:cSld name="Master">
     <p:bg>
       <p:bgRef idx="1001">
-        <a:schemeClr xmlns:a="http://schemas.openxmlformats.org/drawingml/2006/main" val="bg1"/>
+        <a:schemeClr val="bg1"/>
       </p:bgRef>
     </p:bg>
     <p:spTree>
@@ -859,17 +821,22 @@
         <p:nvPr/>
       </p:nvGrpSpPr>
       <p:grpSpPr>
-        <a:xfrm xmlns:a="http://schemas.openxmlformats.org/drawingml/2006/main"/>
+        <a:xfrm>
+          <a:off x="0" y="0"/>
+          <a:ext cx="0" cy="0"/>
+          <a:chOff x="0" y="0"/>
+          <a:chExt cx="0" cy="0"/>
+        </a:xfrm>
       </p:grpSpPr>
     </p:spTree>
   </p:cSld>
   <p:clrMap bg1="lt1" tx1="dk1" bg2="lt2" tx2="dk2" accent1="accent1" accent2="accent2" accent3="accent3" accent4="accent4" accent5="accent5" accent6="accent6" hlink="hlink" folHlink="folHlink"/>
   <p:sldLayoutIdLst>
-    <p:sldLayoutId xmlns:r="http://schemas.openxmlformats.org/officeDocument/2006/relationships" id="2147483649" r:id="R4d1af3b507d64875"/>
+    <p:sldLayoutId id="2147483649" r:id="rId1"/>
   </p:sldLayoutIdLst>
   <p:txStyles>
     <p:titleStyle>
-      <a:lvl1pPr xmlns:a="http://schemas.openxmlformats.org/drawingml/2006/main" algn="l">
+      <a:lvl1pPr algn="l">
         <a:lnSpc>
           <a:spcPct val="90000"/>
         </a:lnSpc>
@@ -888,7 +855,7 @@
       </a:lvl1pPr>
     </p:titleStyle>
     <p:bodyStyle>
-      <a:lvl1pPr xmlns:a="http://schemas.openxmlformats.org/drawingml/2006/main" marL="228600" indent="-228600" algn="l">
+      <a:lvl1pPr marL="228600" indent="-228600" algn="l">
         <a:lnSpc>
           <a:spcPct val="90000"/>
         </a:lnSpc>
@@ -905,7 +872,7 @@
           <a:cs typeface="+mn-lt"/>
         </a:defRPr>
       </a:lvl1pPr>
-      <a:lvl2pPr xmlns:a="http://schemas.openxmlformats.org/drawingml/2006/main" marL="685800" indent="-228600" algn="l">
+      <a:lvl2pPr marL="685800" indent="-228600" algn="l">
         <a:lnSpc>
           <a:spcPct val="90000"/>
         </a:lnSpc>
@@ -922,7 +889,7 @@
           <a:cs typeface="+mn-lt"/>
         </a:defRPr>
       </a:lvl2pPr>
-      <a:lvl3pPr xmlns:a="http://schemas.openxmlformats.org/drawingml/2006/main" marL="1143000" indent="-228600" algn="l">
+      <a:lvl3pPr marL="1143000" indent="-228600" algn="l">
         <a:lnSpc>
           <a:spcPct val="90000"/>
         </a:lnSpc>
@@ -939,7 +906,7 @@
           <a:cs typeface="+mn-lt"/>
         </a:defRPr>
       </a:lvl3pPr>
-      <a:lvl4pPr xmlns:a="http://schemas.openxmlformats.org/drawingml/2006/main" marL="1600200" indent="-228600" algn="l">
+      <a:lvl4pPr marL="1600200" indent="-228600" algn="l">
         <a:lnSpc>
           <a:spcPct val="90000"/>
         </a:lnSpc>
@@ -956,7 +923,7 @@
           <a:cs typeface="+mn-lt"/>
         </a:defRPr>
       </a:lvl4pPr>
-      <a:lvl5pPr xmlns:a="http://schemas.openxmlformats.org/drawingml/2006/main" marL="2057400" indent="-228600" algn="l">
+      <a:lvl5pPr marL="2057400" indent="-228600" algn="l">
         <a:lnSpc>
           <a:spcPct val="90000"/>
         </a:lnSpc>
@@ -973,7 +940,7 @@
           <a:cs typeface="+mn-lt"/>
         </a:defRPr>
       </a:lvl5pPr>
-      <a:lvl6pPr xmlns:a="http://schemas.openxmlformats.org/drawingml/2006/main" marL="2514600" indent="-228600" algn="l">
+      <a:lvl6pPr marL="2514600" indent="-228600" algn="l">
         <a:lnSpc>
           <a:spcPct val="90000"/>
         </a:lnSpc>
@@ -990,7 +957,7 @@
           <a:cs typeface="+mn-lt"/>
         </a:defRPr>
       </a:lvl6pPr>
-      <a:lvl7pPr xmlns:a="http://schemas.openxmlformats.org/drawingml/2006/main" marL="2971800" indent="-228600" algn="l">
+      <a:lvl7pPr marL="2971800" indent="-228600" algn="l">
         <a:lnSpc>
           <a:spcPct val="90000"/>
         </a:lnSpc>
@@ -1007,7 +974,7 @@
           <a:cs typeface="+mn-lt"/>
         </a:defRPr>
       </a:lvl7pPr>
-      <a:lvl8pPr xmlns:a="http://schemas.openxmlformats.org/drawingml/2006/main" marL="3429000" indent="-228600" algn="l">
+      <a:lvl8pPr marL="3429000" indent="-228600" algn="l">
         <a:lnSpc>
           <a:spcPct val="90000"/>
         </a:lnSpc>
@@ -1024,7 +991,7 @@
           <a:cs typeface="+mn-lt"/>
         </a:defRPr>
       </a:lvl8pPr>
-      <a:lvl9pPr xmlns:a="http://schemas.openxmlformats.org/drawingml/2006/main" marL="3886200" indent="-228600" algn="l">
+      <a:lvl9pPr marL="3886200" indent="-228600" algn="l">
         <a:lnSpc>
           <a:spcPct val="90000"/>
         </a:lnSpc>
@@ -1043,7 +1010,7 @@
       </a:lvl9pPr>
     </p:bodyStyle>
     <p:otherStyle>
-      <a:lvl1pPr xmlns:a="http://schemas.openxmlformats.org/drawingml/2006/main" marL="0" algn="l">
+      <a:lvl1pPr marL="0" algn="l">
         <a:buNone/>
         <a:defRPr sz="1800">
           <a:solidFill>
@@ -1054,7 +1021,7 @@
           <a:cs typeface="+mn-lt"/>
         </a:defRPr>
       </a:lvl1pPr>
-      <a:lvl2pPr xmlns:a="http://schemas.openxmlformats.org/drawingml/2006/main" marL="457200" algn="l">
+      <a:lvl2pPr marL="457200" algn="l">
         <a:buNone/>
         <a:defRPr sz="1800">
           <a:solidFill>
@@ -1065,7 +1032,7 @@
           <a:cs typeface="+mn-lt"/>
         </a:defRPr>
       </a:lvl2pPr>
-      <a:lvl3pPr xmlns:a="http://schemas.openxmlformats.org/drawingml/2006/main" marL="914400" algn="l">
+      <a:lvl3pPr marL="914400" algn="l">
         <a:buNone/>
         <a:defRPr sz="1800">
           <a:solidFill>
@@ -1076,7 +1043,7 @@
           <a:cs typeface="+mn-lt"/>
         </a:defRPr>
       </a:lvl3pPr>
-      <a:lvl4pPr xmlns:a="http://schemas.openxmlformats.org/drawingml/2006/main" marL="1371600" algn="l">
+      <a:lvl4pPr marL="1371600" algn="l">
         <a:buNone/>
         <a:defRPr sz="1800">
           <a:solidFill>
@@ -1087,7 +1054,7 @@
           <a:cs typeface="+mn-lt"/>
         </a:defRPr>
       </a:lvl4pPr>
-      <a:lvl5pPr xmlns:a="http://schemas.openxmlformats.org/drawingml/2006/main" marL="1828800" algn="l">
+      <a:lvl5pPr marL="1828800" algn="l">
         <a:buNone/>
         <a:defRPr sz="1800">
           <a:solidFill>
@@ -1098,7 +1065,7 @@
           <a:cs typeface="+mn-lt"/>
         </a:defRPr>
       </a:lvl5pPr>
-      <a:lvl6pPr xmlns:a="http://schemas.openxmlformats.org/drawingml/2006/main" marL="2286000" algn="l">
+      <a:lvl6pPr marL="2286000" algn="l">
         <a:buNone/>
         <a:defRPr sz="1800">
           <a:solidFill>
@@ -1109,7 +1076,7 @@
           <a:cs typeface="+mn-lt"/>
         </a:defRPr>
       </a:lvl6pPr>
-      <a:lvl7pPr xmlns:a="http://schemas.openxmlformats.org/drawingml/2006/main" marL="2743200" algn="l">
+      <a:lvl7pPr marL="2743200" algn="l">
         <a:buNone/>
         <a:defRPr sz="1800">
           <a:solidFill>
@@ -1120,7 +1087,7 @@
           <a:cs typeface="+mn-lt"/>
         </a:defRPr>
       </a:lvl7pPr>
-      <a:lvl8pPr xmlns:a="http://schemas.openxmlformats.org/drawingml/2006/main" marL="3200400" algn="l">
+      <a:lvl8pPr marL="3200400" algn="l">
         <a:buNone/>
         <a:defRPr sz="1800">
           <a:solidFill>
@@ -1131,7 +1098,7 @@
           <a:cs typeface="+mn-lt"/>
         </a:defRPr>
       </a:lvl8pPr>
-      <a:lvl9pPr xmlns:a="http://schemas.openxmlformats.org/drawingml/2006/main" marL="3657600" algn="l">
+      <a:lvl9pPr marL="3657600" algn="l">
         <a:buNone/>
         <a:defRPr sz="1800">
           <a:solidFill>
@@ -1147,259 +1114,15 @@
 </p:sldMaster>
 </file>
 
-<file path=ppt/slideMasters/theme/theme2.xml><?xml version="1.0" encoding="utf-8"?>
-<a:theme xmlns:a="http://schemas.openxmlformats.org/drawingml/2006/main" name="ChatGPT">
-  <a:themeElements>
-    <a:clrScheme name="ChatGPT">
-      <a:dk1>
-        <a:srgbClr val="000000"/>
-      </a:dk1>
-      <a:lt1>
-        <a:srgbClr val="FFFFFF"/>
-      </a:lt1>
-      <a:dk2>
-        <a:srgbClr val="0E2841"/>
-      </a:dk2>
-      <a:lt2>
-        <a:srgbClr val="E8E8E8"/>
-      </a:lt2>
-      <a:accent1>
-        <a:srgbClr val="156082"/>
-      </a:accent1>
-      <a:accent2>
-        <a:srgbClr val="E97132"/>
-      </a:accent2>
-      <a:accent3>
-        <a:srgbClr val="196B24"/>
-      </a:accent3>
-      <a:accent4>
-        <a:srgbClr val="0F9ED5"/>
-      </a:accent4>
-      <a:accent5>
-        <a:srgbClr val="A02B93"/>
-      </a:accent5>
-      <a:accent6>
-        <a:srgbClr val="4EA72E"/>
-      </a:accent6>
-      <a:hlink>
-        <a:srgbClr val="467886"/>
-      </a:hlink>
-      <a:folHlink>
-        <a:srgbClr val="96607D"/>
-      </a:folHlink>
-    </a:clrScheme>
-    <a:fontScheme name="Office">
-      <a:majorFont>
-        <a:latin typeface="Calibri Light"/>
-        <a:ea typeface="Calibri Light"/>
-        <a:cs typeface="Calibri Light"/>
-      </a:majorFont>
-      <a:minorFont>
-        <a:latin typeface="Calibri"/>
-        <a:ea typeface="Calibri"/>
-        <a:cs typeface="Calibri"/>
-      </a:minorFont>
-    </a:fontScheme>
-    <a:fmtScheme name="ChatGPT">
-      <a:fillStyleLst>
-        <a:solidFill>
-          <a:schemeClr val="phClr"/>
-        </a:solidFill>
-        <a:gradFill>
-          <a:gsLst>
-            <a:gs pos="0">
-              <a:schemeClr val="phClr">
-                <a:tint val="67000"/>
-                <a:lumMod val="110000"/>
-                <a:satMod val="105000"/>
-              </a:schemeClr>
-            </a:gs>
-            <a:gs pos="50000">
-              <a:schemeClr val="phClr">
-                <a:tint val="73000"/>
-                <a:lumMod val="105000"/>
-                <a:satMod val="103000"/>
-              </a:schemeClr>
-            </a:gs>
-            <a:gs pos="100000">
-              <a:schemeClr val="phClr">
-                <a:tint val="81000"/>
-                <a:lumMod val="105000"/>
-                <a:satMod val="109000"/>
-              </a:schemeClr>
-            </a:gs>
-          </a:gsLst>
-          <a:lin ang="5400000" scaled="0"/>
-        </a:gradFill>
-        <a:gradFill>
-          <a:gsLst>
-            <a:gs pos="0">
-              <a:schemeClr val="phClr">
-                <a:tint val="94000"/>
-                <a:lumMod val="102000"/>
-                <a:satMod val="103000"/>
-              </a:schemeClr>
-            </a:gs>
-            <a:gs pos="50000">
-              <a:schemeClr val="phClr">
-                <a:shade val="100000"/>
-                <a:lumMod val="100000"/>
-                <a:satMod val="110000"/>
-              </a:schemeClr>
-            </a:gs>
-            <a:gs pos="100000">
-              <a:schemeClr val="phClr">
-                <a:shade val="78000"/>
-                <a:lumMod val="99000"/>
-                <a:satMod val="120000"/>
-              </a:schemeClr>
-            </a:gs>
-          </a:gsLst>
-          <a:lin ang="5400000" scaled="0"/>
-        </a:gradFill>
-      </a:fillStyleLst>
-      <a:lnStyleLst>
-        <a:ln w="12700">
-          <a:solidFill>
-            <a:schemeClr val="phClr"/>
-          </a:solidFill>
-          <a:prstDash val="solid"/>
-        </a:ln>
-        <a:ln w="19050">
-          <a:solidFill>
-            <a:schemeClr val="phClr"/>
-          </a:solidFill>
-          <a:prstDash val="solid"/>
-        </a:ln>
-        <a:ln w="25400">
-          <a:solidFill>
-            <a:schemeClr val="phClr"/>
-          </a:solidFill>
-          <a:prstDash val="solid"/>
-        </a:ln>
-      </a:lnStyleLst>
-      <a:effectStyleLst>
-        <a:effectStyle>
-          <a:effectLst/>
-        </a:effectStyle>
-        <a:effectStyle>
-          <a:effectLst/>
-        </a:effectStyle>
-        <a:effectStyle>
-          <a:effectLst>
-            <a:outerShdw blurRad="57150" dist="19050" dir="5400000">
-              <a:srgbClr val="000000">
-                <a:alpha val="16000"/>
-              </a:srgbClr>
-            </a:outerShdw>
-          </a:effectLst>
-        </a:effectStyle>
-        <a:effectStyle>
-          <a:effectLst>
-            <a:outerShdw blurRad="19050" dist="9525" dir="5400000">
-              <a:srgbClr val="000000">
-                <a:alpha val="6000"/>
-              </a:srgbClr>
-            </a:outerShdw>
-          </a:effectLst>
-        </a:effectStyle>
-        <a:effectStyle>
-          <a:effectLst>
-            <a:outerShdw blurRad="28575" dist="9525" dir="5400000">
-              <a:srgbClr val="000000">
-                <a:alpha val="8000"/>
-              </a:srgbClr>
-            </a:outerShdw>
-          </a:effectLst>
-        </a:effectStyle>
-        <a:effectStyle>
-          <a:effectLst>
-            <a:outerShdw blurRad="57150" dist="19050" dir="5400000">
-              <a:srgbClr val="000000">
-                <a:alpha val="10000"/>
-              </a:srgbClr>
-            </a:outerShdw>
-          </a:effectLst>
-        </a:effectStyle>
-        <a:effectStyle>
-          <a:effectLst>
-            <a:outerShdw blurRad="114300" dist="38100" dir="5400000">
-              <a:srgbClr val="000000">
-                <a:alpha val="12000"/>
-              </a:srgbClr>
-            </a:outerShdw>
-          </a:effectLst>
-        </a:effectStyle>
-        <a:effectStyle>
-          <a:effectLst>
-            <a:outerShdw blurRad="171450" dist="57150" dir="5400000">
-              <a:srgbClr val="000000">
-                <a:alpha val="16000"/>
-              </a:srgbClr>
-            </a:outerShdw>
-          </a:effectLst>
-        </a:effectStyle>
-        <a:effectStyle>
-          <a:effectLst>
-            <a:outerShdw blurRad="266700" dist="95250" dir="5400000">
-              <a:srgbClr val="000000">
-                <a:alpha val="24000"/>
-              </a:srgbClr>
-            </a:outerShdw>
-          </a:effectLst>
-        </a:effectStyle>
-      </a:effectStyleLst>
-      <a:bgFillStyleLst>
-        <a:solidFill>
-          <a:schemeClr val="phClr"/>
-        </a:solidFill>
-        <a:solidFill>
-          <a:schemeClr val="phClr">
-            <a:tint val="95000"/>
-            <a:satMod val="170000"/>
-          </a:schemeClr>
-        </a:solidFill>
-        <a:gradFill>
-          <a:gsLst>
-            <a:gs pos="0">
-              <a:schemeClr val="phClr">
-                <a:tint val="93000"/>
-                <a:shade val="98000"/>
-                <a:lumMod val="102000"/>
-                <a:satMod val="150000"/>
-              </a:schemeClr>
-            </a:gs>
-            <a:gs pos="50000">
-              <a:schemeClr val="phClr">
-                <a:tint val="98000"/>
-                <a:shade val="90000"/>
-                <a:lumMod val="103000"/>
-                <a:satMod val="130000"/>
-              </a:schemeClr>
-            </a:gs>
-            <a:gs pos="100000">
-              <a:schemeClr val="phClr">
-                <a:shade val="63000"/>
-                <a:satMod val="120000"/>
-              </a:schemeClr>
-            </a:gs>
-          </a:gsLst>
-          <a:lin ang="5400000" scaled="0"/>
-        </a:gradFill>
-      </a:bgFillStyleLst>
-    </a:fmtScheme>
-  </a:themeElements>
-</a:theme>
-</file>
-
 <file path=ppt/slides/slide1.xml><?xml version="1.0" encoding="utf-8"?>
-<p:sld xmlns:p="http://schemas.openxmlformats.org/presentationml/2006/main">
+<p:sld xmlns:a="http://schemas.openxmlformats.org/drawingml/2006/main" xmlns:r="http://schemas.openxmlformats.org/officeDocument/2006/relationships" xmlns:p="http://schemas.openxmlformats.org/presentationml/2006/main">
   <p:cSld>
     <p:bg>
       <p:bgPr>
-        <a:solidFill xmlns:a="http://schemas.openxmlformats.org/drawingml/2006/main">
+        <a:solidFill>
           <a:srgbClr val="02225E"/>
         </a:solidFill>
+        <a:effectLst/>
       </p:bgPr>
     </p:bg>
     <p:spTree>
@@ -1409,71 +1132,83 @@
         <p:nvPr/>
       </p:nvGrpSpPr>
       <p:grpSpPr>
-        <a:xfrm xmlns:a="http://schemas.openxmlformats.org/drawingml/2006/main"/>
+        <a:xfrm>
+          <a:off x="0" y="0"/>
+          <a:ext cx="0" cy="0"/>
+          <a:chOff x="0" y="0"/>
+          <a:chExt cx="0" cy="0"/>
+        </a:xfrm>
       </p:grpSpPr>
       <p:sp>
         <p:nvSpPr>
-          <p:cNvPr id="16" name="">
-            <a:extLst xmlns:a="http://schemas.openxmlformats.org/drawingml/2006/main">
+          <p:cNvPr id="16" name="Rectangle 15">
+            <a:extLst>
               <a:ext uri="{FF2B5EF4-FFF2-40B4-BE49-F238E27FC236}">
                 <a16:creationId xmlns:a16="http://schemas.microsoft.com/office/drawing/2014/main" id="{FD8B709B-3F46-4C3D-9C04-275B0040D14A}"/>
               </a:ext>
             </a:extLst>
           </p:cNvPr>
           <p:cNvSpPr>
-            <a:spLocks xmlns:a="http://schemas.openxmlformats.org/drawingml/2006/main" noGrp="1"/>
-          </p:cNvSpPr>
-          <p:nvPr/>
-        </p:nvSpPr>
-        <p:spPr>
-          <a:xfrm xmlns:a="http://schemas.openxmlformats.org/drawingml/2006/main">
+            <a:spLocks noGrp="1"/>
+          </p:cNvSpPr>
+          <p:nvPr/>
+        </p:nvSpPr>
+        <p:spPr>
+          <a:xfrm>
             <a:off x="647700" y="1066800"/>
             <a:ext cx="1066800" cy="95250"/>
           </a:xfrm>
-          <a:prstGeom xmlns:a="http://schemas.openxmlformats.org/drawingml/2006/main" prst="rect">
-            <a:avLst/>
-          </a:prstGeom>
-          <a:solidFill xmlns:a="http://schemas.openxmlformats.org/drawingml/2006/main">
+          <a:prstGeom prst="rect">
+            <a:avLst/>
+          </a:prstGeom>
+          <a:solidFill>
             <a:srgbClr val="EDB86C"/>
           </a:solidFill>
-          <a:ln xmlns:a="http://schemas.openxmlformats.org/drawingml/2006/main" w="0">
-            <a:noFill/>
-          </a:ln>
-        </p:spPr>
-      </p:sp>
-      <p:sp>
-        <p:nvSpPr>
-          <p:cNvPr id="2" name="">
-            <a:extLst xmlns:a="http://schemas.openxmlformats.org/drawingml/2006/main">
+          <a:ln w="0">
+            <a:noFill/>
+          </a:ln>
+        </p:spPr>
+        <p:txBody>
+          <a:bodyPr/>
+          <a:lstStyle/>
+          <a:p>
+            <a:endParaRPr lang="en-US"/>
+          </a:p>
+        </p:txBody>
+      </p:sp>
+      <p:sp>
+        <p:nvSpPr>
+          <p:cNvPr id="2" name="Rectangle 1">
+            <a:extLst>
               <a:ext uri="{FF2B5EF4-FFF2-40B4-BE49-F238E27FC236}">
                 <a16:creationId xmlns:a16="http://schemas.microsoft.com/office/drawing/2014/main" id="{13308070-1EFE-43B7-A81C-6F522B9B4EFD}"/>
               </a:ext>
             </a:extLst>
           </p:cNvPr>
           <p:cNvSpPr>
-            <a:spLocks xmlns:a="http://schemas.openxmlformats.org/drawingml/2006/main" noGrp="1"/>
-          </p:cNvSpPr>
-          <p:nvPr/>
-        </p:nvSpPr>
-        <p:spPr>
-          <a:xfrm xmlns:a="http://schemas.openxmlformats.org/drawingml/2006/main">
+            <a:spLocks noGrp="1"/>
+          </p:cNvSpPr>
+          <p:nvPr/>
+        </p:nvSpPr>
+        <p:spPr>
+          <a:xfrm>
             <a:off x="647700" y="1428750"/>
             <a:ext cx="5715000" cy="952500"/>
           </a:xfrm>
-          <a:prstGeom xmlns:a="http://schemas.openxmlformats.org/drawingml/2006/main" prst="rect">
-            <a:avLst/>
-          </a:prstGeom>
-          <a:noFill xmlns:a="http://schemas.openxmlformats.org/drawingml/2006/main"/>
-          <a:ln xmlns:a="http://schemas.openxmlformats.org/drawingml/2006/main" w="0">
-            <a:noFill/>
-          </a:ln>
-        </p:spPr>
-        <p:txBody>
-          <a:bodyPr xmlns:a="http://schemas.openxmlformats.org/drawingml/2006/main">
+          <a:prstGeom prst="rect">
+            <a:avLst/>
+          </a:prstGeom>
+          <a:noFill/>
+          <a:ln w="0">
+            <a:noFill/>
+          </a:ln>
+        </p:spPr>
+        <p:txBody>
+          <a:bodyPr>
             <a:noAutofit/>
           </a:bodyPr>
-          <a:lstStyle xmlns:a="http://schemas.openxmlformats.org/drawingml/2006/main"/>
-          <a:p xmlns:a="http://schemas.openxmlformats.org/drawingml/2006/main">
+          <a:lstStyle/>
+          <a:p>
             <a:pPr>
               <a:defRPr sz="5100" b="1">
                 <a:solidFill>
@@ -1500,37 +1235,37 @@
       </p:sp>
       <p:sp>
         <p:nvSpPr>
-          <p:cNvPr id="3" name="">
-            <a:extLst xmlns:a="http://schemas.openxmlformats.org/drawingml/2006/main">
+          <p:cNvPr id="3" name="Rectangle 2">
+            <a:extLst>
               <a:ext uri="{FF2B5EF4-FFF2-40B4-BE49-F238E27FC236}">
                 <a16:creationId xmlns:a16="http://schemas.microsoft.com/office/drawing/2014/main" id="{3A04F65B-975A-4E0F-8BC4-140558674A17}"/>
               </a:ext>
             </a:extLst>
           </p:cNvPr>
           <p:cNvSpPr>
-            <a:spLocks xmlns:a="http://schemas.openxmlformats.org/drawingml/2006/main" noGrp="1"/>
-          </p:cNvSpPr>
-          <p:nvPr/>
-        </p:nvSpPr>
-        <p:spPr>
-          <a:xfrm xmlns:a="http://schemas.openxmlformats.org/drawingml/2006/main">
+            <a:spLocks noGrp="1"/>
+          </p:cNvSpPr>
+          <p:nvPr/>
+        </p:nvSpPr>
+        <p:spPr>
+          <a:xfrm>
             <a:off x="666750" y="2552700"/>
             <a:ext cx="5429250" cy="876300"/>
           </a:xfrm>
-          <a:prstGeom xmlns:a="http://schemas.openxmlformats.org/drawingml/2006/main" prst="rect">
-            <a:avLst/>
-          </a:prstGeom>
-          <a:noFill xmlns:a="http://schemas.openxmlformats.org/drawingml/2006/main"/>
-          <a:ln xmlns:a="http://schemas.openxmlformats.org/drawingml/2006/main" w="0">
-            <a:noFill/>
-          </a:ln>
-        </p:spPr>
-        <p:txBody>
-          <a:bodyPr xmlns:a="http://schemas.openxmlformats.org/drawingml/2006/main">
+          <a:prstGeom prst="rect">
+            <a:avLst/>
+          </a:prstGeom>
+          <a:noFill/>
+          <a:ln w="0">
+            <a:noFill/>
+          </a:ln>
+        </p:spPr>
+        <p:txBody>
+          <a:bodyPr>
             <a:noAutofit/>
           </a:bodyPr>
-          <a:lstStyle xmlns:a="http://schemas.openxmlformats.org/drawingml/2006/main"/>
-          <a:p xmlns:a="http://schemas.openxmlformats.org/drawingml/2006/main">
+          <a:lstStyle/>
+          <a:p>
             <a:pPr>
               <a:defRPr sz="2400" b="0">
                 <a:solidFill>
@@ -1542,7 +1277,7 @@
               </a:defRPr>
             </a:pPr>
             <a:r>
-              <a:rPr sz="2400" b="0">
+              <a:rPr sz="2400" b="0" dirty="0">
                 <a:solidFill>
                   <a:srgbClr val="FFFDF9"/>
                 </a:solidFill>
@@ -1553,7 +1288,7 @@
               <a:t>React learning project</a:t>
             </a:r>
           </a:p>
-          <a:p xmlns:a="http://schemas.openxmlformats.org/drawingml/2006/main">
+          <a:p>
             <a:pPr>
               <a:defRPr sz="2400" b="0">
                 <a:solidFill>
@@ -1565,7 +1300,7 @@
               </a:defRPr>
             </a:pPr>
             <a:r>
-              <a:rPr sz="2400" b="0">
+              <a:rPr sz="2400" b="0" dirty="0">
                 <a:solidFill>
                   <a:srgbClr val="FFFDF9"/>
                 </a:solidFill>
@@ -1580,37 +1315,37 @@
       </p:sp>
       <p:sp>
         <p:nvSpPr>
-          <p:cNvPr id="4" name="">
-            <a:extLst xmlns:a="http://schemas.openxmlformats.org/drawingml/2006/main">
+          <p:cNvPr id="4" name="Rectangle 3">
+            <a:extLst>
               <a:ext uri="{FF2B5EF4-FFF2-40B4-BE49-F238E27FC236}">
                 <a16:creationId xmlns:a16="http://schemas.microsoft.com/office/drawing/2014/main" id="{25125C0F-537A-4F90-B175-108181D6C2D6}"/>
               </a:ext>
             </a:extLst>
           </p:cNvPr>
           <p:cNvSpPr>
-            <a:spLocks xmlns:a="http://schemas.openxmlformats.org/drawingml/2006/main" noGrp="1"/>
-          </p:cNvSpPr>
-          <p:nvPr/>
-        </p:nvSpPr>
-        <p:spPr>
-          <a:xfrm xmlns:a="http://schemas.openxmlformats.org/drawingml/2006/main">
+            <a:spLocks noGrp="1"/>
+          </p:cNvSpPr>
+          <p:nvPr/>
+        </p:nvSpPr>
+        <p:spPr>
+          <a:xfrm>
             <a:off x="666750" y="3733800"/>
             <a:ext cx="5429250" cy="381000"/>
           </a:xfrm>
-          <a:prstGeom xmlns:a="http://schemas.openxmlformats.org/drawingml/2006/main" prst="rect">
-            <a:avLst/>
-          </a:prstGeom>
-          <a:noFill xmlns:a="http://schemas.openxmlformats.org/drawingml/2006/main"/>
-          <a:ln xmlns:a="http://schemas.openxmlformats.org/drawingml/2006/main" w="0">
-            <a:noFill/>
-          </a:ln>
-        </p:spPr>
-        <p:txBody>
-          <a:bodyPr xmlns:a="http://schemas.openxmlformats.org/drawingml/2006/main">
+          <a:prstGeom prst="rect">
+            <a:avLst/>
+          </a:prstGeom>
+          <a:noFill/>
+          <a:ln w="0">
+            <a:noFill/>
+          </a:ln>
+        </p:spPr>
+        <p:txBody>
+          <a:bodyPr>
             <a:noAutofit/>
           </a:bodyPr>
-          <a:lstStyle xmlns:a="http://schemas.openxmlformats.org/drawingml/2006/main"/>
-          <a:p xmlns:a="http://schemas.openxmlformats.org/drawingml/2006/main">
+          <a:lstStyle/>
+          <a:p>
             <a:pPr>
               <a:defRPr sz="1950" b="1">
                 <a:solidFill>
@@ -1622,7 +1357,7 @@
               </a:defRPr>
             </a:pPr>
             <a:r>
-              <a:rPr sz="1950" b="1">
+              <a:rPr sz="1950" b="1" dirty="0">
                 <a:solidFill>
                   <a:srgbClr val="EDB86C"/>
                 </a:solidFill>
@@ -1637,37 +1372,37 @@
       </p:sp>
       <p:sp>
         <p:nvSpPr>
-          <p:cNvPr id="5" name="">
-            <a:extLst xmlns:a="http://schemas.openxmlformats.org/drawingml/2006/main">
+          <p:cNvPr id="5" name="Rectangle 4">
+            <a:extLst>
               <a:ext uri="{FF2B5EF4-FFF2-40B4-BE49-F238E27FC236}">
                 <a16:creationId xmlns:a16="http://schemas.microsoft.com/office/drawing/2014/main" id="{9E571D75-0351-4DF9-A1ED-7A3C08B197CD}"/>
               </a:ext>
             </a:extLst>
           </p:cNvPr>
           <p:cNvSpPr>
-            <a:spLocks xmlns:a="http://schemas.openxmlformats.org/drawingml/2006/main" noGrp="1"/>
-          </p:cNvSpPr>
-          <p:nvPr/>
-        </p:nvSpPr>
-        <p:spPr>
-          <a:xfrm xmlns:a="http://schemas.openxmlformats.org/drawingml/2006/main">
+            <a:spLocks noGrp="1"/>
+          </p:cNvSpPr>
+          <p:nvPr/>
+        </p:nvSpPr>
+        <p:spPr>
+          <a:xfrm>
             <a:off x="6838950" y="1028700"/>
             <a:ext cx="4286250" cy="361950"/>
           </a:xfrm>
-          <a:prstGeom xmlns:a="http://schemas.openxmlformats.org/drawingml/2006/main" prst="rect">
-            <a:avLst/>
-          </a:prstGeom>
-          <a:noFill xmlns:a="http://schemas.openxmlformats.org/drawingml/2006/main"/>
-          <a:ln xmlns:a="http://schemas.openxmlformats.org/drawingml/2006/main" w="0">
-            <a:noFill/>
-          </a:ln>
-        </p:spPr>
-        <p:txBody>
-          <a:bodyPr xmlns:a="http://schemas.openxmlformats.org/drawingml/2006/main">
+          <a:prstGeom prst="rect">
+            <a:avLst/>
+          </a:prstGeom>
+          <a:noFill/>
+          <a:ln w="0">
+            <a:noFill/>
+          </a:ln>
+        </p:spPr>
+        <p:txBody>
+          <a:bodyPr>
             <a:noAutofit/>
           </a:bodyPr>
-          <a:lstStyle xmlns:a="http://schemas.openxmlformats.org/drawingml/2006/main"/>
-          <a:p xmlns:a="http://schemas.openxmlformats.org/drawingml/2006/main">
+          <a:lstStyle/>
+          <a:p>
             <a:pPr>
               <a:defRPr sz="1800" b="1">
                 <a:solidFill>
@@ -1694,92 +1429,99 @@
       </p:sp>
       <p:sp>
         <p:nvSpPr>
-          <p:cNvPr id="6" name="">
-            <a:extLst xmlns:a="http://schemas.openxmlformats.org/drawingml/2006/main">
+          <p:cNvPr id="6" name="Oval 5">
+            <a:extLst>
               <a:ext uri="{FF2B5EF4-FFF2-40B4-BE49-F238E27FC236}">
                 <a16:creationId xmlns:a16="http://schemas.microsoft.com/office/drawing/2014/main" id="{A1F00682-F270-45BE-B76B-5B055F0E38AA}"/>
               </a:ext>
             </a:extLst>
           </p:cNvPr>
           <p:cNvSpPr>
-            <a:spLocks xmlns:a="http://schemas.openxmlformats.org/drawingml/2006/main" noGrp="1"/>
-          </p:cNvSpPr>
-          <p:nvPr/>
-        </p:nvSpPr>
-        <p:spPr>
-          <a:xfrm xmlns:a="http://schemas.openxmlformats.org/drawingml/2006/main">
+            <a:spLocks noGrp="1"/>
+          </p:cNvSpPr>
+          <p:nvPr/>
+        </p:nvSpPr>
+        <p:spPr>
+          <a:xfrm>
             <a:off x="6515100" y="1543050"/>
             <a:ext cx="1428750" cy="1428750"/>
           </a:xfrm>
-          <a:prstGeom xmlns:a="http://schemas.openxmlformats.org/drawingml/2006/main" prst="ellipse">
-            <a:avLst/>
-          </a:prstGeom>
-          <a:solidFill xmlns:a="http://schemas.openxmlformats.org/drawingml/2006/main">
+          <a:prstGeom prst="ellipse">
+            <a:avLst/>
+          </a:prstGeom>
+          <a:solidFill>
             <a:srgbClr val="FFFDF9"/>
           </a:solidFill>
-          <a:ln xmlns:a="http://schemas.openxmlformats.org/drawingml/2006/main" w="0">
-            <a:noFill/>
-          </a:ln>
-        </p:spPr>
+          <a:ln w="0">
+            <a:noFill/>
+          </a:ln>
+        </p:spPr>
+        <p:txBody>
+          <a:bodyPr/>
+          <a:lstStyle/>
+          <a:p>
+            <a:endParaRPr lang="en-US"/>
+          </a:p>
+        </p:txBody>
       </p:sp>
       <p:pic>
         <p:nvPicPr>
-          <p:cNvPr id="22" name=""/>
+          <p:cNvPr id="22" name="Picture 21"/>
           <p:cNvPicPr>
-            <a:picLocks xmlns:a="http://schemas.openxmlformats.org/drawingml/2006/main" noChangeAspect="1"/>
+            <a:picLocks noChangeAspect="1"/>
           </p:cNvPicPr>
           <p:nvPr/>
         </p:nvPicPr>
         <p:blipFill>
-          <a:blip xmlns:r="http://schemas.openxmlformats.org/officeDocument/2006/relationships" xmlns:a="http://schemas.openxmlformats.org/drawingml/2006/main" r:embed="R6239bb7382ce4240"/>
-          <a:srcRect xmlns:a="http://schemas.openxmlformats.org/drawingml/2006/main" l="0" t="11170" r="0" b="11170"/>
-          <a:stretch xmlns:a="http://schemas.openxmlformats.org/drawingml/2006/main">
-            <a:fillRect l="0" t="0" r="0" b="0"/>
+          <a:blip r:embed="rId3"/>
+          <a:srcRect t="11170" b="11170"/>
+          <a:stretch>
+            <a:fillRect/>
           </a:stretch>
         </p:blipFill>
         <p:spPr>
-          <a:xfrm xmlns:a="http://schemas.openxmlformats.org/drawingml/2006/main">
+          <a:xfrm>
             <a:off x="6572250" y="1600200"/>
             <a:ext cx="1314450" cy="1314450"/>
           </a:xfrm>
-          <a:prstGeom xmlns:a="http://schemas.openxmlformats.org/drawingml/2006/main" prst="ellipse">
+          <a:prstGeom prst="ellipse">
             <a:avLst/>
           </a:prstGeom>
         </p:spPr>
       </p:pic>
       <p:sp>
         <p:nvSpPr>
-          <p:cNvPr id="8" name="">
-            <a:extLst xmlns:a="http://schemas.openxmlformats.org/drawingml/2006/main">
+          <p:cNvPr id="8" name="Rectangle 7">
+            <a:extLst>
               <a:ext uri="{FF2B5EF4-FFF2-40B4-BE49-F238E27FC236}">
                 <a16:creationId xmlns:a16="http://schemas.microsoft.com/office/drawing/2014/main" id="{C8A4F339-A9C2-4DB9-ABAE-54C6D64C1996}"/>
               </a:ext>
             </a:extLst>
           </p:cNvPr>
           <p:cNvSpPr>
-            <a:spLocks xmlns:a="http://schemas.openxmlformats.org/drawingml/2006/main" noGrp="1"/>
-          </p:cNvSpPr>
-          <p:nvPr/>
-        </p:nvSpPr>
-        <p:spPr>
-          <a:xfrm xmlns:a="http://schemas.openxmlformats.org/drawingml/2006/main">
+            <a:spLocks noGrp="1"/>
+          </p:cNvSpPr>
+          <p:nvPr/>
+        </p:nvSpPr>
+        <p:spPr>
+          <a:xfrm>
             <a:off x="6400800" y="3105150"/>
             <a:ext cx="1657350" cy="647700"/>
           </a:xfrm>
-          <a:prstGeom xmlns:a="http://schemas.openxmlformats.org/drawingml/2006/main" prst="rect">
-            <a:avLst/>
-          </a:prstGeom>
-          <a:noFill xmlns:a="http://schemas.openxmlformats.org/drawingml/2006/main"/>
-          <a:ln xmlns:a="http://schemas.openxmlformats.org/drawingml/2006/main" w="0">
-            <a:noFill/>
-          </a:ln>
-        </p:spPr>
-        <p:txBody>
-          <a:bodyPr xmlns:a="http://schemas.openxmlformats.org/drawingml/2006/main">
+          <a:prstGeom prst="rect">
+            <a:avLst/>
+          </a:prstGeom>
+          <a:noFill/>
+          <a:ln w="0">
+            <a:noFill/>
+          </a:ln>
+        </p:spPr>
+        <p:txBody>
+          <a:bodyPr>
             <a:noAutofit/>
           </a:bodyPr>
-          <a:lstStyle xmlns:a="http://schemas.openxmlformats.org/drawingml/2006/main"/>
-          <a:p xmlns:a="http://schemas.openxmlformats.org/drawingml/2006/main">
+          <a:lstStyle/>
+          <a:p>
             <a:pPr>
               <a:defRPr sz="1800" b="1">
                 <a:solidFill>
@@ -1802,7 +1544,7 @@
               <a:t>Ralph Koh</a:t>
             </a:r>
           </a:p>
-          <a:p xmlns:a="http://schemas.openxmlformats.org/drawingml/2006/main">
+          <a:p>
             <a:pPr>
               <a:defRPr sz="1800" b="1">
                 <a:solidFill>
@@ -1829,92 +1571,99 @@
       </p:sp>
       <p:sp>
         <p:nvSpPr>
-          <p:cNvPr id="9" name="">
-            <a:extLst xmlns:a="http://schemas.openxmlformats.org/drawingml/2006/main">
+          <p:cNvPr id="9" name="Oval 8">
+            <a:extLst>
               <a:ext uri="{FF2B5EF4-FFF2-40B4-BE49-F238E27FC236}">
                 <a16:creationId xmlns:a16="http://schemas.microsoft.com/office/drawing/2014/main" id="{88C85996-6319-4925-8C34-1E9A56233AB1}"/>
               </a:ext>
             </a:extLst>
           </p:cNvPr>
           <p:cNvSpPr>
-            <a:spLocks xmlns:a="http://schemas.openxmlformats.org/drawingml/2006/main" noGrp="1"/>
-          </p:cNvSpPr>
-          <p:nvPr/>
-        </p:nvSpPr>
-        <p:spPr>
-          <a:xfrm xmlns:a="http://schemas.openxmlformats.org/drawingml/2006/main">
+            <a:spLocks noGrp="1"/>
+          </p:cNvSpPr>
+          <p:nvPr/>
+        </p:nvSpPr>
+        <p:spPr>
+          <a:xfrm>
             <a:off x="8362950" y="1543050"/>
             <a:ext cx="1428750" cy="1428750"/>
           </a:xfrm>
-          <a:prstGeom xmlns:a="http://schemas.openxmlformats.org/drawingml/2006/main" prst="ellipse">
-            <a:avLst/>
-          </a:prstGeom>
-          <a:solidFill xmlns:a="http://schemas.openxmlformats.org/drawingml/2006/main">
+          <a:prstGeom prst="ellipse">
+            <a:avLst/>
+          </a:prstGeom>
+          <a:solidFill>
             <a:srgbClr val="FFFDF9"/>
           </a:solidFill>
-          <a:ln xmlns:a="http://schemas.openxmlformats.org/drawingml/2006/main" w="0">
-            <a:noFill/>
-          </a:ln>
-        </p:spPr>
+          <a:ln w="0">
+            <a:noFill/>
+          </a:ln>
+        </p:spPr>
+        <p:txBody>
+          <a:bodyPr/>
+          <a:lstStyle/>
+          <a:p>
+            <a:endParaRPr lang="en-US"/>
+          </a:p>
+        </p:txBody>
       </p:sp>
       <p:pic>
         <p:nvPicPr>
-          <p:cNvPr id="25" name=""/>
+          <p:cNvPr id="25" name="Picture 24"/>
           <p:cNvPicPr>
-            <a:picLocks xmlns:a="http://schemas.openxmlformats.org/drawingml/2006/main" noChangeAspect="1"/>
+            <a:picLocks noChangeAspect="1"/>
           </p:cNvPicPr>
           <p:nvPr/>
         </p:nvPicPr>
         <p:blipFill>
-          <a:blip xmlns:r="http://schemas.openxmlformats.org/officeDocument/2006/relationships" xmlns:a="http://schemas.openxmlformats.org/drawingml/2006/main" r:embed="R97bb13b8c26b4152"/>
-          <a:srcRect xmlns:a="http://schemas.openxmlformats.org/drawingml/2006/main" l="0" t="12454" r="0" b="12454"/>
-          <a:stretch xmlns:a="http://schemas.openxmlformats.org/drawingml/2006/main">
-            <a:fillRect l="0" t="0" r="0" b="0"/>
+          <a:blip r:embed="rId4"/>
+          <a:srcRect t="12454" b="12454"/>
+          <a:stretch>
+            <a:fillRect/>
           </a:stretch>
         </p:blipFill>
         <p:spPr>
-          <a:xfrm xmlns:a="http://schemas.openxmlformats.org/drawingml/2006/main">
+          <a:xfrm>
             <a:off x="8420100" y="1600200"/>
             <a:ext cx="1314450" cy="1314450"/>
           </a:xfrm>
-          <a:prstGeom xmlns:a="http://schemas.openxmlformats.org/drawingml/2006/main" prst="ellipse">
+          <a:prstGeom prst="ellipse">
             <a:avLst/>
           </a:prstGeom>
         </p:spPr>
       </p:pic>
       <p:sp>
         <p:nvSpPr>
-          <p:cNvPr id="11" name="">
-            <a:extLst xmlns:a="http://schemas.openxmlformats.org/drawingml/2006/main">
+          <p:cNvPr id="11" name="Rectangle 10">
+            <a:extLst>
               <a:ext uri="{FF2B5EF4-FFF2-40B4-BE49-F238E27FC236}">
                 <a16:creationId xmlns:a16="http://schemas.microsoft.com/office/drawing/2014/main" id="{F2612257-0F36-440A-AE46-EDD4B610E1E3}"/>
               </a:ext>
             </a:extLst>
           </p:cNvPr>
           <p:cNvSpPr>
-            <a:spLocks xmlns:a="http://schemas.openxmlformats.org/drawingml/2006/main" noGrp="1"/>
-          </p:cNvSpPr>
-          <p:nvPr/>
-        </p:nvSpPr>
-        <p:spPr>
-          <a:xfrm xmlns:a="http://schemas.openxmlformats.org/drawingml/2006/main">
+            <a:spLocks noGrp="1"/>
+          </p:cNvSpPr>
+          <p:nvPr/>
+        </p:nvSpPr>
+        <p:spPr>
+          <a:xfrm>
             <a:off x="8248650" y="3105150"/>
             <a:ext cx="1657350" cy="647700"/>
           </a:xfrm>
-          <a:prstGeom xmlns:a="http://schemas.openxmlformats.org/drawingml/2006/main" prst="rect">
-            <a:avLst/>
-          </a:prstGeom>
-          <a:noFill xmlns:a="http://schemas.openxmlformats.org/drawingml/2006/main"/>
-          <a:ln xmlns:a="http://schemas.openxmlformats.org/drawingml/2006/main" w="0">
-            <a:noFill/>
-          </a:ln>
-        </p:spPr>
-        <p:txBody>
-          <a:bodyPr xmlns:a="http://schemas.openxmlformats.org/drawingml/2006/main">
+          <a:prstGeom prst="rect">
+            <a:avLst/>
+          </a:prstGeom>
+          <a:noFill/>
+          <a:ln w="0">
+            <a:noFill/>
+          </a:ln>
+        </p:spPr>
+        <p:txBody>
+          <a:bodyPr>
             <a:noAutofit/>
           </a:bodyPr>
-          <a:lstStyle xmlns:a="http://schemas.openxmlformats.org/drawingml/2006/main"/>
-          <a:p xmlns:a="http://schemas.openxmlformats.org/drawingml/2006/main">
+          <a:lstStyle/>
+          <a:p>
             <a:pPr>
               <a:defRPr sz="1800" b="1">
                 <a:solidFill>
@@ -1937,7 +1686,7 @@
               <a:t>Ang Jenn</a:t>
             </a:r>
           </a:p>
-          <a:p xmlns:a="http://schemas.openxmlformats.org/drawingml/2006/main">
+          <a:p>
             <a:pPr>
               <a:defRPr sz="1800" b="1">
                 <a:solidFill>
@@ -1964,92 +1713,99 @@
       </p:sp>
       <p:sp>
         <p:nvSpPr>
-          <p:cNvPr id="12" name="">
-            <a:extLst xmlns:a="http://schemas.openxmlformats.org/drawingml/2006/main">
+          <p:cNvPr id="12" name="Oval 11">
+            <a:extLst>
               <a:ext uri="{FF2B5EF4-FFF2-40B4-BE49-F238E27FC236}">
                 <a16:creationId xmlns:a16="http://schemas.microsoft.com/office/drawing/2014/main" id="{F5917E8C-8199-4C07-8E13-860877AE3358}"/>
               </a:ext>
             </a:extLst>
           </p:cNvPr>
           <p:cNvSpPr>
-            <a:spLocks xmlns:a="http://schemas.openxmlformats.org/drawingml/2006/main" noGrp="1"/>
-          </p:cNvSpPr>
-          <p:nvPr/>
-        </p:nvSpPr>
-        <p:spPr>
-          <a:xfrm xmlns:a="http://schemas.openxmlformats.org/drawingml/2006/main">
+            <a:spLocks noGrp="1"/>
+          </p:cNvSpPr>
+          <p:nvPr/>
+        </p:nvSpPr>
+        <p:spPr>
+          <a:xfrm>
             <a:off x="10210800" y="1543050"/>
             <a:ext cx="1428750" cy="1428750"/>
           </a:xfrm>
-          <a:prstGeom xmlns:a="http://schemas.openxmlformats.org/drawingml/2006/main" prst="ellipse">
-            <a:avLst/>
-          </a:prstGeom>
-          <a:solidFill xmlns:a="http://schemas.openxmlformats.org/drawingml/2006/main">
+          <a:prstGeom prst="ellipse">
+            <a:avLst/>
+          </a:prstGeom>
+          <a:solidFill>
             <a:srgbClr val="FFFDF9"/>
           </a:solidFill>
-          <a:ln xmlns:a="http://schemas.openxmlformats.org/drawingml/2006/main" w="0">
-            <a:noFill/>
-          </a:ln>
-        </p:spPr>
+          <a:ln w="0">
+            <a:noFill/>
+          </a:ln>
+        </p:spPr>
+        <p:txBody>
+          <a:bodyPr/>
+          <a:lstStyle/>
+          <a:p>
+            <a:endParaRPr lang="en-US"/>
+          </a:p>
+        </p:txBody>
       </p:sp>
       <p:pic>
         <p:nvPicPr>
-          <p:cNvPr id="28" name=""/>
+          <p:cNvPr id="28" name="Picture 27"/>
           <p:cNvPicPr>
-            <a:picLocks xmlns:a="http://schemas.openxmlformats.org/drawingml/2006/main" noChangeAspect="1"/>
+            <a:picLocks noChangeAspect="1"/>
           </p:cNvPicPr>
           <p:nvPr/>
         </p:nvPicPr>
         <p:blipFill>
-          <a:blip xmlns:r="http://schemas.openxmlformats.org/officeDocument/2006/relationships" xmlns:a="http://schemas.openxmlformats.org/drawingml/2006/main" r:embed="Rc29af975555c4665"/>
-          <a:srcRect xmlns:a="http://schemas.openxmlformats.org/drawingml/2006/main" l="0" t="0" r="0" b="0"/>
-          <a:stretch xmlns:a="http://schemas.openxmlformats.org/drawingml/2006/main">
-            <a:fillRect l="0" t="0" r="0" b="0"/>
+          <a:blip r:embed="rId5"/>
+          <a:srcRect/>
+          <a:stretch>
+            <a:fillRect/>
           </a:stretch>
         </p:blipFill>
         <p:spPr>
-          <a:xfrm xmlns:a="http://schemas.openxmlformats.org/drawingml/2006/main">
+          <a:xfrm>
             <a:off x="10267950" y="1600200"/>
             <a:ext cx="1314450" cy="1314450"/>
           </a:xfrm>
-          <a:prstGeom xmlns:a="http://schemas.openxmlformats.org/drawingml/2006/main" prst="ellipse">
+          <a:prstGeom prst="ellipse">
             <a:avLst/>
           </a:prstGeom>
         </p:spPr>
       </p:pic>
       <p:sp>
         <p:nvSpPr>
-          <p:cNvPr id="14" name="">
-            <a:extLst xmlns:a="http://schemas.openxmlformats.org/drawingml/2006/main">
+          <p:cNvPr id="14" name="Rectangle 13">
+            <a:extLst>
               <a:ext uri="{FF2B5EF4-FFF2-40B4-BE49-F238E27FC236}">
                 <a16:creationId xmlns:a16="http://schemas.microsoft.com/office/drawing/2014/main" id="{49983D24-5364-4F0A-843D-9D6D70B6C48E}"/>
               </a:ext>
             </a:extLst>
           </p:cNvPr>
           <p:cNvSpPr>
-            <a:spLocks xmlns:a="http://schemas.openxmlformats.org/drawingml/2006/main" noGrp="1"/>
-          </p:cNvSpPr>
-          <p:nvPr/>
-        </p:nvSpPr>
-        <p:spPr>
-          <a:xfrm xmlns:a="http://schemas.openxmlformats.org/drawingml/2006/main">
+            <a:spLocks noGrp="1"/>
+          </p:cNvSpPr>
+          <p:nvPr/>
+        </p:nvSpPr>
+        <p:spPr>
+          <a:xfrm>
             <a:off x="10096500" y="3105150"/>
             <a:ext cx="1657350" cy="647700"/>
           </a:xfrm>
-          <a:prstGeom xmlns:a="http://schemas.openxmlformats.org/drawingml/2006/main" prst="rect">
-            <a:avLst/>
-          </a:prstGeom>
-          <a:noFill xmlns:a="http://schemas.openxmlformats.org/drawingml/2006/main"/>
-          <a:ln xmlns:a="http://schemas.openxmlformats.org/drawingml/2006/main" w="0">
-            <a:noFill/>
-          </a:ln>
-        </p:spPr>
-        <p:txBody>
-          <a:bodyPr xmlns:a="http://schemas.openxmlformats.org/drawingml/2006/main">
+          <a:prstGeom prst="rect">
+            <a:avLst/>
+          </a:prstGeom>
+          <a:noFill/>
+          <a:ln w="0">
+            <a:noFill/>
+          </a:ln>
+        </p:spPr>
+        <p:txBody>
+          <a:bodyPr>
             <a:noAutofit/>
           </a:bodyPr>
-          <a:lstStyle xmlns:a="http://schemas.openxmlformats.org/drawingml/2006/main"/>
-          <a:p xmlns:a="http://schemas.openxmlformats.org/drawingml/2006/main">
+          <a:lstStyle/>
+          <a:p>
             <a:pPr>
               <a:defRPr sz="1800" b="1">
                 <a:solidFill>
@@ -2072,7 +1828,7 @@
               <a:t>John</a:t>
             </a:r>
           </a:p>
-          <a:p xmlns:a="http://schemas.openxmlformats.org/drawingml/2006/main">
+          <a:p>
             <a:pPr>
               <a:defRPr sz="1800" b="1">
                 <a:solidFill>
@@ -2099,37 +1855,37 @@
       </p:sp>
       <p:sp>
         <p:nvSpPr>
-          <p:cNvPr id="15" name="">
-            <a:extLst xmlns:a="http://schemas.openxmlformats.org/drawingml/2006/main">
+          <p:cNvPr id="15" name="Rectangle 14">
+            <a:extLst>
               <a:ext uri="{FF2B5EF4-FFF2-40B4-BE49-F238E27FC236}">
                 <a16:creationId xmlns:a16="http://schemas.microsoft.com/office/drawing/2014/main" id="{C8E574C0-2A27-4246-8B1D-F151F2FA5B76}"/>
               </a:ext>
             </a:extLst>
           </p:cNvPr>
           <p:cNvSpPr>
-            <a:spLocks xmlns:a="http://schemas.openxmlformats.org/drawingml/2006/main" noGrp="1"/>
-          </p:cNvSpPr>
-          <p:nvPr/>
-        </p:nvSpPr>
-        <p:spPr>
-          <a:xfrm xmlns:a="http://schemas.openxmlformats.org/drawingml/2006/main">
+            <a:spLocks noGrp="1"/>
+          </p:cNvSpPr>
+          <p:nvPr/>
+        </p:nvSpPr>
+        <p:spPr>
+          <a:xfrm>
             <a:off x="666750" y="5810250"/>
             <a:ext cx="5905500" cy="361950"/>
           </a:xfrm>
-          <a:prstGeom xmlns:a="http://schemas.openxmlformats.org/drawingml/2006/main" prst="rect">
-            <a:avLst/>
-          </a:prstGeom>
-          <a:noFill xmlns:a="http://schemas.openxmlformats.org/drawingml/2006/main"/>
-          <a:ln xmlns:a="http://schemas.openxmlformats.org/drawingml/2006/main" w="0">
-            <a:noFill/>
-          </a:ln>
-        </p:spPr>
-        <p:txBody>
-          <a:bodyPr xmlns:a="http://schemas.openxmlformats.org/drawingml/2006/main">
+          <a:prstGeom prst="rect">
+            <a:avLst/>
+          </a:prstGeom>
+          <a:noFill/>
+          <a:ln w="0">
+            <a:noFill/>
+          </a:ln>
+        </p:spPr>
+        <p:txBody>
+          <a:bodyPr>
             <a:noAutofit/>
           </a:bodyPr>
-          <a:lstStyle xmlns:a="http://schemas.openxmlformats.org/drawingml/2006/main"/>
-          <a:p xmlns:a="http://schemas.openxmlformats.org/drawingml/2006/main">
+          <a:lstStyle/>
+          <a:p>
             <a:pPr>
               <a:defRPr sz="1800" b="0">
                 <a:solidFill>
@@ -2161,17 +1917,21 @@
       </p:ext>
     </p:extLst>
   </p:cSld>
+  <p:clrMapOvr>
+    <a:masterClrMapping/>
+  </p:clrMapOvr>
 </p:sld>
 </file>
 
 <file path=ppt/slides/slide2.xml><?xml version="1.0" encoding="utf-8"?>
-<p:sld xmlns:p="http://schemas.openxmlformats.org/presentationml/2006/main">
+<p:sld xmlns:a="http://schemas.openxmlformats.org/drawingml/2006/main" xmlns:r="http://schemas.openxmlformats.org/officeDocument/2006/relationships" xmlns:p="http://schemas.openxmlformats.org/presentationml/2006/main">
   <p:cSld>
     <p:bg>
       <p:bgPr>
-        <a:solidFill xmlns:a="http://schemas.openxmlformats.org/drawingml/2006/main">
+        <a:solidFill>
           <a:srgbClr val="F6F5F1"/>
         </a:solidFill>
+        <a:effectLst/>
       </p:bgPr>
     </p:bg>
     <p:spTree>
@@ -2181,41 +1941,46 @@
         <p:nvPr/>
       </p:nvGrpSpPr>
       <p:grpSpPr>
-        <a:xfrm xmlns:a="http://schemas.openxmlformats.org/drawingml/2006/main"/>
+        <a:xfrm>
+          <a:off x="0" y="0"/>
+          <a:ext cx="0" cy="0"/>
+          <a:chOff x="0" y="0"/>
+          <a:chExt cx="0" cy="0"/>
+        </a:xfrm>
       </p:grpSpPr>
       <p:sp>
         <p:nvSpPr>
-          <p:cNvPr id="11" name="">
-            <a:extLst xmlns:a="http://schemas.openxmlformats.org/drawingml/2006/main">
+          <p:cNvPr id="11" name="Rectangle 10">
+            <a:extLst>
               <a:ext uri="{FF2B5EF4-FFF2-40B4-BE49-F238E27FC236}">
                 <a16:creationId xmlns:a16="http://schemas.microsoft.com/office/drawing/2014/main" id="{3DA481DF-A516-45DB-9816-6089587A0EF0}"/>
               </a:ext>
             </a:extLst>
           </p:cNvPr>
           <p:cNvSpPr>
-            <a:spLocks xmlns:a="http://schemas.openxmlformats.org/drawingml/2006/main" noGrp="1"/>
-          </p:cNvSpPr>
-          <p:nvPr/>
-        </p:nvSpPr>
-        <p:spPr>
-          <a:xfrm xmlns:a="http://schemas.openxmlformats.org/drawingml/2006/main">
+            <a:spLocks noGrp="1"/>
+          </p:cNvSpPr>
+          <p:nvPr/>
+        </p:nvSpPr>
+        <p:spPr>
+          <a:xfrm>
             <a:off x="609600" y="361950"/>
             <a:ext cx="10477500" cy="552450"/>
           </a:xfrm>
-          <a:prstGeom xmlns:a="http://schemas.openxmlformats.org/drawingml/2006/main" prst="rect">
-            <a:avLst/>
-          </a:prstGeom>
-          <a:noFill xmlns:a="http://schemas.openxmlformats.org/drawingml/2006/main"/>
-          <a:ln xmlns:a="http://schemas.openxmlformats.org/drawingml/2006/main" w="0">
-            <a:noFill/>
-          </a:ln>
-        </p:spPr>
-        <p:txBody>
-          <a:bodyPr xmlns:a="http://schemas.openxmlformats.org/drawingml/2006/main">
+          <a:prstGeom prst="rect">
+            <a:avLst/>
+          </a:prstGeom>
+          <a:noFill/>
+          <a:ln w="0">
+            <a:noFill/>
+          </a:ln>
+        </p:spPr>
+        <p:txBody>
+          <a:bodyPr>
             <a:noAutofit/>
           </a:bodyPr>
-          <a:lstStyle xmlns:a="http://schemas.openxmlformats.org/drawingml/2006/main"/>
-          <a:p xmlns:a="http://schemas.openxmlformats.org/drawingml/2006/main">
+          <a:lstStyle/>
+          <a:p>
             <a:pPr>
               <a:defRPr sz="3150" b="1">
                 <a:solidFill>
@@ -2242,67 +2007,74 @@
       </p:sp>
       <p:sp>
         <p:nvSpPr>
-          <p:cNvPr id="2" name="">
-            <a:extLst xmlns:a="http://schemas.openxmlformats.org/drawingml/2006/main">
+          <p:cNvPr id="2" name="Rectangle 1">
+            <a:extLst>
               <a:ext uri="{FF2B5EF4-FFF2-40B4-BE49-F238E27FC236}">
                 <a16:creationId xmlns:a16="http://schemas.microsoft.com/office/drawing/2014/main" id="{D1B49653-3074-4C02-9FCC-BC7066999C66}"/>
               </a:ext>
             </a:extLst>
           </p:cNvPr>
           <p:cNvSpPr>
-            <a:spLocks xmlns:a="http://schemas.openxmlformats.org/drawingml/2006/main" noGrp="1"/>
-          </p:cNvSpPr>
-          <p:nvPr/>
-        </p:nvSpPr>
-        <p:spPr>
-          <a:xfrm xmlns:a="http://schemas.openxmlformats.org/drawingml/2006/main">
+            <a:spLocks noGrp="1"/>
+          </p:cNvSpPr>
+          <p:nvPr/>
+        </p:nvSpPr>
+        <p:spPr>
+          <a:xfrm>
             <a:off x="609600" y="971550"/>
             <a:ext cx="914400" cy="57150"/>
           </a:xfrm>
-          <a:prstGeom xmlns:a="http://schemas.openxmlformats.org/drawingml/2006/main" prst="rect">
-            <a:avLst/>
-          </a:prstGeom>
-          <a:solidFill xmlns:a="http://schemas.openxmlformats.org/drawingml/2006/main">
+          <a:prstGeom prst="rect">
+            <a:avLst/>
+          </a:prstGeom>
+          <a:solidFill>
             <a:srgbClr val="EDB86C"/>
           </a:solidFill>
-          <a:ln xmlns:a="http://schemas.openxmlformats.org/drawingml/2006/main" w="0">
-            <a:noFill/>
-          </a:ln>
-        </p:spPr>
-      </p:sp>
-      <p:sp>
-        <p:nvSpPr>
-          <p:cNvPr id="3" name="">
-            <a:extLst xmlns:a="http://schemas.openxmlformats.org/drawingml/2006/main">
+          <a:ln w="0">
+            <a:noFill/>
+          </a:ln>
+        </p:spPr>
+        <p:txBody>
+          <a:bodyPr/>
+          <a:lstStyle/>
+          <a:p>
+            <a:endParaRPr lang="en-US"/>
+          </a:p>
+        </p:txBody>
+      </p:sp>
+      <p:sp>
+        <p:nvSpPr>
+          <p:cNvPr id="3" name="Rectangle 2">
+            <a:extLst>
               <a:ext uri="{FF2B5EF4-FFF2-40B4-BE49-F238E27FC236}">
                 <a16:creationId xmlns:a16="http://schemas.microsoft.com/office/drawing/2014/main" id="{7C4F490F-171C-4CCC-A296-73E8F2329F0C}"/>
               </a:ext>
             </a:extLst>
           </p:cNvPr>
           <p:cNvSpPr>
-            <a:spLocks xmlns:a="http://schemas.openxmlformats.org/drawingml/2006/main" noGrp="1"/>
-          </p:cNvSpPr>
-          <p:nvPr/>
-        </p:nvSpPr>
-        <p:spPr>
-          <a:xfrm xmlns:a="http://schemas.openxmlformats.org/drawingml/2006/main">
+            <a:spLocks noGrp="1"/>
+          </p:cNvSpPr>
+          <p:nvPr/>
+        </p:nvSpPr>
+        <p:spPr>
+          <a:xfrm>
             <a:off x="609600" y="1333500"/>
             <a:ext cx="5334000" cy="1066800"/>
           </a:xfrm>
-          <a:prstGeom xmlns:a="http://schemas.openxmlformats.org/drawingml/2006/main" prst="rect">
-            <a:avLst/>
-          </a:prstGeom>
-          <a:noFill xmlns:a="http://schemas.openxmlformats.org/drawingml/2006/main"/>
-          <a:ln xmlns:a="http://schemas.openxmlformats.org/drawingml/2006/main" w="0">
-            <a:noFill/>
-          </a:ln>
-        </p:spPr>
-        <p:txBody>
-          <a:bodyPr xmlns:a="http://schemas.openxmlformats.org/drawingml/2006/main">
+          <a:prstGeom prst="rect">
+            <a:avLst/>
+          </a:prstGeom>
+          <a:noFill/>
+          <a:ln w="0">
+            <a:noFill/>
+          </a:ln>
+        </p:spPr>
+        <p:txBody>
+          <a:bodyPr>
             <a:noAutofit/>
           </a:bodyPr>
-          <a:lstStyle xmlns:a="http://schemas.openxmlformats.org/drawingml/2006/main"/>
-          <a:p xmlns:a="http://schemas.openxmlformats.org/drawingml/2006/main">
+          <a:lstStyle/>
+          <a:p>
             <a:pPr>
               <a:defRPr sz="2550" b="1">
                 <a:solidFill>
@@ -2325,7 +2097,7 @@
               <a:t>Invoice work spans creation,</a:t>
             </a:r>
           </a:p>
-          <a:p xmlns:a="http://schemas.openxmlformats.org/drawingml/2006/main">
+          <a:p>
             <a:pPr>
               <a:defRPr sz="2550" b="1">
                 <a:solidFill>
@@ -2352,37 +2124,37 @@
       </p:sp>
       <p:sp>
         <p:nvSpPr>
-          <p:cNvPr id="4" name="">
-            <a:extLst xmlns:a="http://schemas.openxmlformats.org/drawingml/2006/main">
+          <p:cNvPr id="4" name="Rectangle 3">
+            <a:extLst>
               <a:ext uri="{FF2B5EF4-FFF2-40B4-BE49-F238E27FC236}">
                 <a16:creationId xmlns:a16="http://schemas.microsoft.com/office/drawing/2014/main" id="{5DE57CCC-6BD7-4EA0-BC65-64079AECCEE1}"/>
               </a:ext>
             </a:extLst>
           </p:cNvPr>
           <p:cNvSpPr>
-            <a:spLocks xmlns:a="http://schemas.openxmlformats.org/drawingml/2006/main" noGrp="1"/>
-          </p:cNvSpPr>
-          <p:nvPr/>
-        </p:nvSpPr>
-        <p:spPr>
-          <a:xfrm xmlns:a="http://schemas.openxmlformats.org/drawingml/2006/main">
-            <a:off x="609600" y="2609850"/>
+            <a:spLocks noGrp="1"/>
+          </p:cNvSpPr>
+          <p:nvPr/>
+        </p:nvSpPr>
+        <p:spPr>
+          <a:xfrm>
+            <a:off x="609600" y="2276361"/>
             <a:ext cx="1714500" cy="323850"/>
           </a:xfrm>
-          <a:prstGeom xmlns:a="http://schemas.openxmlformats.org/drawingml/2006/main" prst="rect">
-            <a:avLst/>
-          </a:prstGeom>
-          <a:noFill xmlns:a="http://schemas.openxmlformats.org/drawingml/2006/main"/>
-          <a:ln xmlns:a="http://schemas.openxmlformats.org/drawingml/2006/main" w="0">
-            <a:noFill/>
-          </a:ln>
-        </p:spPr>
-        <p:txBody>
-          <a:bodyPr xmlns:a="http://schemas.openxmlformats.org/drawingml/2006/main">
+          <a:prstGeom prst="rect">
+            <a:avLst/>
+          </a:prstGeom>
+          <a:noFill/>
+          <a:ln w="0">
+            <a:noFill/>
+          </a:ln>
+        </p:spPr>
+        <p:txBody>
+          <a:bodyPr>
             <a:noAutofit/>
           </a:bodyPr>
-          <a:lstStyle xmlns:a="http://schemas.openxmlformats.org/drawingml/2006/main"/>
-          <a:p xmlns:a="http://schemas.openxmlformats.org/drawingml/2006/main">
+          <a:lstStyle/>
+          <a:p>
             <a:pPr>
               <a:defRPr sz="1875" b="1">
                 <a:solidFill>
@@ -2394,7 +2166,7 @@
               </a:defRPr>
             </a:pPr>
             <a:r>
-              <a:rPr sz="1875" b="1">
+              <a:rPr sz="1875" b="1" dirty="0">
                 <a:solidFill>
                   <a:srgbClr val="A45F3F"/>
                 </a:solidFill>
@@ -2409,37 +2181,37 @@
       </p:sp>
       <p:sp>
         <p:nvSpPr>
-          <p:cNvPr id="5" name="">
-            <a:extLst xmlns:a="http://schemas.openxmlformats.org/drawingml/2006/main">
+          <p:cNvPr id="5" name="Rectangle 4">
+            <a:extLst>
               <a:ext uri="{FF2B5EF4-FFF2-40B4-BE49-F238E27FC236}">
                 <a16:creationId xmlns:a16="http://schemas.microsoft.com/office/drawing/2014/main" id="{D4269A88-DC1B-4882-9A89-C9567C3B54B4}"/>
               </a:ext>
             </a:extLst>
           </p:cNvPr>
           <p:cNvSpPr>
-            <a:spLocks xmlns:a="http://schemas.openxmlformats.org/drawingml/2006/main" noGrp="1"/>
-          </p:cNvSpPr>
-          <p:nvPr/>
-        </p:nvSpPr>
-        <p:spPr>
-          <a:xfrm xmlns:a="http://schemas.openxmlformats.org/drawingml/2006/main">
-            <a:off x="609600" y="2971800"/>
+            <a:spLocks noGrp="1"/>
+          </p:cNvSpPr>
+          <p:nvPr/>
+        </p:nvSpPr>
+        <p:spPr>
+          <a:xfrm>
+            <a:off x="609600" y="2638311"/>
             <a:ext cx="4953000" cy="781050"/>
           </a:xfrm>
-          <a:prstGeom xmlns:a="http://schemas.openxmlformats.org/drawingml/2006/main" prst="rect">
-            <a:avLst/>
-          </a:prstGeom>
-          <a:noFill xmlns:a="http://schemas.openxmlformats.org/drawingml/2006/main"/>
-          <a:ln xmlns:a="http://schemas.openxmlformats.org/drawingml/2006/main" w="0">
-            <a:noFill/>
-          </a:ln>
-        </p:spPr>
-        <p:txBody>
-          <a:bodyPr xmlns:a="http://schemas.openxmlformats.org/drawingml/2006/main">
+          <a:prstGeom prst="rect">
+            <a:avLst/>
+          </a:prstGeom>
+          <a:noFill/>
+          <a:ln w="0">
+            <a:noFill/>
+          </a:ln>
+        </p:spPr>
+        <p:txBody>
+          <a:bodyPr>
             <a:noAutofit/>
           </a:bodyPr>
-          <a:lstStyle xmlns:a="http://schemas.openxmlformats.org/drawingml/2006/main"/>
-          <a:p xmlns:a="http://schemas.openxmlformats.org/drawingml/2006/main">
+          <a:lstStyle/>
+          <a:p>
             <a:pPr>
               <a:defRPr sz="2100" b="0">
                 <a:solidFill>
@@ -2451,7 +2223,7 @@
               </a:defRPr>
             </a:pPr>
             <a:r>
-              <a:rPr sz="2100" b="0">
+              <a:rPr sz="2100" b="0" dirty="0">
                 <a:solidFill>
                   <a:srgbClr val="1B211F"/>
                 </a:solidFill>
@@ -2466,37 +2238,37 @@
       </p:sp>
       <p:sp>
         <p:nvSpPr>
-          <p:cNvPr id="6" name="">
-            <a:extLst xmlns:a="http://schemas.openxmlformats.org/drawingml/2006/main">
+          <p:cNvPr id="6" name="Rectangle 5">
+            <a:extLst>
               <a:ext uri="{FF2B5EF4-FFF2-40B4-BE49-F238E27FC236}">
                 <a16:creationId xmlns:a16="http://schemas.microsoft.com/office/drawing/2014/main" id="{3BC0297C-01C5-4A4E-8159-0816E6D018C1}"/>
               </a:ext>
             </a:extLst>
           </p:cNvPr>
           <p:cNvSpPr>
-            <a:spLocks xmlns:a="http://schemas.openxmlformats.org/drawingml/2006/main" noGrp="1"/>
-          </p:cNvSpPr>
-          <p:nvPr/>
-        </p:nvSpPr>
-        <p:spPr>
-          <a:xfrm xmlns:a="http://schemas.openxmlformats.org/drawingml/2006/main">
-            <a:off x="609600" y="3962400"/>
+            <a:spLocks noGrp="1"/>
+          </p:cNvSpPr>
+          <p:nvPr/>
+        </p:nvSpPr>
+        <p:spPr>
+          <a:xfrm>
+            <a:off x="609600" y="3628911"/>
             <a:ext cx="1905000" cy="323850"/>
           </a:xfrm>
-          <a:prstGeom xmlns:a="http://schemas.openxmlformats.org/drawingml/2006/main" prst="rect">
-            <a:avLst/>
-          </a:prstGeom>
-          <a:noFill xmlns:a="http://schemas.openxmlformats.org/drawingml/2006/main"/>
-          <a:ln xmlns:a="http://schemas.openxmlformats.org/drawingml/2006/main" w="0">
-            <a:noFill/>
-          </a:ln>
-        </p:spPr>
-        <p:txBody>
-          <a:bodyPr xmlns:a="http://schemas.openxmlformats.org/drawingml/2006/main">
+          <a:prstGeom prst="rect">
+            <a:avLst/>
+          </a:prstGeom>
+          <a:noFill/>
+          <a:ln w="0">
+            <a:noFill/>
+          </a:ln>
+        </p:spPr>
+        <p:txBody>
+          <a:bodyPr>
             <a:noAutofit/>
           </a:bodyPr>
-          <a:lstStyle xmlns:a="http://schemas.openxmlformats.org/drawingml/2006/main"/>
-          <a:p xmlns:a="http://schemas.openxmlformats.org/drawingml/2006/main">
+          <a:lstStyle/>
+          <a:p>
             <a:pPr>
               <a:defRPr sz="1875" b="1">
                 <a:solidFill>
@@ -2523,37 +2295,37 @@
       </p:sp>
       <p:sp>
         <p:nvSpPr>
-          <p:cNvPr id="7" name="">
-            <a:extLst xmlns:a="http://schemas.openxmlformats.org/drawingml/2006/main">
+          <p:cNvPr id="7" name="Rectangle 6">
+            <a:extLst>
               <a:ext uri="{FF2B5EF4-FFF2-40B4-BE49-F238E27FC236}">
                 <a16:creationId xmlns:a16="http://schemas.microsoft.com/office/drawing/2014/main" id="{0FFB7A62-0692-4A61-8326-9197309C0D5D}"/>
               </a:ext>
             </a:extLst>
           </p:cNvPr>
           <p:cNvSpPr>
-            <a:spLocks xmlns:a="http://schemas.openxmlformats.org/drawingml/2006/main" noGrp="1"/>
-          </p:cNvSpPr>
-          <p:nvPr/>
-        </p:nvSpPr>
-        <p:spPr>
-          <a:xfrm xmlns:a="http://schemas.openxmlformats.org/drawingml/2006/main">
-            <a:off x="609600" y="4324350"/>
+            <a:spLocks noGrp="1"/>
+          </p:cNvSpPr>
+          <p:nvPr/>
+        </p:nvSpPr>
+        <p:spPr>
+          <a:xfrm>
+            <a:off x="609600" y="3990861"/>
             <a:ext cx="4953000" cy="838200"/>
           </a:xfrm>
-          <a:prstGeom xmlns:a="http://schemas.openxmlformats.org/drawingml/2006/main" prst="rect">
-            <a:avLst/>
-          </a:prstGeom>
-          <a:noFill xmlns:a="http://schemas.openxmlformats.org/drawingml/2006/main"/>
-          <a:ln xmlns:a="http://schemas.openxmlformats.org/drawingml/2006/main" w="0">
-            <a:noFill/>
-          </a:ln>
-        </p:spPr>
-        <p:txBody>
-          <a:bodyPr xmlns:a="http://schemas.openxmlformats.org/drawingml/2006/main">
+          <a:prstGeom prst="rect">
+            <a:avLst/>
+          </a:prstGeom>
+          <a:noFill/>
+          <a:ln w="0">
+            <a:noFill/>
+          </a:ln>
+        </p:spPr>
+        <p:txBody>
+          <a:bodyPr>
             <a:noAutofit/>
           </a:bodyPr>
-          <a:lstStyle xmlns:a="http://schemas.openxmlformats.org/drawingml/2006/main"/>
-          <a:p xmlns:a="http://schemas.openxmlformats.org/drawingml/2006/main">
+          <a:lstStyle/>
+          <a:p>
             <a:pPr>
               <a:defRPr sz="2100" b="0">
                 <a:solidFill>
@@ -2580,38 +2352,41 @@
       </p:sp>
       <p:sp>
         <p:nvSpPr>
-          <p:cNvPr id="8" name="">
-            <a:extLst xmlns:a="http://schemas.openxmlformats.org/drawingml/2006/main">
+          <p:cNvPr id="8" name="Rectangle 7">
+            <a:extLst>
               <a:ext uri="{FF2B5EF4-FFF2-40B4-BE49-F238E27FC236}">
                 <a16:creationId xmlns:a16="http://schemas.microsoft.com/office/drawing/2014/main" id="{E89A0BDB-1848-4D04-B971-0837033909DC}"/>
               </a:ext>
             </a:extLst>
           </p:cNvPr>
           <p:cNvSpPr>
-            <a:spLocks xmlns:a="http://schemas.openxmlformats.org/drawingml/2006/main" noGrp="1"/>
-          </p:cNvSpPr>
-          <p:nvPr/>
-        </p:nvSpPr>
-        <p:spPr>
-          <a:xfrm xmlns:a="http://schemas.openxmlformats.org/drawingml/2006/main">
-            <a:off x="609600" y="5810250"/>
-            <a:ext cx="4857750" cy="381000"/>
-          </a:xfrm>
-          <a:prstGeom xmlns:a="http://schemas.openxmlformats.org/drawingml/2006/main" prst="rect">
-            <a:avLst/>
-          </a:prstGeom>
-          <a:noFill xmlns:a="http://schemas.openxmlformats.org/drawingml/2006/main"/>
-          <a:ln xmlns:a="http://schemas.openxmlformats.org/drawingml/2006/main" w="0">
-            <a:noFill/>
-          </a:ln>
-        </p:spPr>
-        <p:txBody>
-          <a:bodyPr xmlns:a="http://schemas.openxmlformats.org/drawingml/2006/main">
+            <a:spLocks noGrp="1"/>
+          </p:cNvSpPr>
+          <p:nvPr/>
+        </p:nvSpPr>
+        <p:spPr>
+          <a:xfrm>
+            <a:off x="609600" y="5657850"/>
+            <a:ext cx="10934700" cy="838200"/>
+          </a:xfrm>
+          <a:prstGeom prst="rect">
+            <a:avLst/>
+          </a:prstGeom>
+          <a:noFill/>
+          <a:ln w="0">
+            <a:noFill/>
+          </a:ln>
+        </p:spPr>
+        <p:txBody>
+          <a:bodyPr>
             <a:noAutofit/>
           </a:bodyPr>
-          <a:lstStyle xmlns:a="http://schemas.openxmlformats.org/drawingml/2006/main"/>
-          <a:p xmlns:a="http://schemas.openxmlformats.org/drawingml/2006/main">
+          <a:lstStyle/>
+          <a:p>
             <a:pPr>
+              <a:spcAft>
+                <a:spcPts val="800"/>
+              </a:spcAft>
               <a:defRPr sz="1800" b="1">
                 <a:solidFill>
                   <a:srgbClr val="1F5552"/>
@@ -2622,73 +2397,182 @@
               </a:defRPr>
             </a:pPr>
             <a:r>
-              <a:rPr sz="1800" b="1">
+              <a:rPr lang="en-US" dirty="0">
+                <a:hlinkClick r:id="rId3">
+                  <a:extLst>
+                    <a:ext uri="{A12FA001-AC4F-418D-AE19-62706E023703}">
+                      <ahyp:hlinkClr xmlns:ahyp="http://schemas.microsoft.com/office/drawing/2018/hyperlinkcolor" val="tx"/>
+                    </a:ext>
+                  </a:extLst>
+                </a:hlinkClick>
+              </a:rPr>
+              <a:t>https://aie1f-easyinvoice.vercel.app</a:t>
+            </a:r>
+            <a:endParaRPr lang="en-US" dirty="0"/>
+          </a:p>
+          <a:p>
+            <a:pPr>
+              <a:spcAft>
+                <a:spcPts val="800"/>
+              </a:spcAft>
+              <a:defRPr sz="1800" b="1">
                 <a:solidFill>
                   <a:srgbClr val="1F5552"/>
                 </a:solidFill>
                 <a:latin typeface="Arial"/>
                 <a:ea typeface="Arial"/>
                 <a:cs typeface="Arial"/>
+              </a:defRPr>
+            </a:pPr>
+            <a:r>
+              <a:rPr lang="en-US" dirty="0">
+                <a:solidFill>
+                  <a:srgbClr val="467886"/>
+                </a:solidFill>
+                <a:hlinkClick r:id="rId4">
+                  <a:extLst>
+                    <a:ext uri="{A12FA001-AC4F-418D-AE19-62706E023703}">
+                      <ahyp:hlinkClr xmlns:ahyp="http://schemas.microsoft.com/office/drawing/2018/hyperlinkcolor" val="tx"/>
+                    </a:ext>
+                  </a:extLst>
+                </a:hlinkClick>
               </a:rPr>
-              <a:t>Simulated network. Synthetic data only.</a:t>
-            </a:r>
-          </a:p>
-        </p:txBody>
-      </p:sp>
-      <p:sp>
-        <p:nvSpPr>
-          <p:cNvPr id="9" name="">
-            <a:extLst xmlns:a="http://schemas.openxmlformats.org/drawingml/2006/main">
+              <a:t>https://github.com</a:t>
+            </a:r>
+            <a:r>
+              <a:rPr lang="en-US" dirty="0">
+                <a:hlinkClick r:id="rId4">
+                  <a:extLst>
+                    <a:ext uri="{A12FA001-AC4F-418D-AE19-62706E023703}">
+                      <ahyp:hlinkClr xmlns:ahyp="http://schemas.microsoft.com/office/drawing/2018/hyperlinkcolor" val="tx"/>
+                    </a:ext>
+                  </a:extLst>
+                </a:hlinkClick>
+              </a:rPr>
+              <a:t>/NTU-AIE1F-Team6/m2-b2b-invoice-mgmt-sys</a:t>
+            </a:r>
+            <a:endParaRPr lang="en-US" dirty="0"/>
+          </a:p>
+        </p:txBody>
+      </p:sp>
+      <p:sp>
+        <p:nvSpPr>
+          <p:cNvPr id="9" name="Rounded Rectangle 8">
+            <a:extLst>
               <a:ext uri="{FF2B5EF4-FFF2-40B4-BE49-F238E27FC236}">
                 <a16:creationId xmlns:a16="http://schemas.microsoft.com/office/drawing/2014/main" id="{A4BF8722-6C49-4A3C-A9A9-9A1323200458}"/>
               </a:ext>
             </a:extLst>
           </p:cNvPr>
           <p:cNvSpPr>
-            <a:spLocks xmlns:a="http://schemas.openxmlformats.org/drawingml/2006/main" noGrp="1"/>
-          </p:cNvSpPr>
-          <p:nvPr/>
-        </p:nvSpPr>
-        <p:spPr>
-          <a:xfrm xmlns:a="http://schemas.openxmlformats.org/drawingml/2006/main">
-            <a:off x="6210300" y="1219200"/>
+            <a:spLocks noGrp="1"/>
+          </p:cNvSpPr>
+          <p:nvPr/>
+        </p:nvSpPr>
+        <p:spPr>
+          <a:xfrm>
+            <a:off x="6210300" y="1022554"/>
             <a:ext cx="5334000" cy="4953000"/>
           </a:xfrm>
-          <a:prstGeom xmlns:a="http://schemas.openxmlformats.org/drawingml/2006/main" prst="roundRect">
+          <a:prstGeom prst="roundRect">
             <a:avLst>
               <a:gd name="adj" fmla="val 1538"/>
             </a:avLst>
           </a:prstGeom>
-          <a:solidFill xmlns:a="http://schemas.openxmlformats.org/drawingml/2006/main">
+          <a:solidFill>
             <a:srgbClr val="FFFDF9"/>
           </a:solidFill>
-          <a:ln xmlns:a="http://schemas.openxmlformats.org/drawingml/2006/main" w="0">
-            <a:noFill/>
-          </a:ln>
-        </p:spPr>
+          <a:ln w="0">
+            <a:noFill/>
+          </a:ln>
+        </p:spPr>
+        <p:txBody>
+          <a:bodyPr/>
+          <a:lstStyle/>
+          <a:p>
+            <a:endParaRPr lang="en-US" dirty="0"/>
+          </a:p>
+        </p:txBody>
       </p:sp>
       <p:pic>
         <p:nvPicPr>
-          <p:cNvPr id="20" name=""/>
+          <p:cNvPr id="20" name="Picture 19"/>
           <p:cNvPicPr>
-            <a:picLocks xmlns:a="http://schemas.openxmlformats.org/drawingml/2006/main" noChangeAspect="1"/>
+            <a:picLocks noChangeAspect="1"/>
           </p:cNvPicPr>
           <p:nvPr/>
         </p:nvPicPr>
         <p:blipFill>
-          <a:blip xmlns:r="http://schemas.openxmlformats.org/officeDocument/2006/relationships" xmlns:a="http://schemas.openxmlformats.org/drawingml/2006/main" r:embed="R64eadb5c038744e8"/>
-          <a:stretch xmlns:a="http://schemas.openxmlformats.org/drawingml/2006/main"/>
+          <a:blip r:embed="rId5"/>
+          <a:stretch/>
         </p:blipFill>
         <p:spPr>
-          <a:xfrm xmlns:a="http://schemas.openxmlformats.org/drawingml/2006/main">
+          <a:xfrm>
             <a:off x="6477000" y="1696323"/>
             <a:ext cx="4800600" cy="3979704"/>
           </a:xfrm>
-          <a:prstGeom xmlns:a="http://schemas.openxmlformats.org/drawingml/2006/main" prst="rect">
+          <a:prstGeom prst="rect">
             <a:avLst/>
           </a:prstGeom>
         </p:spPr>
       </p:pic>
+      <p:sp>
+        <p:nvSpPr>
+          <p:cNvPr id="10" name="Rectangle 9">
+            <a:extLst>
+              <a:ext uri="{FF2B5EF4-FFF2-40B4-BE49-F238E27FC236}">
+                <a16:creationId xmlns:a16="http://schemas.microsoft.com/office/drawing/2014/main" id="{41E92752-315C-85C6-5844-F39928577B3A}"/>
+              </a:ext>
+            </a:extLst>
+          </p:cNvPr>
+          <p:cNvSpPr>
+            <a:spLocks noGrp="1"/>
+          </p:cNvSpPr>
+          <p:nvPr/>
+        </p:nvSpPr>
+        <p:spPr>
+          <a:xfrm>
+            <a:off x="609600" y="4867161"/>
+            <a:ext cx="4857750" cy="381000"/>
+          </a:xfrm>
+          <a:prstGeom prst="rect">
+            <a:avLst/>
+          </a:prstGeom>
+          <a:noFill/>
+          <a:ln w="0">
+            <a:noFill/>
+          </a:ln>
+        </p:spPr>
+        <p:txBody>
+          <a:bodyPr>
+            <a:noAutofit/>
+          </a:bodyPr>
+          <a:lstStyle/>
+          <a:p>
+            <a:pPr>
+              <a:defRPr sz="1800" b="1">
+                <a:solidFill>
+                  <a:srgbClr val="1F5552"/>
+                </a:solidFill>
+                <a:latin typeface="Arial"/>
+                <a:ea typeface="Arial"/>
+                <a:cs typeface="Arial"/>
+              </a:defRPr>
+            </a:pPr>
+            <a:r>
+              <a:rPr sz="1800" b="1" dirty="0">
+                <a:solidFill>
+                  <a:srgbClr val="1F5552"/>
+                </a:solidFill>
+                <a:latin typeface="Arial"/>
+                <a:ea typeface="Arial"/>
+                <a:cs typeface="Arial"/>
+              </a:rPr>
+              <a:t>Simulated network. Synthetic data only.</a:t>
+            </a:r>
+          </a:p>
+        </p:txBody>
+      </p:sp>
     </p:spTree>
     <p:extLst>
       <p:ext uri="{BB962C8B-B14F-4D97-AF65-F5344CB8AC3E}">
@@ -2696,17 +2580,21 @@
       </p:ext>
     </p:extLst>
   </p:cSld>
+  <p:clrMapOvr>
+    <a:masterClrMapping/>
+  </p:clrMapOvr>
 </p:sld>
 </file>
 
 <file path=ppt/slides/slide3.xml><?xml version="1.0" encoding="utf-8"?>
-<p:sld xmlns:p="http://schemas.openxmlformats.org/presentationml/2006/main">
+<p:sld xmlns:a="http://schemas.openxmlformats.org/drawingml/2006/main" xmlns:r="http://schemas.openxmlformats.org/officeDocument/2006/relationships" xmlns:p="http://schemas.openxmlformats.org/presentationml/2006/main">
   <p:cSld>
     <p:bg>
       <p:bgPr>
-        <a:solidFill xmlns:a="http://schemas.openxmlformats.org/drawingml/2006/main">
+        <a:solidFill>
           <a:srgbClr val="F6F5F1"/>
         </a:solidFill>
+        <a:effectLst/>
       </p:bgPr>
     </p:bg>
     <p:spTree>
@@ -2716,41 +2604,46 @@
         <p:nvPr/>
       </p:nvGrpSpPr>
       <p:grpSpPr>
-        <a:xfrm xmlns:a="http://schemas.openxmlformats.org/drawingml/2006/main"/>
+        <a:xfrm>
+          <a:off x="0" y="0"/>
+          <a:ext cx="0" cy="0"/>
+          <a:chOff x="0" y="0"/>
+          <a:chExt cx="0" cy="0"/>
+        </a:xfrm>
       </p:grpSpPr>
       <p:sp>
         <p:nvSpPr>
-          <p:cNvPr id="11" name="">
-            <a:extLst xmlns:a="http://schemas.openxmlformats.org/drawingml/2006/main">
+          <p:cNvPr id="11" name="Rectangle 10">
+            <a:extLst>
               <a:ext uri="{FF2B5EF4-FFF2-40B4-BE49-F238E27FC236}">
                 <a16:creationId xmlns:a16="http://schemas.microsoft.com/office/drawing/2014/main" id="{2FF97830-2340-43B1-887F-1A85413E4535}"/>
               </a:ext>
             </a:extLst>
           </p:cNvPr>
           <p:cNvSpPr>
-            <a:spLocks xmlns:a="http://schemas.openxmlformats.org/drawingml/2006/main" noGrp="1"/>
-          </p:cNvSpPr>
-          <p:nvPr/>
-        </p:nvSpPr>
-        <p:spPr>
-          <a:xfrm xmlns:a="http://schemas.openxmlformats.org/drawingml/2006/main">
+            <a:spLocks noGrp="1"/>
+          </p:cNvSpPr>
+          <p:nvPr/>
+        </p:nvSpPr>
+        <p:spPr>
+          <a:xfrm>
             <a:off x="609600" y="361950"/>
             <a:ext cx="10477500" cy="552450"/>
           </a:xfrm>
-          <a:prstGeom xmlns:a="http://schemas.openxmlformats.org/drawingml/2006/main" prst="rect">
-            <a:avLst/>
-          </a:prstGeom>
-          <a:noFill xmlns:a="http://schemas.openxmlformats.org/drawingml/2006/main"/>
-          <a:ln xmlns:a="http://schemas.openxmlformats.org/drawingml/2006/main" w="0">
-            <a:noFill/>
-          </a:ln>
-        </p:spPr>
-        <p:txBody>
-          <a:bodyPr xmlns:a="http://schemas.openxmlformats.org/drawingml/2006/main">
+          <a:prstGeom prst="rect">
+            <a:avLst/>
+          </a:prstGeom>
+          <a:noFill/>
+          <a:ln w="0">
+            <a:noFill/>
+          </a:ln>
+        </p:spPr>
+        <p:txBody>
+          <a:bodyPr>
             <a:noAutofit/>
           </a:bodyPr>
-          <a:lstStyle xmlns:a="http://schemas.openxmlformats.org/drawingml/2006/main"/>
-          <a:p xmlns:a="http://schemas.openxmlformats.org/drawingml/2006/main">
+          <a:lstStyle/>
+          <a:p>
             <a:pPr>
               <a:defRPr sz="3150" b="1">
                 <a:solidFill>
@@ -2777,131 +2670,152 @@
       </p:sp>
       <p:sp>
         <p:nvSpPr>
-          <p:cNvPr id="2" name="">
-            <a:extLst xmlns:a="http://schemas.openxmlformats.org/drawingml/2006/main">
+          <p:cNvPr id="2" name="Rectangle 1">
+            <a:extLst>
               <a:ext uri="{FF2B5EF4-FFF2-40B4-BE49-F238E27FC236}">
                 <a16:creationId xmlns:a16="http://schemas.microsoft.com/office/drawing/2014/main" id="{E132A1CB-D555-4586-8AAB-965681033830}"/>
               </a:ext>
             </a:extLst>
           </p:cNvPr>
           <p:cNvSpPr>
-            <a:spLocks xmlns:a="http://schemas.openxmlformats.org/drawingml/2006/main" noGrp="1"/>
-          </p:cNvSpPr>
-          <p:nvPr/>
-        </p:nvSpPr>
-        <p:spPr>
-          <a:xfrm xmlns:a="http://schemas.openxmlformats.org/drawingml/2006/main">
+            <a:spLocks noGrp="1"/>
+          </p:cNvSpPr>
+          <p:nvPr/>
+        </p:nvSpPr>
+        <p:spPr>
+          <a:xfrm>
             <a:off x="609600" y="971550"/>
             <a:ext cx="914400" cy="57150"/>
           </a:xfrm>
-          <a:prstGeom xmlns:a="http://schemas.openxmlformats.org/drawingml/2006/main" prst="rect">
-            <a:avLst/>
-          </a:prstGeom>
-          <a:solidFill xmlns:a="http://schemas.openxmlformats.org/drawingml/2006/main">
+          <a:prstGeom prst="rect">
+            <a:avLst/>
+          </a:prstGeom>
+          <a:solidFill>
             <a:srgbClr val="EDB86C"/>
           </a:solidFill>
-          <a:ln xmlns:a="http://schemas.openxmlformats.org/drawingml/2006/main" w="0">
-            <a:noFill/>
-          </a:ln>
-        </p:spPr>
-      </p:sp>
-      <p:sp>
-        <p:nvSpPr>
-          <p:cNvPr id="3" name="">
-            <a:extLst xmlns:a="http://schemas.openxmlformats.org/drawingml/2006/main">
+          <a:ln w="0">
+            <a:noFill/>
+          </a:ln>
+        </p:spPr>
+        <p:txBody>
+          <a:bodyPr/>
+          <a:lstStyle/>
+          <a:p>
+            <a:endParaRPr lang="en-US"/>
+          </a:p>
+        </p:txBody>
+      </p:sp>
+      <p:sp>
+        <p:nvSpPr>
+          <p:cNvPr id="3" name="Rounded Rectangle 2">
+            <a:extLst>
               <a:ext uri="{FF2B5EF4-FFF2-40B4-BE49-F238E27FC236}">
                 <a16:creationId xmlns:a16="http://schemas.microsoft.com/office/drawing/2014/main" id="{59A3FF9F-7A53-4ADB-B4CE-A6BE731D29C1}"/>
               </a:ext>
             </a:extLst>
           </p:cNvPr>
           <p:cNvSpPr>
-            <a:spLocks xmlns:a="http://schemas.openxmlformats.org/drawingml/2006/main" noGrp="1"/>
-          </p:cNvSpPr>
-          <p:nvPr/>
-        </p:nvSpPr>
-        <p:spPr>
-          <a:xfrm xmlns:a="http://schemas.openxmlformats.org/drawingml/2006/main">
+            <a:spLocks noGrp="1"/>
+          </p:cNvSpPr>
+          <p:nvPr/>
+        </p:nvSpPr>
+        <p:spPr>
+          <a:xfrm>
             <a:off x="533400" y="1257300"/>
             <a:ext cx="5391150" cy="4819650"/>
           </a:xfrm>
-          <a:prstGeom xmlns:a="http://schemas.openxmlformats.org/drawingml/2006/main" prst="roundRect">
+          <a:prstGeom prst="roundRect">
             <a:avLst>
               <a:gd name="adj" fmla="val 1581"/>
             </a:avLst>
           </a:prstGeom>
-          <a:solidFill xmlns:a="http://schemas.openxmlformats.org/drawingml/2006/main">
+          <a:solidFill>
             <a:srgbClr val="FFFDF9"/>
           </a:solidFill>
-          <a:ln xmlns:a="http://schemas.openxmlformats.org/drawingml/2006/main" w="0">
-            <a:noFill/>
-          </a:ln>
-        </p:spPr>
-      </p:sp>
-      <p:sp>
-        <p:nvSpPr>
-          <p:cNvPr id="4" name="">
-            <a:extLst xmlns:a="http://schemas.openxmlformats.org/drawingml/2006/main">
+          <a:ln w="0">
+            <a:noFill/>
+          </a:ln>
+        </p:spPr>
+        <p:txBody>
+          <a:bodyPr/>
+          <a:lstStyle/>
+          <a:p>
+            <a:endParaRPr lang="en-US"/>
+          </a:p>
+        </p:txBody>
+      </p:sp>
+      <p:sp>
+        <p:nvSpPr>
+          <p:cNvPr id="4" name="Rounded Rectangle 3">
+            <a:extLst>
               <a:ext uri="{FF2B5EF4-FFF2-40B4-BE49-F238E27FC236}">
                 <a16:creationId xmlns:a16="http://schemas.microsoft.com/office/drawing/2014/main" id="{331EFDE7-7517-44C9-8200-0F660198B6BF}"/>
               </a:ext>
             </a:extLst>
           </p:cNvPr>
           <p:cNvSpPr>
-            <a:spLocks xmlns:a="http://schemas.openxmlformats.org/drawingml/2006/main" noGrp="1"/>
-          </p:cNvSpPr>
-          <p:nvPr/>
-        </p:nvSpPr>
-        <p:spPr>
-          <a:xfrm xmlns:a="http://schemas.openxmlformats.org/drawingml/2006/main">
+            <a:spLocks noGrp="1"/>
+          </p:cNvSpPr>
+          <p:nvPr/>
+        </p:nvSpPr>
+        <p:spPr>
+          <a:xfrm>
             <a:off x="6267450" y="1257300"/>
             <a:ext cx="5391150" cy="4819650"/>
           </a:xfrm>
-          <a:prstGeom xmlns:a="http://schemas.openxmlformats.org/drawingml/2006/main" prst="roundRect">
+          <a:prstGeom prst="roundRect">
             <a:avLst>
               <a:gd name="adj" fmla="val 1581"/>
             </a:avLst>
           </a:prstGeom>
-          <a:solidFill xmlns:a="http://schemas.openxmlformats.org/drawingml/2006/main">
+          <a:solidFill>
             <a:srgbClr val="FFFDF9"/>
           </a:solidFill>
-          <a:ln xmlns:a="http://schemas.openxmlformats.org/drawingml/2006/main" w="0">
-            <a:noFill/>
-          </a:ln>
-        </p:spPr>
-      </p:sp>
-      <p:sp>
-        <p:nvSpPr>
-          <p:cNvPr id="5" name="">
-            <a:extLst xmlns:a="http://schemas.openxmlformats.org/drawingml/2006/main">
+          <a:ln w="0">
+            <a:noFill/>
+          </a:ln>
+        </p:spPr>
+        <p:txBody>
+          <a:bodyPr/>
+          <a:lstStyle/>
+          <a:p>
+            <a:endParaRPr lang="en-US"/>
+          </a:p>
+        </p:txBody>
+      </p:sp>
+      <p:sp>
+        <p:nvSpPr>
+          <p:cNvPr id="5" name="Rectangle 4">
+            <a:extLst>
               <a:ext uri="{FF2B5EF4-FFF2-40B4-BE49-F238E27FC236}">
                 <a16:creationId xmlns:a16="http://schemas.microsoft.com/office/drawing/2014/main" id="{DF13709C-FAF3-42B5-8DFA-12DCEFE14747}"/>
               </a:ext>
             </a:extLst>
           </p:cNvPr>
           <p:cNvSpPr>
-            <a:spLocks xmlns:a="http://schemas.openxmlformats.org/drawingml/2006/main" noGrp="1"/>
-          </p:cNvSpPr>
-          <p:nvPr/>
-        </p:nvSpPr>
-        <p:spPr>
-          <a:xfrm xmlns:a="http://schemas.openxmlformats.org/drawingml/2006/main">
+            <a:spLocks noGrp="1"/>
+          </p:cNvSpPr>
+          <p:nvPr/>
+        </p:nvSpPr>
+        <p:spPr>
+          <a:xfrm>
             <a:off x="762000" y="1428750"/>
             <a:ext cx="2190750" cy="361950"/>
           </a:xfrm>
-          <a:prstGeom xmlns:a="http://schemas.openxmlformats.org/drawingml/2006/main" prst="rect">
-            <a:avLst/>
-          </a:prstGeom>
-          <a:noFill xmlns:a="http://schemas.openxmlformats.org/drawingml/2006/main"/>
-          <a:ln xmlns:a="http://schemas.openxmlformats.org/drawingml/2006/main" w="0">
-            <a:noFill/>
-          </a:ln>
-        </p:spPr>
-        <p:txBody>
-          <a:bodyPr xmlns:a="http://schemas.openxmlformats.org/drawingml/2006/main">
+          <a:prstGeom prst="rect">
+            <a:avLst/>
+          </a:prstGeom>
+          <a:noFill/>
+          <a:ln w="0">
+            <a:noFill/>
+          </a:ln>
+        </p:spPr>
+        <p:txBody>
+          <a:bodyPr>
             <a:noAutofit/>
           </a:bodyPr>
-          <a:lstStyle xmlns:a="http://schemas.openxmlformats.org/drawingml/2006/main"/>
-          <a:p xmlns:a="http://schemas.openxmlformats.org/drawingml/2006/main">
+          <a:lstStyle/>
+          <a:p>
             <a:pPr>
               <a:defRPr sz="2175" b="1">
                 <a:solidFill>
@@ -2928,37 +2842,37 @@
       </p:sp>
       <p:sp>
         <p:nvSpPr>
-          <p:cNvPr id="6" name="">
-            <a:extLst xmlns:a="http://schemas.openxmlformats.org/drawingml/2006/main">
+          <p:cNvPr id="6" name="Rectangle 5">
+            <a:extLst>
               <a:ext uri="{FF2B5EF4-FFF2-40B4-BE49-F238E27FC236}">
                 <a16:creationId xmlns:a16="http://schemas.microsoft.com/office/drawing/2014/main" id="{3D2EC7E8-4313-46C6-85B4-566963F695FB}"/>
               </a:ext>
             </a:extLst>
           </p:cNvPr>
           <p:cNvSpPr>
-            <a:spLocks xmlns:a="http://schemas.openxmlformats.org/drawingml/2006/main" noGrp="1"/>
-          </p:cNvSpPr>
-          <p:nvPr/>
-        </p:nvSpPr>
-        <p:spPr>
-          <a:xfrm xmlns:a="http://schemas.openxmlformats.org/drawingml/2006/main">
+            <a:spLocks noGrp="1"/>
+          </p:cNvSpPr>
+          <p:nvPr/>
+        </p:nvSpPr>
+        <p:spPr>
+          <a:xfrm>
             <a:off x="762000" y="1790700"/>
             <a:ext cx="4286250" cy="323850"/>
           </a:xfrm>
-          <a:prstGeom xmlns:a="http://schemas.openxmlformats.org/drawingml/2006/main" prst="rect">
-            <a:avLst/>
-          </a:prstGeom>
-          <a:noFill xmlns:a="http://schemas.openxmlformats.org/drawingml/2006/main"/>
-          <a:ln xmlns:a="http://schemas.openxmlformats.org/drawingml/2006/main" w="0">
-            <a:noFill/>
-          </a:ln>
-        </p:spPr>
-        <p:txBody>
-          <a:bodyPr xmlns:a="http://schemas.openxmlformats.org/drawingml/2006/main">
+          <a:prstGeom prst="rect">
+            <a:avLst/>
+          </a:prstGeom>
+          <a:noFill/>
+          <a:ln w="0">
+            <a:noFill/>
+          </a:ln>
+        </p:spPr>
+        <p:txBody>
+          <a:bodyPr>
             <a:noAutofit/>
           </a:bodyPr>
-          <a:lstStyle xmlns:a="http://schemas.openxmlformats.org/drawingml/2006/main"/>
-          <a:p xmlns:a="http://schemas.openxmlformats.org/drawingml/2006/main">
+          <a:lstStyle/>
+          <a:p>
             <a:pPr>
               <a:defRPr sz="1800" b="0">
                 <a:solidFill>
@@ -2985,25 +2899,25 @@
       </p:sp>
       <p:pic>
         <p:nvPicPr>
-          <p:cNvPr id="17" name=""/>
+          <p:cNvPr id="17" name="Picture 16"/>
           <p:cNvPicPr>
-            <a:picLocks xmlns:a="http://schemas.openxmlformats.org/drawingml/2006/main" noChangeAspect="1"/>
+            <a:picLocks noChangeAspect="1"/>
           </p:cNvPicPr>
           <p:nvPr/>
         </p:nvPicPr>
         <p:blipFill>
-          <a:blip xmlns:r="http://schemas.openxmlformats.org/officeDocument/2006/relationships" xmlns:a="http://schemas.openxmlformats.org/drawingml/2006/main" r:embed="R74068e2b7a2c4715"/>
-          <a:srcRect xmlns:a="http://schemas.openxmlformats.org/drawingml/2006/main" l="0" t="16244" r="0" b="16244"/>
-          <a:stretch xmlns:a="http://schemas.openxmlformats.org/drawingml/2006/main">
-            <a:fillRect l="0" t="0" r="0" b="0"/>
+          <a:blip r:embed="rId3"/>
+          <a:srcRect t="16244" b="16244"/>
+          <a:stretch>
+            <a:fillRect/>
           </a:stretch>
         </p:blipFill>
         <p:spPr>
-          <a:xfrm xmlns:a="http://schemas.openxmlformats.org/drawingml/2006/main">
+          <a:xfrm>
             <a:off x="762000" y="2209800"/>
             <a:ext cx="4933950" cy="3619500"/>
           </a:xfrm>
-          <a:prstGeom xmlns:a="http://schemas.openxmlformats.org/drawingml/2006/main" prst="roundRect">
+          <a:prstGeom prst="roundRect">
             <a:avLst>
               <a:gd name="adj" fmla="val 2105"/>
             </a:avLst>
@@ -3012,37 +2926,37 @@
       </p:pic>
       <p:sp>
         <p:nvSpPr>
-          <p:cNvPr id="8" name="">
-            <a:extLst xmlns:a="http://schemas.openxmlformats.org/drawingml/2006/main">
+          <p:cNvPr id="8" name="Rectangle 7">
+            <a:extLst>
               <a:ext uri="{FF2B5EF4-FFF2-40B4-BE49-F238E27FC236}">
                 <a16:creationId xmlns:a16="http://schemas.microsoft.com/office/drawing/2014/main" id="{2D6C7F66-F58C-4A15-84A7-272647BA1C95}"/>
               </a:ext>
             </a:extLst>
           </p:cNvPr>
           <p:cNvSpPr>
-            <a:spLocks xmlns:a="http://schemas.openxmlformats.org/drawingml/2006/main" noGrp="1"/>
-          </p:cNvSpPr>
-          <p:nvPr/>
-        </p:nvSpPr>
-        <p:spPr>
-          <a:xfrm xmlns:a="http://schemas.openxmlformats.org/drawingml/2006/main">
+            <a:spLocks noGrp="1"/>
+          </p:cNvSpPr>
+          <p:nvPr/>
+        </p:nvSpPr>
+        <p:spPr>
+          <a:xfrm>
             <a:off x="6496050" y="1428750"/>
             <a:ext cx="2476500" cy="361950"/>
           </a:xfrm>
-          <a:prstGeom xmlns:a="http://schemas.openxmlformats.org/drawingml/2006/main" prst="rect">
-            <a:avLst/>
-          </a:prstGeom>
-          <a:noFill xmlns:a="http://schemas.openxmlformats.org/drawingml/2006/main"/>
-          <a:ln xmlns:a="http://schemas.openxmlformats.org/drawingml/2006/main" w="0">
-            <a:noFill/>
-          </a:ln>
-        </p:spPr>
-        <p:txBody>
-          <a:bodyPr xmlns:a="http://schemas.openxmlformats.org/drawingml/2006/main">
+          <a:prstGeom prst="rect">
+            <a:avLst/>
+          </a:prstGeom>
+          <a:noFill/>
+          <a:ln w="0">
+            <a:noFill/>
+          </a:ln>
+        </p:spPr>
+        <p:txBody>
+          <a:bodyPr>
             <a:noAutofit/>
           </a:bodyPr>
-          <a:lstStyle xmlns:a="http://schemas.openxmlformats.org/drawingml/2006/main"/>
-          <a:p xmlns:a="http://schemas.openxmlformats.org/drawingml/2006/main">
+          <a:lstStyle/>
+          <a:p>
             <a:pPr>
               <a:defRPr sz="2175" b="1">
                 <a:solidFill>
@@ -3069,37 +2983,37 @@
       </p:sp>
       <p:sp>
         <p:nvSpPr>
-          <p:cNvPr id="9" name="">
-            <a:extLst xmlns:a="http://schemas.openxmlformats.org/drawingml/2006/main">
+          <p:cNvPr id="9" name="Rectangle 8">
+            <a:extLst>
               <a:ext uri="{FF2B5EF4-FFF2-40B4-BE49-F238E27FC236}">
                 <a16:creationId xmlns:a16="http://schemas.microsoft.com/office/drawing/2014/main" id="{4C5452DD-A8BB-4E66-9CDA-1FD7780D96BC}"/>
               </a:ext>
             </a:extLst>
           </p:cNvPr>
           <p:cNvSpPr>
-            <a:spLocks xmlns:a="http://schemas.openxmlformats.org/drawingml/2006/main" noGrp="1"/>
-          </p:cNvSpPr>
-          <p:nvPr/>
-        </p:nvSpPr>
-        <p:spPr>
-          <a:xfrm xmlns:a="http://schemas.openxmlformats.org/drawingml/2006/main">
+            <a:spLocks noGrp="1"/>
+          </p:cNvSpPr>
+          <p:nvPr/>
+        </p:nvSpPr>
+        <p:spPr>
+          <a:xfrm>
             <a:off x="6496050" y="1790700"/>
             <a:ext cx="4572000" cy="323850"/>
           </a:xfrm>
-          <a:prstGeom xmlns:a="http://schemas.openxmlformats.org/drawingml/2006/main" prst="rect">
-            <a:avLst/>
-          </a:prstGeom>
-          <a:noFill xmlns:a="http://schemas.openxmlformats.org/drawingml/2006/main"/>
-          <a:ln xmlns:a="http://schemas.openxmlformats.org/drawingml/2006/main" w="0">
-            <a:noFill/>
-          </a:ln>
-        </p:spPr>
-        <p:txBody>
-          <a:bodyPr xmlns:a="http://schemas.openxmlformats.org/drawingml/2006/main">
+          <a:prstGeom prst="rect">
+            <a:avLst/>
+          </a:prstGeom>
+          <a:noFill/>
+          <a:ln w="0">
+            <a:noFill/>
+          </a:ln>
+        </p:spPr>
+        <p:txBody>
+          <a:bodyPr>
             <a:noAutofit/>
           </a:bodyPr>
-          <a:lstStyle xmlns:a="http://schemas.openxmlformats.org/drawingml/2006/main"/>
-          <a:p xmlns:a="http://schemas.openxmlformats.org/drawingml/2006/main">
+          <a:lstStyle/>
+          <a:p>
             <a:pPr>
               <a:defRPr sz="1800" b="0">
                 <a:solidFill>
@@ -3126,25 +3040,25 @@
       </p:sp>
       <p:pic>
         <p:nvPicPr>
-          <p:cNvPr id="20" name=""/>
+          <p:cNvPr id="20" name="Picture 19"/>
           <p:cNvPicPr>
-            <a:picLocks xmlns:a="http://schemas.openxmlformats.org/drawingml/2006/main" noChangeAspect="1"/>
+            <a:picLocks noChangeAspect="1"/>
           </p:cNvPicPr>
           <p:nvPr/>
         </p:nvPicPr>
         <p:blipFill>
-          <a:blip xmlns:r="http://schemas.openxmlformats.org/officeDocument/2006/relationships" xmlns:a="http://schemas.openxmlformats.org/drawingml/2006/main" r:embed="Re72720b3d12a4ea5"/>
-          <a:srcRect xmlns:a="http://schemas.openxmlformats.org/drawingml/2006/main" l="0" t="1341" r="0" b="1341"/>
-          <a:stretch xmlns:a="http://schemas.openxmlformats.org/drawingml/2006/main">
-            <a:fillRect l="0" t="0" r="0" b="0"/>
+          <a:blip r:embed="rId4"/>
+          <a:srcRect t="1341" b="1341"/>
+          <a:stretch>
+            <a:fillRect/>
           </a:stretch>
         </p:blipFill>
         <p:spPr>
-          <a:xfrm xmlns:a="http://schemas.openxmlformats.org/drawingml/2006/main">
+          <a:xfrm>
             <a:off x="6496050" y="2209800"/>
             <a:ext cx="4933950" cy="3619500"/>
           </a:xfrm>
-          <a:prstGeom xmlns:a="http://schemas.openxmlformats.org/drawingml/2006/main" prst="roundRect">
+          <a:prstGeom prst="roundRect">
             <a:avLst>
               <a:gd name="adj" fmla="val 2105"/>
             </a:avLst>
@@ -3158,17 +3072,21 @@
       </p:ext>
     </p:extLst>
   </p:cSld>
+  <p:clrMapOvr>
+    <a:masterClrMapping/>
+  </p:clrMapOvr>
 </p:sld>
 </file>
 
 <file path=ppt/slides/slide4.xml><?xml version="1.0" encoding="utf-8"?>
-<p:sld xmlns:p="http://schemas.openxmlformats.org/presentationml/2006/main">
+<p:sld xmlns:a="http://schemas.openxmlformats.org/drawingml/2006/main" xmlns:r="http://schemas.openxmlformats.org/officeDocument/2006/relationships" xmlns:p="http://schemas.openxmlformats.org/presentationml/2006/main">
   <p:cSld>
     <p:bg>
       <p:bgPr>
-        <a:solidFill xmlns:a="http://schemas.openxmlformats.org/drawingml/2006/main">
+        <a:solidFill>
           <a:srgbClr val="F6F5F1"/>
         </a:solidFill>
+        <a:effectLst/>
       </p:bgPr>
     </p:bg>
     <p:spTree>
@@ -3178,41 +3096,46 @@
         <p:nvPr/>
       </p:nvGrpSpPr>
       <p:grpSpPr>
-        <a:xfrm xmlns:a="http://schemas.openxmlformats.org/drawingml/2006/main"/>
+        <a:xfrm>
+          <a:off x="0" y="0"/>
+          <a:ext cx="0" cy="0"/>
+          <a:chOff x="0" y="0"/>
+          <a:chExt cx="0" cy="0"/>
+        </a:xfrm>
       </p:grpSpPr>
       <p:sp>
         <p:nvSpPr>
-          <p:cNvPr id="20" name="">
-            <a:extLst xmlns:a="http://schemas.openxmlformats.org/drawingml/2006/main">
+          <p:cNvPr id="20" name="Rectangle 19">
+            <a:extLst>
               <a:ext uri="{FF2B5EF4-FFF2-40B4-BE49-F238E27FC236}">
                 <a16:creationId xmlns:a16="http://schemas.microsoft.com/office/drawing/2014/main" id="{EF7CF72A-B066-46ED-94EF-4C29E0F90AED}"/>
               </a:ext>
             </a:extLst>
           </p:cNvPr>
           <p:cNvSpPr>
-            <a:spLocks xmlns:a="http://schemas.openxmlformats.org/drawingml/2006/main" noGrp="1"/>
-          </p:cNvSpPr>
-          <p:nvPr/>
-        </p:nvSpPr>
-        <p:spPr>
-          <a:xfrm xmlns:a="http://schemas.openxmlformats.org/drawingml/2006/main">
+            <a:spLocks noGrp="1"/>
+          </p:cNvSpPr>
+          <p:nvPr/>
+        </p:nvSpPr>
+        <p:spPr>
+          <a:xfrm>
             <a:off x="609600" y="361950"/>
             <a:ext cx="10477500" cy="552450"/>
           </a:xfrm>
-          <a:prstGeom xmlns:a="http://schemas.openxmlformats.org/drawingml/2006/main" prst="rect">
-            <a:avLst/>
-          </a:prstGeom>
-          <a:noFill xmlns:a="http://schemas.openxmlformats.org/drawingml/2006/main"/>
-          <a:ln xmlns:a="http://schemas.openxmlformats.org/drawingml/2006/main" w="0">
-            <a:noFill/>
-          </a:ln>
-        </p:spPr>
-        <p:txBody>
-          <a:bodyPr xmlns:a="http://schemas.openxmlformats.org/drawingml/2006/main">
+          <a:prstGeom prst="rect">
+            <a:avLst/>
+          </a:prstGeom>
+          <a:noFill/>
+          <a:ln w="0">
+            <a:noFill/>
+          </a:ln>
+        </p:spPr>
+        <p:txBody>
+          <a:bodyPr>
             <a:noAutofit/>
           </a:bodyPr>
-          <a:lstStyle xmlns:a="http://schemas.openxmlformats.org/drawingml/2006/main"/>
-          <a:p xmlns:a="http://schemas.openxmlformats.org/drawingml/2006/main">
+          <a:lstStyle/>
+          <a:p>
             <a:pPr>
               <a:defRPr sz="3150" b="1">
                 <a:solidFill>
@@ -3239,67 +3162,74 @@
       </p:sp>
       <p:sp>
         <p:nvSpPr>
-          <p:cNvPr id="2" name="">
-            <a:extLst xmlns:a="http://schemas.openxmlformats.org/drawingml/2006/main">
+          <p:cNvPr id="2" name="Rectangle 1">
+            <a:extLst>
               <a:ext uri="{FF2B5EF4-FFF2-40B4-BE49-F238E27FC236}">
                 <a16:creationId xmlns:a16="http://schemas.microsoft.com/office/drawing/2014/main" id="{6A194374-6A5A-4B4B-B0D7-8D87ADDC1519}"/>
               </a:ext>
             </a:extLst>
           </p:cNvPr>
           <p:cNvSpPr>
-            <a:spLocks xmlns:a="http://schemas.openxmlformats.org/drawingml/2006/main" noGrp="1"/>
-          </p:cNvSpPr>
-          <p:nvPr/>
-        </p:nvSpPr>
-        <p:spPr>
-          <a:xfrm xmlns:a="http://schemas.openxmlformats.org/drawingml/2006/main">
+            <a:spLocks noGrp="1"/>
+          </p:cNvSpPr>
+          <p:nvPr/>
+        </p:nvSpPr>
+        <p:spPr>
+          <a:xfrm>
             <a:off x="609600" y="971550"/>
             <a:ext cx="914400" cy="57150"/>
           </a:xfrm>
-          <a:prstGeom xmlns:a="http://schemas.openxmlformats.org/drawingml/2006/main" prst="rect">
-            <a:avLst/>
-          </a:prstGeom>
-          <a:solidFill xmlns:a="http://schemas.openxmlformats.org/drawingml/2006/main">
+          <a:prstGeom prst="rect">
+            <a:avLst/>
+          </a:prstGeom>
+          <a:solidFill>
             <a:srgbClr val="EDB86C"/>
           </a:solidFill>
-          <a:ln xmlns:a="http://schemas.openxmlformats.org/drawingml/2006/main" w="0">
-            <a:noFill/>
-          </a:ln>
-        </p:spPr>
-      </p:sp>
-      <p:sp>
-        <p:nvSpPr>
-          <p:cNvPr id="3" name="">
-            <a:extLst xmlns:a="http://schemas.openxmlformats.org/drawingml/2006/main">
+          <a:ln w="0">
+            <a:noFill/>
+          </a:ln>
+        </p:spPr>
+        <p:txBody>
+          <a:bodyPr/>
+          <a:lstStyle/>
+          <a:p>
+            <a:endParaRPr lang="en-US"/>
+          </a:p>
+        </p:txBody>
+      </p:sp>
+      <p:sp>
+        <p:nvSpPr>
+          <p:cNvPr id="3" name="Rectangle 2">
+            <a:extLst>
               <a:ext uri="{FF2B5EF4-FFF2-40B4-BE49-F238E27FC236}">
                 <a16:creationId xmlns:a16="http://schemas.microsoft.com/office/drawing/2014/main" id="{48A75E87-984C-4667-ABF6-0C3EB62DDD2F}"/>
               </a:ext>
             </a:extLst>
           </p:cNvPr>
           <p:cNvSpPr>
-            <a:spLocks xmlns:a="http://schemas.openxmlformats.org/drawingml/2006/main" noGrp="1"/>
-          </p:cNvSpPr>
-          <p:nvPr/>
-        </p:nvSpPr>
-        <p:spPr>
-          <a:xfrm xmlns:a="http://schemas.openxmlformats.org/drawingml/2006/main">
+            <a:spLocks noGrp="1"/>
+          </p:cNvSpPr>
+          <p:nvPr/>
+        </p:nvSpPr>
+        <p:spPr>
+          <a:xfrm>
             <a:off x="609600" y="1333500"/>
             <a:ext cx="4286250" cy="323850"/>
           </a:xfrm>
-          <a:prstGeom xmlns:a="http://schemas.openxmlformats.org/drawingml/2006/main" prst="rect">
-            <a:avLst/>
-          </a:prstGeom>
-          <a:noFill xmlns:a="http://schemas.openxmlformats.org/drawingml/2006/main"/>
-          <a:ln xmlns:a="http://schemas.openxmlformats.org/drawingml/2006/main" w="0">
-            <a:noFill/>
-          </a:ln>
-        </p:spPr>
-        <p:txBody>
-          <a:bodyPr xmlns:a="http://schemas.openxmlformats.org/drawingml/2006/main">
+          <a:prstGeom prst="rect">
+            <a:avLst/>
+          </a:prstGeom>
+          <a:noFill/>
+          <a:ln w="0">
+            <a:noFill/>
+          </a:ln>
+        </p:spPr>
+        <p:txBody>
+          <a:bodyPr>
             <a:noAutofit/>
           </a:bodyPr>
-          <a:lstStyle xmlns:a="http://schemas.openxmlformats.org/drawingml/2006/main"/>
-          <a:p xmlns:a="http://schemas.openxmlformats.org/drawingml/2006/main">
+          <a:lstStyle/>
+          <a:p>
             <a:pPr>
               <a:defRPr sz="2025" b="1">
                 <a:solidFill>
@@ -3326,37 +3256,37 @@
       </p:sp>
       <p:sp>
         <p:nvSpPr>
-          <p:cNvPr id="4" name="">
-            <a:extLst xmlns:a="http://schemas.openxmlformats.org/drawingml/2006/main">
+          <p:cNvPr id="4" name="Rectangle 3">
+            <a:extLst>
               <a:ext uri="{FF2B5EF4-FFF2-40B4-BE49-F238E27FC236}">
                 <a16:creationId xmlns:a16="http://schemas.microsoft.com/office/drawing/2014/main" id="{60AB40C6-C050-48FA-97D5-29C6CE80EDE7}"/>
               </a:ext>
             </a:extLst>
           </p:cNvPr>
           <p:cNvSpPr>
-            <a:spLocks xmlns:a="http://schemas.openxmlformats.org/drawingml/2006/main" noGrp="1"/>
-          </p:cNvSpPr>
-          <p:nvPr/>
-        </p:nvSpPr>
-        <p:spPr>
-          <a:xfrm xmlns:a="http://schemas.openxmlformats.org/drawingml/2006/main">
+            <a:spLocks noGrp="1"/>
+          </p:cNvSpPr>
+          <p:nvPr/>
+        </p:nvSpPr>
+        <p:spPr>
+          <a:xfrm>
             <a:off x="609600" y="1695450"/>
             <a:ext cx="4762500" cy="457200"/>
           </a:xfrm>
-          <a:prstGeom xmlns:a="http://schemas.openxmlformats.org/drawingml/2006/main" prst="rect">
-            <a:avLst/>
-          </a:prstGeom>
-          <a:noFill xmlns:a="http://schemas.openxmlformats.org/drawingml/2006/main"/>
-          <a:ln xmlns:a="http://schemas.openxmlformats.org/drawingml/2006/main" w="0">
-            <a:noFill/>
-          </a:ln>
-        </p:spPr>
-        <p:txBody>
-          <a:bodyPr xmlns:a="http://schemas.openxmlformats.org/drawingml/2006/main">
+          <a:prstGeom prst="rect">
+            <a:avLst/>
+          </a:prstGeom>
+          <a:noFill/>
+          <a:ln w="0">
+            <a:noFill/>
+          </a:ln>
+        </p:spPr>
+        <p:txBody>
+          <a:bodyPr>
             <a:noAutofit/>
           </a:bodyPr>
-          <a:lstStyle xmlns:a="http://schemas.openxmlformats.org/drawingml/2006/main"/>
-          <a:p xmlns:a="http://schemas.openxmlformats.org/drawingml/2006/main">
+          <a:lstStyle/>
+          <a:p>
             <a:pPr>
               <a:defRPr sz="1800" b="0">
                 <a:solidFill>
@@ -3383,67 +3313,74 @@
       </p:sp>
       <p:sp>
         <p:nvSpPr>
-          <p:cNvPr id="5" name="">
-            <a:extLst xmlns:a="http://schemas.openxmlformats.org/drawingml/2006/main">
+          <p:cNvPr id="5" name="Rectangle 4">
+            <a:extLst>
               <a:ext uri="{FF2B5EF4-FFF2-40B4-BE49-F238E27FC236}">
                 <a16:creationId xmlns:a16="http://schemas.microsoft.com/office/drawing/2014/main" id="{4A80008C-3B52-48B6-A3E6-6BD73CA69FF2}"/>
               </a:ext>
             </a:extLst>
           </p:cNvPr>
           <p:cNvSpPr>
-            <a:spLocks xmlns:a="http://schemas.openxmlformats.org/drawingml/2006/main" noGrp="1"/>
-          </p:cNvSpPr>
-          <p:nvPr/>
-        </p:nvSpPr>
-        <p:spPr>
-          <a:xfrm xmlns:a="http://schemas.openxmlformats.org/drawingml/2006/main">
+            <a:spLocks noGrp="1"/>
+          </p:cNvSpPr>
+          <p:nvPr/>
+        </p:nvSpPr>
+        <p:spPr>
+          <a:xfrm>
             <a:off x="609600" y="2209800"/>
             <a:ext cx="4762500" cy="19050"/>
           </a:xfrm>
-          <a:prstGeom xmlns:a="http://schemas.openxmlformats.org/drawingml/2006/main" prst="rect">
-            <a:avLst/>
-          </a:prstGeom>
-          <a:solidFill xmlns:a="http://schemas.openxmlformats.org/drawingml/2006/main">
+          <a:prstGeom prst="rect">
+            <a:avLst/>
+          </a:prstGeom>
+          <a:solidFill>
             <a:srgbClr val="D5D8D3"/>
           </a:solidFill>
-          <a:ln xmlns:a="http://schemas.openxmlformats.org/drawingml/2006/main" w="0">
-            <a:noFill/>
-          </a:ln>
-        </p:spPr>
-      </p:sp>
-      <p:sp>
-        <p:nvSpPr>
-          <p:cNvPr id="6" name="">
-            <a:extLst xmlns:a="http://schemas.openxmlformats.org/drawingml/2006/main">
+          <a:ln w="0">
+            <a:noFill/>
+          </a:ln>
+        </p:spPr>
+        <p:txBody>
+          <a:bodyPr/>
+          <a:lstStyle/>
+          <a:p>
+            <a:endParaRPr lang="en-US"/>
+          </a:p>
+        </p:txBody>
+      </p:sp>
+      <p:sp>
+        <p:nvSpPr>
+          <p:cNvPr id="6" name="Rectangle 5">
+            <a:extLst>
               <a:ext uri="{FF2B5EF4-FFF2-40B4-BE49-F238E27FC236}">
                 <a16:creationId xmlns:a16="http://schemas.microsoft.com/office/drawing/2014/main" id="{EC79ADA8-0359-499F-A29E-2D2E943C107D}"/>
               </a:ext>
             </a:extLst>
           </p:cNvPr>
           <p:cNvSpPr>
-            <a:spLocks xmlns:a="http://schemas.openxmlformats.org/drawingml/2006/main" noGrp="1"/>
-          </p:cNvSpPr>
-          <p:nvPr/>
-        </p:nvSpPr>
-        <p:spPr>
-          <a:xfrm xmlns:a="http://schemas.openxmlformats.org/drawingml/2006/main">
+            <a:spLocks noGrp="1"/>
+          </p:cNvSpPr>
+          <p:nvPr/>
+        </p:nvSpPr>
+        <p:spPr>
+          <a:xfrm>
             <a:off x="609600" y="2305050"/>
             <a:ext cx="4286250" cy="323850"/>
           </a:xfrm>
-          <a:prstGeom xmlns:a="http://schemas.openxmlformats.org/drawingml/2006/main" prst="rect">
-            <a:avLst/>
-          </a:prstGeom>
-          <a:noFill xmlns:a="http://schemas.openxmlformats.org/drawingml/2006/main"/>
-          <a:ln xmlns:a="http://schemas.openxmlformats.org/drawingml/2006/main" w="0">
-            <a:noFill/>
-          </a:ln>
-        </p:spPr>
-        <p:txBody>
-          <a:bodyPr xmlns:a="http://schemas.openxmlformats.org/drawingml/2006/main">
+          <a:prstGeom prst="rect">
+            <a:avLst/>
+          </a:prstGeom>
+          <a:noFill/>
+          <a:ln w="0">
+            <a:noFill/>
+          </a:ln>
+        </p:spPr>
+        <p:txBody>
+          <a:bodyPr>
             <a:noAutofit/>
           </a:bodyPr>
-          <a:lstStyle xmlns:a="http://schemas.openxmlformats.org/drawingml/2006/main"/>
-          <a:p xmlns:a="http://schemas.openxmlformats.org/drawingml/2006/main">
+          <a:lstStyle/>
+          <a:p>
             <a:pPr>
               <a:defRPr sz="2025" b="1">
                 <a:solidFill>
@@ -3470,37 +3407,37 @@
       </p:sp>
       <p:sp>
         <p:nvSpPr>
-          <p:cNvPr id="7" name="">
-            <a:extLst xmlns:a="http://schemas.openxmlformats.org/drawingml/2006/main">
+          <p:cNvPr id="7" name="Rectangle 6">
+            <a:extLst>
               <a:ext uri="{FF2B5EF4-FFF2-40B4-BE49-F238E27FC236}">
                 <a16:creationId xmlns:a16="http://schemas.microsoft.com/office/drawing/2014/main" id="{588E90FB-7430-4E69-80CC-54F4CE154986}"/>
               </a:ext>
             </a:extLst>
           </p:cNvPr>
           <p:cNvSpPr>
-            <a:spLocks xmlns:a="http://schemas.openxmlformats.org/drawingml/2006/main" noGrp="1"/>
-          </p:cNvSpPr>
-          <p:nvPr/>
-        </p:nvSpPr>
-        <p:spPr>
-          <a:xfrm xmlns:a="http://schemas.openxmlformats.org/drawingml/2006/main">
+            <a:spLocks noGrp="1"/>
+          </p:cNvSpPr>
+          <p:nvPr/>
+        </p:nvSpPr>
+        <p:spPr>
+          <a:xfrm>
             <a:off x="609600" y="2667000"/>
             <a:ext cx="4762500" cy="457200"/>
           </a:xfrm>
-          <a:prstGeom xmlns:a="http://schemas.openxmlformats.org/drawingml/2006/main" prst="rect">
-            <a:avLst/>
-          </a:prstGeom>
-          <a:noFill xmlns:a="http://schemas.openxmlformats.org/drawingml/2006/main"/>
-          <a:ln xmlns:a="http://schemas.openxmlformats.org/drawingml/2006/main" w="0">
-            <a:noFill/>
-          </a:ln>
-        </p:spPr>
-        <p:txBody>
-          <a:bodyPr xmlns:a="http://schemas.openxmlformats.org/drawingml/2006/main">
+          <a:prstGeom prst="rect">
+            <a:avLst/>
+          </a:prstGeom>
+          <a:noFill/>
+          <a:ln w="0">
+            <a:noFill/>
+          </a:ln>
+        </p:spPr>
+        <p:txBody>
+          <a:bodyPr>
             <a:noAutofit/>
           </a:bodyPr>
-          <a:lstStyle xmlns:a="http://schemas.openxmlformats.org/drawingml/2006/main"/>
-          <a:p xmlns:a="http://schemas.openxmlformats.org/drawingml/2006/main">
+          <a:lstStyle/>
+          <a:p>
             <a:pPr>
               <a:defRPr sz="1800" b="0">
                 <a:solidFill>
@@ -3527,67 +3464,74 @@
       </p:sp>
       <p:sp>
         <p:nvSpPr>
-          <p:cNvPr id="8" name="">
-            <a:extLst xmlns:a="http://schemas.openxmlformats.org/drawingml/2006/main">
+          <p:cNvPr id="8" name="Rectangle 7">
+            <a:extLst>
               <a:ext uri="{FF2B5EF4-FFF2-40B4-BE49-F238E27FC236}">
                 <a16:creationId xmlns:a16="http://schemas.microsoft.com/office/drawing/2014/main" id="{7A4F2A7D-7540-4013-81A5-0F67A370E479}"/>
               </a:ext>
             </a:extLst>
           </p:cNvPr>
           <p:cNvSpPr>
-            <a:spLocks xmlns:a="http://schemas.openxmlformats.org/drawingml/2006/main" noGrp="1"/>
-          </p:cNvSpPr>
-          <p:nvPr/>
-        </p:nvSpPr>
-        <p:spPr>
-          <a:xfrm xmlns:a="http://schemas.openxmlformats.org/drawingml/2006/main">
+            <a:spLocks noGrp="1"/>
+          </p:cNvSpPr>
+          <p:nvPr/>
+        </p:nvSpPr>
+        <p:spPr>
+          <a:xfrm>
             <a:off x="609600" y="3181350"/>
             <a:ext cx="4762500" cy="19050"/>
           </a:xfrm>
-          <a:prstGeom xmlns:a="http://schemas.openxmlformats.org/drawingml/2006/main" prst="rect">
-            <a:avLst/>
-          </a:prstGeom>
-          <a:solidFill xmlns:a="http://schemas.openxmlformats.org/drawingml/2006/main">
+          <a:prstGeom prst="rect">
+            <a:avLst/>
+          </a:prstGeom>
+          <a:solidFill>
             <a:srgbClr val="D5D8D3"/>
           </a:solidFill>
-          <a:ln xmlns:a="http://schemas.openxmlformats.org/drawingml/2006/main" w="0">
-            <a:noFill/>
-          </a:ln>
-        </p:spPr>
-      </p:sp>
-      <p:sp>
-        <p:nvSpPr>
-          <p:cNvPr id="9" name="">
-            <a:extLst xmlns:a="http://schemas.openxmlformats.org/drawingml/2006/main">
+          <a:ln w="0">
+            <a:noFill/>
+          </a:ln>
+        </p:spPr>
+        <p:txBody>
+          <a:bodyPr/>
+          <a:lstStyle/>
+          <a:p>
+            <a:endParaRPr lang="en-US"/>
+          </a:p>
+        </p:txBody>
+      </p:sp>
+      <p:sp>
+        <p:nvSpPr>
+          <p:cNvPr id="9" name="Rectangle 8">
+            <a:extLst>
               <a:ext uri="{FF2B5EF4-FFF2-40B4-BE49-F238E27FC236}">
                 <a16:creationId xmlns:a16="http://schemas.microsoft.com/office/drawing/2014/main" id="{540D43AF-BE57-41C5-BA16-ED755FBECBAE}"/>
               </a:ext>
             </a:extLst>
           </p:cNvPr>
           <p:cNvSpPr>
-            <a:spLocks xmlns:a="http://schemas.openxmlformats.org/drawingml/2006/main" noGrp="1"/>
-          </p:cNvSpPr>
-          <p:nvPr/>
-        </p:nvSpPr>
-        <p:spPr>
-          <a:xfrm xmlns:a="http://schemas.openxmlformats.org/drawingml/2006/main">
+            <a:spLocks noGrp="1"/>
+          </p:cNvSpPr>
+          <p:nvPr/>
+        </p:nvSpPr>
+        <p:spPr>
+          <a:xfrm>
             <a:off x="609600" y="3276600"/>
             <a:ext cx="4286250" cy="323850"/>
           </a:xfrm>
-          <a:prstGeom xmlns:a="http://schemas.openxmlformats.org/drawingml/2006/main" prst="rect">
-            <a:avLst/>
-          </a:prstGeom>
-          <a:noFill xmlns:a="http://schemas.openxmlformats.org/drawingml/2006/main"/>
-          <a:ln xmlns:a="http://schemas.openxmlformats.org/drawingml/2006/main" w="0">
-            <a:noFill/>
-          </a:ln>
-        </p:spPr>
-        <p:txBody>
-          <a:bodyPr xmlns:a="http://schemas.openxmlformats.org/drawingml/2006/main">
+          <a:prstGeom prst="rect">
+            <a:avLst/>
+          </a:prstGeom>
+          <a:noFill/>
+          <a:ln w="0">
+            <a:noFill/>
+          </a:ln>
+        </p:spPr>
+        <p:txBody>
+          <a:bodyPr>
             <a:noAutofit/>
           </a:bodyPr>
-          <a:lstStyle xmlns:a="http://schemas.openxmlformats.org/drawingml/2006/main"/>
-          <a:p xmlns:a="http://schemas.openxmlformats.org/drawingml/2006/main">
+          <a:lstStyle/>
+          <a:p>
             <a:pPr>
               <a:defRPr sz="2025" b="1">
                 <a:solidFill>
@@ -3614,37 +3558,37 @@
       </p:sp>
       <p:sp>
         <p:nvSpPr>
-          <p:cNvPr id="10" name="">
-            <a:extLst xmlns:a="http://schemas.openxmlformats.org/drawingml/2006/main">
+          <p:cNvPr id="10" name="Rectangle 9">
+            <a:extLst>
               <a:ext uri="{FF2B5EF4-FFF2-40B4-BE49-F238E27FC236}">
                 <a16:creationId xmlns:a16="http://schemas.microsoft.com/office/drawing/2014/main" id="{96F68B7B-4EAA-491A-A242-D968561819F1}"/>
               </a:ext>
             </a:extLst>
           </p:cNvPr>
           <p:cNvSpPr>
-            <a:spLocks xmlns:a="http://schemas.openxmlformats.org/drawingml/2006/main" noGrp="1"/>
-          </p:cNvSpPr>
-          <p:nvPr/>
-        </p:nvSpPr>
-        <p:spPr>
-          <a:xfrm xmlns:a="http://schemas.openxmlformats.org/drawingml/2006/main">
+            <a:spLocks noGrp="1"/>
+          </p:cNvSpPr>
+          <p:nvPr/>
+        </p:nvSpPr>
+        <p:spPr>
+          <a:xfrm>
             <a:off x="609600" y="3638550"/>
             <a:ext cx="4762500" cy="457200"/>
           </a:xfrm>
-          <a:prstGeom xmlns:a="http://schemas.openxmlformats.org/drawingml/2006/main" prst="rect">
-            <a:avLst/>
-          </a:prstGeom>
-          <a:noFill xmlns:a="http://schemas.openxmlformats.org/drawingml/2006/main"/>
-          <a:ln xmlns:a="http://schemas.openxmlformats.org/drawingml/2006/main" w="0">
-            <a:noFill/>
-          </a:ln>
-        </p:spPr>
-        <p:txBody>
-          <a:bodyPr xmlns:a="http://schemas.openxmlformats.org/drawingml/2006/main">
+          <a:prstGeom prst="rect">
+            <a:avLst/>
+          </a:prstGeom>
+          <a:noFill/>
+          <a:ln w="0">
+            <a:noFill/>
+          </a:ln>
+        </p:spPr>
+        <p:txBody>
+          <a:bodyPr>
             <a:noAutofit/>
           </a:bodyPr>
-          <a:lstStyle xmlns:a="http://schemas.openxmlformats.org/drawingml/2006/main"/>
-          <a:p xmlns:a="http://schemas.openxmlformats.org/drawingml/2006/main">
+          <a:lstStyle/>
+          <a:p>
             <a:pPr>
               <a:defRPr sz="1800" b="0">
                 <a:solidFill>
@@ -3671,67 +3615,74 @@
       </p:sp>
       <p:sp>
         <p:nvSpPr>
-          <p:cNvPr id="11" name="">
-            <a:extLst xmlns:a="http://schemas.openxmlformats.org/drawingml/2006/main">
+          <p:cNvPr id="11" name="Rectangle 10">
+            <a:extLst>
               <a:ext uri="{FF2B5EF4-FFF2-40B4-BE49-F238E27FC236}">
                 <a16:creationId xmlns:a16="http://schemas.microsoft.com/office/drawing/2014/main" id="{1347CF12-85F9-469E-B462-7F718523A14A}"/>
               </a:ext>
             </a:extLst>
           </p:cNvPr>
           <p:cNvSpPr>
-            <a:spLocks xmlns:a="http://schemas.openxmlformats.org/drawingml/2006/main" noGrp="1"/>
-          </p:cNvSpPr>
-          <p:nvPr/>
-        </p:nvSpPr>
-        <p:spPr>
-          <a:xfrm xmlns:a="http://schemas.openxmlformats.org/drawingml/2006/main">
+            <a:spLocks noGrp="1"/>
+          </p:cNvSpPr>
+          <p:nvPr/>
+        </p:nvSpPr>
+        <p:spPr>
+          <a:xfrm>
             <a:off x="609600" y="4152900"/>
             <a:ext cx="4762500" cy="19050"/>
           </a:xfrm>
-          <a:prstGeom xmlns:a="http://schemas.openxmlformats.org/drawingml/2006/main" prst="rect">
-            <a:avLst/>
-          </a:prstGeom>
-          <a:solidFill xmlns:a="http://schemas.openxmlformats.org/drawingml/2006/main">
+          <a:prstGeom prst="rect">
+            <a:avLst/>
+          </a:prstGeom>
+          <a:solidFill>
             <a:srgbClr val="D5D8D3"/>
           </a:solidFill>
-          <a:ln xmlns:a="http://schemas.openxmlformats.org/drawingml/2006/main" w="0">
-            <a:noFill/>
-          </a:ln>
-        </p:spPr>
-      </p:sp>
-      <p:sp>
-        <p:nvSpPr>
-          <p:cNvPr id="12" name="">
-            <a:extLst xmlns:a="http://schemas.openxmlformats.org/drawingml/2006/main">
+          <a:ln w="0">
+            <a:noFill/>
+          </a:ln>
+        </p:spPr>
+        <p:txBody>
+          <a:bodyPr/>
+          <a:lstStyle/>
+          <a:p>
+            <a:endParaRPr lang="en-US"/>
+          </a:p>
+        </p:txBody>
+      </p:sp>
+      <p:sp>
+        <p:nvSpPr>
+          <p:cNvPr id="12" name="Rectangle 11">
+            <a:extLst>
               <a:ext uri="{FF2B5EF4-FFF2-40B4-BE49-F238E27FC236}">
                 <a16:creationId xmlns:a16="http://schemas.microsoft.com/office/drawing/2014/main" id="{6A3CD8FB-563C-4327-A09C-19E74FBB5055}"/>
               </a:ext>
             </a:extLst>
           </p:cNvPr>
           <p:cNvSpPr>
-            <a:spLocks xmlns:a="http://schemas.openxmlformats.org/drawingml/2006/main" noGrp="1"/>
-          </p:cNvSpPr>
-          <p:nvPr/>
-        </p:nvSpPr>
-        <p:spPr>
-          <a:xfrm xmlns:a="http://schemas.openxmlformats.org/drawingml/2006/main">
+            <a:spLocks noGrp="1"/>
+          </p:cNvSpPr>
+          <p:nvPr/>
+        </p:nvSpPr>
+        <p:spPr>
+          <a:xfrm>
             <a:off x="609600" y="4248150"/>
             <a:ext cx="4286250" cy="323850"/>
           </a:xfrm>
-          <a:prstGeom xmlns:a="http://schemas.openxmlformats.org/drawingml/2006/main" prst="rect">
-            <a:avLst/>
-          </a:prstGeom>
-          <a:noFill xmlns:a="http://schemas.openxmlformats.org/drawingml/2006/main"/>
-          <a:ln xmlns:a="http://schemas.openxmlformats.org/drawingml/2006/main" w="0">
-            <a:noFill/>
-          </a:ln>
-        </p:spPr>
-        <p:txBody>
-          <a:bodyPr xmlns:a="http://schemas.openxmlformats.org/drawingml/2006/main">
+          <a:prstGeom prst="rect">
+            <a:avLst/>
+          </a:prstGeom>
+          <a:noFill/>
+          <a:ln w="0">
+            <a:noFill/>
+          </a:ln>
+        </p:spPr>
+        <p:txBody>
+          <a:bodyPr>
             <a:noAutofit/>
           </a:bodyPr>
-          <a:lstStyle xmlns:a="http://schemas.openxmlformats.org/drawingml/2006/main"/>
-          <a:p xmlns:a="http://schemas.openxmlformats.org/drawingml/2006/main">
+          <a:lstStyle/>
+          <a:p>
             <a:pPr>
               <a:defRPr sz="2025" b="1">
                 <a:solidFill>
@@ -3758,37 +3709,37 @@
       </p:sp>
       <p:sp>
         <p:nvSpPr>
-          <p:cNvPr id="13" name="">
-            <a:extLst xmlns:a="http://schemas.openxmlformats.org/drawingml/2006/main">
+          <p:cNvPr id="13" name="Rectangle 12">
+            <a:extLst>
               <a:ext uri="{FF2B5EF4-FFF2-40B4-BE49-F238E27FC236}">
                 <a16:creationId xmlns:a16="http://schemas.microsoft.com/office/drawing/2014/main" id="{D33C4613-E541-4D4C-8527-6D1A0E4818E4}"/>
               </a:ext>
             </a:extLst>
           </p:cNvPr>
           <p:cNvSpPr>
-            <a:spLocks xmlns:a="http://schemas.openxmlformats.org/drawingml/2006/main" noGrp="1"/>
-          </p:cNvSpPr>
-          <p:nvPr/>
-        </p:nvSpPr>
-        <p:spPr>
-          <a:xfrm xmlns:a="http://schemas.openxmlformats.org/drawingml/2006/main">
+            <a:spLocks noGrp="1"/>
+          </p:cNvSpPr>
+          <p:nvPr/>
+        </p:nvSpPr>
+        <p:spPr>
+          <a:xfrm>
             <a:off x="609600" y="4610100"/>
             <a:ext cx="4762500" cy="457200"/>
           </a:xfrm>
-          <a:prstGeom xmlns:a="http://schemas.openxmlformats.org/drawingml/2006/main" prst="rect">
-            <a:avLst/>
-          </a:prstGeom>
-          <a:noFill xmlns:a="http://schemas.openxmlformats.org/drawingml/2006/main"/>
-          <a:ln xmlns:a="http://schemas.openxmlformats.org/drawingml/2006/main" w="0">
-            <a:noFill/>
-          </a:ln>
-        </p:spPr>
-        <p:txBody>
-          <a:bodyPr xmlns:a="http://schemas.openxmlformats.org/drawingml/2006/main">
+          <a:prstGeom prst="rect">
+            <a:avLst/>
+          </a:prstGeom>
+          <a:noFill/>
+          <a:ln w="0">
+            <a:noFill/>
+          </a:ln>
+        </p:spPr>
+        <p:txBody>
+          <a:bodyPr>
             <a:noAutofit/>
           </a:bodyPr>
-          <a:lstStyle xmlns:a="http://schemas.openxmlformats.org/drawingml/2006/main"/>
-          <a:p xmlns:a="http://schemas.openxmlformats.org/drawingml/2006/main">
+          <a:lstStyle/>
+          <a:p>
             <a:pPr>
               <a:defRPr sz="1800" b="0">
                 <a:solidFill>
@@ -3815,67 +3766,74 @@
       </p:sp>
       <p:sp>
         <p:nvSpPr>
-          <p:cNvPr id="14" name="">
-            <a:extLst xmlns:a="http://schemas.openxmlformats.org/drawingml/2006/main">
+          <p:cNvPr id="14" name="Rectangle 13">
+            <a:extLst>
               <a:ext uri="{FF2B5EF4-FFF2-40B4-BE49-F238E27FC236}">
                 <a16:creationId xmlns:a16="http://schemas.microsoft.com/office/drawing/2014/main" id="{46491424-E82F-42B4-B729-C83A234A1574}"/>
               </a:ext>
             </a:extLst>
           </p:cNvPr>
           <p:cNvSpPr>
-            <a:spLocks xmlns:a="http://schemas.openxmlformats.org/drawingml/2006/main" noGrp="1"/>
-          </p:cNvSpPr>
-          <p:nvPr/>
-        </p:nvSpPr>
-        <p:spPr>
-          <a:xfrm xmlns:a="http://schemas.openxmlformats.org/drawingml/2006/main">
+            <a:spLocks noGrp="1"/>
+          </p:cNvSpPr>
+          <p:nvPr/>
+        </p:nvSpPr>
+        <p:spPr>
+          <a:xfrm>
             <a:off x="609600" y="5124450"/>
             <a:ext cx="4762500" cy="19050"/>
           </a:xfrm>
-          <a:prstGeom xmlns:a="http://schemas.openxmlformats.org/drawingml/2006/main" prst="rect">
-            <a:avLst/>
-          </a:prstGeom>
-          <a:solidFill xmlns:a="http://schemas.openxmlformats.org/drawingml/2006/main">
+          <a:prstGeom prst="rect">
+            <a:avLst/>
+          </a:prstGeom>
+          <a:solidFill>
             <a:srgbClr val="D5D8D3"/>
           </a:solidFill>
-          <a:ln xmlns:a="http://schemas.openxmlformats.org/drawingml/2006/main" w="0">
-            <a:noFill/>
-          </a:ln>
-        </p:spPr>
-      </p:sp>
-      <p:sp>
-        <p:nvSpPr>
-          <p:cNvPr id="15" name="">
-            <a:extLst xmlns:a="http://schemas.openxmlformats.org/drawingml/2006/main">
+          <a:ln w="0">
+            <a:noFill/>
+          </a:ln>
+        </p:spPr>
+        <p:txBody>
+          <a:bodyPr/>
+          <a:lstStyle/>
+          <a:p>
+            <a:endParaRPr lang="en-US"/>
+          </a:p>
+        </p:txBody>
+      </p:sp>
+      <p:sp>
+        <p:nvSpPr>
+          <p:cNvPr id="15" name="Rectangle 14">
+            <a:extLst>
               <a:ext uri="{FF2B5EF4-FFF2-40B4-BE49-F238E27FC236}">
                 <a16:creationId xmlns:a16="http://schemas.microsoft.com/office/drawing/2014/main" id="{F8F98A72-7F29-4EC6-9E3F-9389C3538C34}"/>
               </a:ext>
             </a:extLst>
           </p:cNvPr>
           <p:cNvSpPr>
-            <a:spLocks xmlns:a="http://schemas.openxmlformats.org/drawingml/2006/main" noGrp="1"/>
-          </p:cNvSpPr>
-          <p:nvPr/>
-        </p:nvSpPr>
-        <p:spPr>
-          <a:xfrm xmlns:a="http://schemas.openxmlformats.org/drawingml/2006/main">
+            <a:spLocks noGrp="1"/>
+          </p:cNvSpPr>
+          <p:nvPr/>
+        </p:nvSpPr>
+        <p:spPr>
+          <a:xfrm>
             <a:off x="609600" y="5219700"/>
             <a:ext cx="4286250" cy="323850"/>
           </a:xfrm>
-          <a:prstGeom xmlns:a="http://schemas.openxmlformats.org/drawingml/2006/main" prst="rect">
-            <a:avLst/>
-          </a:prstGeom>
-          <a:noFill xmlns:a="http://schemas.openxmlformats.org/drawingml/2006/main"/>
-          <a:ln xmlns:a="http://schemas.openxmlformats.org/drawingml/2006/main" w="0">
-            <a:noFill/>
-          </a:ln>
-        </p:spPr>
-        <p:txBody>
-          <a:bodyPr xmlns:a="http://schemas.openxmlformats.org/drawingml/2006/main">
+          <a:prstGeom prst="rect">
+            <a:avLst/>
+          </a:prstGeom>
+          <a:noFill/>
+          <a:ln w="0">
+            <a:noFill/>
+          </a:ln>
+        </p:spPr>
+        <p:txBody>
+          <a:bodyPr>
             <a:noAutofit/>
           </a:bodyPr>
-          <a:lstStyle xmlns:a="http://schemas.openxmlformats.org/drawingml/2006/main"/>
-          <a:p xmlns:a="http://schemas.openxmlformats.org/drawingml/2006/main">
+          <a:lstStyle/>
+          <a:p>
             <a:pPr>
               <a:defRPr sz="2025" b="1">
                 <a:solidFill>
@@ -3902,37 +3860,37 @@
       </p:sp>
       <p:sp>
         <p:nvSpPr>
-          <p:cNvPr id="16" name="">
-            <a:extLst xmlns:a="http://schemas.openxmlformats.org/drawingml/2006/main">
+          <p:cNvPr id="16" name="Rectangle 15">
+            <a:extLst>
               <a:ext uri="{FF2B5EF4-FFF2-40B4-BE49-F238E27FC236}">
                 <a16:creationId xmlns:a16="http://schemas.microsoft.com/office/drawing/2014/main" id="{5FBA2735-4D07-4AFA-B41C-00F281535D4B}"/>
               </a:ext>
             </a:extLst>
           </p:cNvPr>
           <p:cNvSpPr>
-            <a:spLocks xmlns:a="http://schemas.openxmlformats.org/drawingml/2006/main" noGrp="1"/>
-          </p:cNvSpPr>
-          <p:nvPr/>
-        </p:nvSpPr>
-        <p:spPr>
-          <a:xfrm xmlns:a="http://schemas.openxmlformats.org/drawingml/2006/main">
+            <a:spLocks noGrp="1"/>
+          </p:cNvSpPr>
+          <p:nvPr/>
+        </p:nvSpPr>
+        <p:spPr>
+          <a:xfrm>
             <a:off x="609600" y="5581650"/>
             <a:ext cx="4762500" cy="457200"/>
           </a:xfrm>
-          <a:prstGeom xmlns:a="http://schemas.openxmlformats.org/drawingml/2006/main" prst="rect">
-            <a:avLst/>
-          </a:prstGeom>
-          <a:noFill xmlns:a="http://schemas.openxmlformats.org/drawingml/2006/main"/>
-          <a:ln xmlns:a="http://schemas.openxmlformats.org/drawingml/2006/main" w="0">
-            <a:noFill/>
-          </a:ln>
-        </p:spPr>
-        <p:txBody>
-          <a:bodyPr xmlns:a="http://schemas.openxmlformats.org/drawingml/2006/main">
+          <a:prstGeom prst="rect">
+            <a:avLst/>
+          </a:prstGeom>
+          <a:noFill/>
+          <a:ln w="0">
+            <a:noFill/>
+          </a:ln>
+        </p:spPr>
+        <p:txBody>
+          <a:bodyPr>
             <a:noAutofit/>
           </a:bodyPr>
-          <a:lstStyle xmlns:a="http://schemas.openxmlformats.org/drawingml/2006/main"/>
-          <a:p xmlns:a="http://schemas.openxmlformats.org/drawingml/2006/main">
+          <a:lstStyle/>
+          <a:p>
             <a:pPr>
               <a:defRPr sz="1800" b="0">
                 <a:solidFill>
@@ -3959,69 +3917,76 @@
       </p:sp>
       <p:sp>
         <p:nvSpPr>
-          <p:cNvPr id="17" name="">
-            <a:extLst xmlns:a="http://schemas.openxmlformats.org/drawingml/2006/main">
+          <p:cNvPr id="17" name="Rounded Rectangle 16">
+            <a:extLst>
               <a:ext uri="{FF2B5EF4-FFF2-40B4-BE49-F238E27FC236}">
                 <a16:creationId xmlns:a16="http://schemas.microsoft.com/office/drawing/2014/main" id="{5714BFAB-CB50-45AB-A83C-00969BACEF63}"/>
               </a:ext>
             </a:extLst>
           </p:cNvPr>
           <p:cNvSpPr>
-            <a:spLocks xmlns:a="http://schemas.openxmlformats.org/drawingml/2006/main" noGrp="1"/>
-          </p:cNvSpPr>
-          <p:nvPr/>
-        </p:nvSpPr>
-        <p:spPr>
-          <a:xfrm xmlns:a="http://schemas.openxmlformats.org/drawingml/2006/main">
+            <a:spLocks noGrp="1"/>
+          </p:cNvSpPr>
+          <p:nvPr/>
+        </p:nvSpPr>
+        <p:spPr>
+          <a:xfrm>
             <a:off x="5905500" y="1257300"/>
             <a:ext cx="5676900" cy="4838700"/>
           </a:xfrm>
-          <a:prstGeom xmlns:a="http://schemas.openxmlformats.org/drawingml/2006/main" prst="roundRect">
+          <a:prstGeom prst="roundRect">
             <a:avLst>
               <a:gd name="adj" fmla="val 1575"/>
             </a:avLst>
           </a:prstGeom>
-          <a:solidFill xmlns:a="http://schemas.openxmlformats.org/drawingml/2006/main">
+          <a:solidFill>
             <a:srgbClr val="FFFDF9"/>
           </a:solidFill>
-          <a:ln xmlns:a="http://schemas.openxmlformats.org/drawingml/2006/main" w="0">
-            <a:noFill/>
-          </a:ln>
-        </p:spPr>
-      </p:sp>
-      <p:sp>
-        <p:nvSpPr>
-          <p:cNvPr id="18" name="">
-            <a:extLst xmlns:a="http://schemas.openxmlformats.org/drawingml/2006/main">
+          <a:ln w="0">
+            <a:noFill/>
+          </a:ln>
+        </p:spPr>
+        <p:txBody>
+          <a:bodyPr/>
+          <a:lstStyle/>
+          <a:p>
+            <a:endParaRPr lang="en-US"/>
+          </a:p>
+        </p:txBody>
+      </p:sp>
+      <p:sp>
+        <p:nvSpPr>
+          <p:cNvPr id="18" name="Rectangle 17">
+            <a:extLst>
               <a:ext uri="{FF2B5EF4-FFF2-40B4-BE49-F238E27FC236}">
                 <a16:creationId xmlns:a16="http://schemas.microsoft.com/office/drawing/2014/main" id="{553DEE08-8E9D-4349-A361-1738AD829F77}"/>
               </a:ext>
             </a:extLst>
           </p:cNvPr>
           <p:cNvSpPr>
-            <a:spLocks xmlns:a="http://schemas.openxmlformats.org/drawingml/2006/main" noGrp="1"/>
-          </p:cNvSpPr>
-          <p:nvPr/>
-        </p:nvSpPr>
-        <p:spPr>
-          <a:xfrm xmlns:a="http://schemas.openxmlformats.org/drawingml/2006/main">
+            <a:spLocks noGrp="1"/>
+          </p:cNvSpPr>
+          <p:nvPr/>
+        </p:nvSpPr>
+        <p:spPr>
+          <a:xfrm>
             <a:off x="6172200" y="1447800"/>
             <a:ext cx="4000500" cy="361950"/>
           </a:xfrm>
-          <a:prstGeom xmlns:a="http://schemas.openxmlformats.org/drawingml/2006/main" prst="rect">
-            <a:avLst/>
-          </a:prstGeom>
-          <a:noFill xmlns:a="http://schemas.openxmlformats.org/drawingml/2006/main"/>
-          <a:ln xmlns:a="http://schemas.openxmlformats.org/drawingml/2006/main" w="0">
-            <a:noFill/>
-          </a:ln>
-        </p:spPr>
-        <p:txBody>
-          <a:bodyPr xmlns:a="http://schemas.openxmlformats.org/drawingml/2006/main">
+          <a:prstGeom prst="rect">
+            <a:avLst/>
+          </a:prstGeom>
+          <a:noFill/>
+          <a:ln w="0">
+            <a:noFill/>
+          </a:ln>
+        </p:spPr>
+        <p:txBody>
+          <a:bodyPr>
             <a:noAutofit/>
           </a:bodyPr>
-          <a:lstStyle xmlns:a="http://schemas.openxmlformats.org/drawingml/2006/main"/>
-          <a:p xmlns:a="http://schemas.openxmlformats.org/drawingml/2006/main">
+          <a:lstStyle/>
+          <a:p>
             <a:pPr>
               <a:defRPr sz="2100" b="1">
                 <a:solidFill>
@@ -4048,25 +4013,25 @@
       </p:sp>
       <p:pic>
         <p:nvPicPr>
-          <p:cNvPr id="38" name=""/>
+          <p:cNvPr id="38" name="Picture 37"/>
           <p:cNvPicPr>
-            <a:picLocks xmlns:a="http://schemas.openxmlformats.org/drawingml/2006/main" noChangeAspect="1"/>
+            <a:picLocks noChangeAspect="1"/>
           </p:cNvPicPr>
           <p:nvPr/>
         </p:nvPicPr>
         <p:blipFill>
-          <a:blip xmlns:r="http://schemas.openxmlformats.org/officeDocument/2006/relationships" xmlns:a="http://schemas.openxmlformats.org/drawingml/2006/main" r:embed="R98bc2d438efc425d"/>
-          <a:srcRect xmlns:a="http://schemas.openxmlformats.org/drawingml/2006/main" l="2238" t="0" r="2238" b="0"/>
-          <a:stretch xmlns:a="http://schemas.openxmlformats.org/drawingml/2006/main">
-            <a:fillRect l="0" t="0" r="0" b="0"/>
+          <a:blip r:embed="rId3"/>
+          <a:srcRect l="2238" r="2238"/>
+          <a:stretch>
+            <a:fillRect/>
           </a:stretch>
         </p:blipFill>
         <p:spPr>
-          <a:xfrm xmlns:a="http://schemas.openxmlformats.org/drawingml/2006/main">
+          <a:xfrm>
             <a:off x="6172200" y="1924050"/>
             <a:ext cx="5143500" cy="3886200"/>
           </a:xfrm>
-          <a:prstGeom xmlns:a="http://schemas.openxmlformats.org/drawingml/2006/main" prst="roundRect">
+          <a:prstGeom prst="roundRect">
             <a:avLst>
               <a:gd name="adj" fmla="val 1961"/>
             </a:avLst>
@@ -4080,17 +4045,21 @@
       </p:ext>
     </p:extLst>
   </p:cSld>
+  <p:clrMapOvr>
+    <a:masterClrMapping/>
+  </p:clrMapOvr>
 </p:sld>
 </file>
 
 <file path=ppt/slides/slide5.xml><?xml version="1.0" encoding="utf-8"?>
-<p:sld xmlns:p="http://schemas.openxmlformats.org/presentationml/2006/main">
+<p:sld xmlns:a="http://schemas.openxmlformats.org/drawingml/2006/main" xmlns:r="http://schemas.openxmlformats.org/officeDocument/2006/relationships" xmlns:p="http://schemas.openxmlformats.org/presentationml/2006/main">
   <p:cSld>
     <p:bg>
       <p:bgPr>
-        <a:solidFill xmlns:a="http://schemas.openxmlformats.org/drawingml/2006/main">
+        <a:solidFill>
           <a:srgbClr val="F6F5F1"/>
         </a:solidFill>
+        <a:effectLst/>
       </p:bgPr>
     </p:bg>
     <p:spTree>
@@ -4100,41 +4069,46 @@
         <p:nvPr/>
       </p:nvGrpSpPr>
       <p:grpSpPr>
-        <a:xfrm xmlns:a="http://schemas.openxmlformats.org/drawingml/2006/main"/>
+        <a:xfrm>
+          <a:off x="0" y="0"/>
+          <a:ext cx="0" cy="0"/>
+          <a:chOff x="0" y="0"/>
+          <a:chExt cx="0" cy="0"/>
+        </a:xfrm>
       </p:grpSpPr>
       <p:sp>
         <p:nvSpPr>
-          <p:cNvPr id="13" name="">
-            <a:extLst xmlns:a="http://schemas.openxmlformats.org/drawingml/2006/main">
+          <p:cNvPr id="13" name="Rectangle 12">
+            <a:extLst>
               <a:ext uri="{FF2B5EF4-FFF2-40B4-BE49-F238E27FC236}">
                 <a16:creationId xmlns:a16="http://schemas.microsoft.com/office/drawing/2014/main" id="{0CB5DC34-2809-40EE-909C-BD1B7CCEA8C2}"/>
               </a:ext>
             </a:extLst>
           </p:cNvPr>
           <p:cNvSpPr>
-            <a:spLocks xmlns:a="http://schemas.openxmlformats.org/drawingml/2006/main" noGrp="1"/>
-          </p:cNvSpPr>
-          <p:nvPr/>
-        </p:nvSpPr>
-        <p:spPr>
-          <a:xfrm xmlns:a="http://schemas.openxmlformats.org/drawingml/2006/main">
+            <a:spLocks noGrp="1"/>
+          </p:cNvSpPr>
+          <p:nvPr/>
+        </p:nvSpPr>
+        <p:spPr>
+          <a:xfrm>
             <a:off x="762000" y="361950"/>
             <a:ext cx="10325100" cy="552450"/>
           </a:xfrm>
-          <a:prstGeom xmlns:a="http://schemas.openxmlformats.org/drawingml/2006/main" prst="rect">
-            <a:avLst/>
-          </a:prstGeom>
-          <a:noFill xmlns:a="http://schemas.openxmlformats.org/drawingml/2006/main"/>
-          <a:ln xmlns:a="http://schemas.openxmlformats.org/drawingml/2006/main" w="0">
-            <a:noFill/>
-          </a:ln>
-        </p:spPr>
-        <p:txBody>
-          <a:bodyPr xmlns:a="http://schemas.openxmlformats.org/drawingml/2006/main">
+          <a:prstGeom prst="rect">
+            <a:avLst/>
+          </a:prstGeom>
+          <a:noFill/>
+          <a:ln w="0">
+            <a:noFill/>
+          </a:ln>
+        </p:spPr>
+        <p:txBody>
+          <a:bodyPr>
             <a:noAutofit/>
           </a:bodyPr>
-          <a:lstStyle xmlns:a="http://schemas.openxmlformats.org/drawingml/2006/main"/>
-          <a:p xmlns:a="http://schemas.openxmlformats.org/drawingml/2006/main">
+          <a:lstStyle/>
+          <a:p>
             <a:pPr>
               <a:defRPr sz="3150" b="1">
                 <a:solidFill>
@@ -4161,67 +4135,74 @@
       </p:sp>
       <p:sp>
         <p:nvSpPr>
-          <p:cNvPr id="2" name="">
-            <a:extLst xmlns:a="http://schemas.openxmlformats.org/drawingml/2006/main">
+          <p:cNvPr id="2" name="Rectangle 1">
+            <a:extLst>
               <a:ext uri="{FF2B5EF4-FFF2-40B4-BE49-F238E27FC236}">
                 <a16:creationId xmlns:a16="http://schemas.microsoft.com/office/drawing/2014/main" id="{69D57322-E402-4575-9D51-A4042D0BBB98}"/>
               </a:ext>
             </a:extLst>
           </p:cNvPr>
           <p:cNvSpPr>
-            <a:spLocks xmlns:a="http://schemas.openxmlformats.org/drawingml/2006/main" noGrp="1"/>
-          </p:cNvSpPr>
-          <p:nvPr/>
-        </p:nvSpPr>
-        <p:spPr>
-          <a:xfrm xmlns:a="http://schemas.openxmlformats.org/drawingml/2006/main">
+            <a:spLocks noGrp="1"/>
+          </p:cNvSpPr>
+          <p:nvPr/>
+        </p:nvSpPr>
+        <p:spPr>
+          <a:xfrm>
             <a:off x="762000" y="971550"/>
             <a:ext cx="914400" cy="57150"/>
           </a:xfrm>
-          <a:prstGeom xmlns:a="http://schemas.openxmlformats.org/drawingml/2006/main" prst="rect">
-            <a:avLst/>
-          </a:prstGeom>
-          <a:solidFill xmlns:a="http://schemas.openxmlformats.org/drawingml/2006/main">
+          <a:prstGeom prst="rect">
+            <a:avLst/>
+          </a:prstGeom>
+          <a:solidFill>
             <a:srgbClr val="EDB86C"/>
           </a:solidFill>
-          <a:ln xmlns:a="http://schemas.openxmlformats.org/drawingml/2006/main" w="0">
-            <a:noFill/>
-          </a:ln>
-        </p:spPr>
-      </p:sp>
-      <p:sp>
-        <p:nvSpPr>
-          <p:cNvPr id="3" name="">
-            <a:extLst xmlns:a="http://schemas.openxmlformats.org/drawingml/2006/main">
+          <a:ln w="0">
+            <a:noFill/>
+          </a:ln>
+        </p:spPr>
+        <p:txBody>
+          <a:bodyPr/>
+          <a:lstStyle/>
+          <a:p>
+            <a:endParaRPr lang="en-US"/>
+          </a:p>
+        </p:txBody>
+      </p:sp>
+      <p:sp>
+        <p:nvSpPr>
+          <p:cNvPr id="3" name="Rectangle 2">
+            <a:extLst>
               <a:ext uri="{FF2B5EF4-FFF2-40B4-BE49-F238E27FC236}">
                 <a16:creationId xmlns:a16="http://schemas.microsoft.com/office/drawing/2014/main" id="{ABD89D37-C6F1-4ED1-B086-CA1079FE1354}"/>
               </a:ext>
             </a:extLst>
           </p:cNvPr>
           <p:cNvSpPr>
-            <a:spLocks xmlns:a="http://schemas.openxmlformats.org/drawingml/2006/main" noGrp="1"/>
-          </p:cNvSpPr>
-          <p:nvPr/>
-        </p:nvSpPr>
-        <p:spPr>
-          <a:xfrm xmlns:a="http://schemas.openxmlformats.org/drawingml/2006/main">
+            <a:spLocks noGrp="1"/>
+          </p:cNvSpPr>
+          <p:nvPr/>
+        </p:nvSpPr>
+        <p:spPr>
+          <a:xfrm>
             <a:off x="609600" y="1466850"/>
             <a:ext cx="4000500" cy="361950"/>
           </a:xfrm>
-          <a:prstGeom xmlns:a="http://schemas.openxmlformats.org/drawingml/2006/main" prst="rect">
-            <a:avLst/>
-          </a:prstGeom>
-          <a:noFill xmlns:a="http://schemas.openxmlformats.org/drawingml/2006/main"/>
-          <a:ln xmlns:a="http://schemas.openxmlformats.org/drawingml/2006/main" w="0">
-            <a:noFill/>
-          </a:ln>
-        </p:spPr>
-        <p:txBody>
-          <a:bodyPr xmlns:a="http://schemas.openxmlformats.org/drawingml/2006/main">
+          <a:prstGeom prst="rect">
+            <a:avLst/>
+          </a:prstGeom>
+          <a:noFill/>
+          <a:ln w="0">
+            <a:noFill/>
+          </a:ln>
+        </p:spPr>
+        <p:txBody>
+          <a:bodyPr>
             <a:noAutofit/>
           </a:bodyPr>
-          <a:lstStyle xmlns:a="http://schemas.openxmlformats.org/drawingml/2006/main"/>
-          <a:p xmlns:a="http://schemas.openxmlformats.org/drawingml/2006/main">
+          <a:lstStyle/>
+          <a:p>
             <a:pPr>
               <a:defRPr sz="2250" b="1">
                 <a:solidFill>
@@ -4248,37 +4229,37 @@
       </p:sp>
       <p:sp>
         <p:nvSpPr>
-          <p:cNvPr id="4" name="">
-            <a:extLst xmlns:a="http://schemas.openxmlformats.org/drawingml/2006/main">
+          <p:cNvPr id="4" name="Rectangle 3">
+            <a:extLst>
               <a:ext uri="{FF2B5EF4-FFF2-40B4-BE49-F238E27FC236}">
                 <a16:creationId xmlns:a16="http://schemas.microsoft.com/office/drawing/2014/main" id="{66AB717C-6961-41EE-8DD6-B70D68F37EB5}"/>
               </a:ext>
             </a:extLst>
           </p:cNvPr>
           <p:cNvSpPr>
-            <a:spLocks xmlns:a="http://schemas.openxmlformats.org/drawingml/2006/main" noGrp="1"/>
-          </p:cNvSpPr>
-          <p:nvPr/>
-        </p:nvSpPr>
-        <p:spPr>
-          <a:xfrm xmlns:a="http://schemas.openxmlformats.org/drawingml/2006/main">
+            <a:spLocks noGrp="1"/>
+          </p:cNvSpPr>
+          <p:nvPr/>
+        </p:nvSpPr>
+        <p:spPr>
+          <a:xfrm>
             <a:off x="609600" y="1905000"/>
             <a:ext cx="4953000" cy="781050"/>
           </a:xfrm>
-          <a:prstGeom xmlns:a="http://schemas.openxmlformats.org/drawingml/2006/main" prst="rect">
-            <a:avLst/>
-          </a:prstGeom>
-          <a:noFill xmlns:a="http://schemas.openxmlformats.org/drawingml/2006/main"/>
-          <a:ln xmlns:a="http://schemas.openxmlformats.org/drawingml/2006/main" w="0">
-            <a:noFill/>
-          </a:ln>
-        </p:spPr>
-        <p:txBody>
-          <a:bodyPr xmlns:a="http://schemas.openxmlformats.org/drawingml/2006/main">
+          <a:prstGeom prst="rect">
+            <a:avLst/>
+          </a:prstGeom>
+          <a:noFill/>
+          <a:ln w="0">
+            <a:noFill/>
+          </a:ln>
+        </p:spPr>
+        <p:txBody>
+          <a:bodyPr>
             <a:noAutofit/>
           </a:bodyPr>
-          <a:lstStyle xmlns:a="http://schemas.openxmlformats.org/drawingml/2006/main"/>
-          <a:p xmlns:a="http://schemas.openxmlformats.org/drawingml/2006/main">
+          <a:lstStyle/>
+          <a:p>
             <a:pPr>
               <a:defRPr sz="1950" b="0">
                 <a:solidFill>
@@ -4305,67 +4286,74 @@
       </p:sp>
       <p:sp>
         <p:nvSpPr>
-          <p:cNvPr id="5" name="">
-            <a:extLst xmlns:a="http://schemas.openxmlformats.org/drawingml/2006/main">
+          <p:cNvPr id="5" name="Rectangle 4">
+            <a:extLst>
               <a:ext uri="{FF2B5EF4-FFF2-40B4-BE49-F238E27FC236}">
                 <a16:creationId xmlns:a16="http://schemas.microsoft.com/office/drawing/2014/main" id="{6893E120-AED4-425C-846D-2E670BAB3E80}"/>
               </a:ext>
             </a:extLst>
           </p:cNvPr>
           <p:cNvSpPr>
-            <a:spLocks xmlns:a="http://schemas.openxmlformats.org/drawingml/2006/main" noGrp="1"/>
-          </p:cNvSpPr>
-          <p:nvPr/>
-        </p:nvSpPr>
-        <p:spPr>
-          <a:xfrm xmlns:a="http://schemas.openxmlformats.org/drawingml/2006/main">
+            <a:spLocks noGrp="1"/>
+          </p:cNvSpPr>
+          <p:nvPr/>
+        </p:nvSpPr>
+        <p:spPr>
+          <a:xfrm>
             <a:off x="609600" y="2800350"/>
             <a:ext cx="4953000" cy="19050"/>
           </a:xfrm>
-          <a:prstGeom xmlns:a="http://schemas.openxmlformats.org/drawingml/2006/main" prst="rect">
-            <a:avLst/>
-          </a:prstGeom>
-          <a:solidFill xmlns:a="http://schemas.openxmlformats.org/drawingml/2006/main">
+          <a:prstGeom prst="rect">
+            <a:avLst/>
+          </a:prstGeom>
+          <a:solidFill>
             <a:srgbClr val="D5D8D3"/>
           </a:solidFill>
-          <a:ln xmlns:a="http://schemas.openxmlformats.org/drawingml/2006/main" w="0">
-            <a:noFill/>
-          </a:ln>
-        </p:spPr>
-      </p:sp>
-      <p:sp>
-        <p:nvSpPr>
-          <p:cNvPr id="6" name="">
-            <a:extLst xmlns:a="http://schemas.openxmlformats.org/drawingml/2006/main">
+          <a:ln w="0">
+            <a:noFill/>
+          </a:ln>
+        </p:spPr>
+        <p:txBody>
+          <a:bodyPr/>
+          <a:lstStyle/>
+          <a:p>
+            <a:endParaRPr lang="en-US"/>
+          </a:p>
+        </p:txBody>
+      </p:sp>
+      <p:sp>
+        <p:nvSpPr>
+          <p:cNvPr id="6" name="Rectangle 5">
+            <a:extLst>
               <a:ext uri="{FF2B5EF4-FFF2-40B4-BE49-F238E27FC236}">
                 <a16:creationId xmlns:a16="http://schemas.microsoft.com/office/drawing/2014/main" id="{A83177A2-5DCD-43D4-9C85-9FF9FEC1D71C}"/>
               </a:ext>
             </a:extLst>
           </p:cNvPr>
           <p:cNvSpPr>
-            <a:spLocks xmlns:a="http://schemas.openxmlformats.org/drawingml/2006/main" noGrp="1"/>
-          </p:cNvSpPr>
-          <p:nvPr/>
-        </p:nvSpPr>
-        <p:spPr>
-          <a:xfrm xmlns:a="http://schemas.openxmlformats.org/drawingml/2006/main">
+            <a:spLocks noGrp="1"/>
+          </p:cNvSpPr>
+          <p:nvPr/>
+        </p:nvSpPr>
+        <p:spPr>
+          <a:xfrm>
             <a:off x="609600" y="3048000"/>
             <a:ext cx="4000500" cy="361950"/>
           </a:xfrm>
-          <a:prstGeom xmlns:a="http://schemas.openxmlformats.org/drawingml/2006/main" prst="rect">
-            <a:avLst/>
-          </a:prstGeom>
-          <a:noFill xmlns:a="http://schemas.openxmlformats.org/drawingml/2006/main"/>
-          <a:ln xmlns:a="http://schemas.openxmlformats.org/drawingml/2006/main" w="0">
-            <a:noFill/>
-          </a:ln>
-        </p:spPr>
-        <p:txBody>
-          <a:bodyPr xmlns:a="http://schemas.openxmlformats.org/drawingml/2006/main">
+          <a:prstGeom prst="rect">
+            <a:avLst/>
+          </a:prstGeom>
+          <a:noFill/>
+          <a:ln w="0">
+            <a:noFill/>
+          </a:ln>
+        </p:spPr>
+        <p:txBody>
+          <a:bodyPr>
             <a:noAutofit/>
           </a:bodyPr>
-          <a:lstStyle xmlns:a="http://schemas.openxmlformats.org/drawingml/2006/main"/>
-          <a:p xmlns:a="http://schemas.openxmlformats.org/drawingml/2006/main">
+          <a:lstStyle/>
+          <a:p>
             <a:pPr>
               <a:defRPr sz="2250" b="1">
                 <a:solidFill>
@@ -4392,37 +4380,37 @@
       </p:sp>
       <p:sp>
         <p:nvSpPr>
-          <p:cNvPr id="7" name="">
-            <a:extLst xmlns:a="http://schemas.openxmlformats.org/drawingml/2006/main">
+          <p:cNvPr id="7" name="Rectangle 6">
+            <a:extLst>
               <a:ext uri="{FF2B5EF4-FFF2-40B4-BE49-F238E27FC236}">
                 <a16:creationId xmlns:a16="http://schemas.microsoft.com/office/drawing/2014/main" id="{991D7807-EB75-4038-A367-3E00EF2D38BD}"/>
               </a:ext>
             </a:extLst>
           </p:cNvPr>
           <p:cNvSpPr>
-            <a:spLocks xmlns:a="http://schemas.openxmlformats.org/drawingml/2006/main" noGrp="1"/>
-          </p:cNvSpPr>
-          <p:nvPr/>
-        </p:nvSpPr>
-        <p:spPr>
-          <a:xfrm xmlns:a="http://schemas.openxmlformats.org/drawingml/2006/main">
+            <a:spLocks noGrp="1"/>
+          </p:cNvSpPr>
+          <p:nvPr/>
+        </p:nvSpPr>
+        <p:spPr>
+          <a:xfrm>
             <a:off x="609600" y="3486150"/>
             <a:ext cx="4953000" cy="781050"/>
           </a:xfrm>
-          <a:prstGeom xmlns:a="http://schemas.openxmlformats.org/drawingml/2006/main" prst="rect">
-            <a:avLst/>
-          </a:prstGeom>
-          <a:noFill xmlns:a="http://schemas.openxmlformats.org/drawingml/2006/main"/>
-          <a:ln xmlns:a="http://schemas.openxmlformats.org/drawingml/2006/main" w="0">
-            <a:noFill/>
-          </a:ln>
-        </p:spPr>
-        <p:txBody>
-          <a:bodyPr xmlns:a="http://schemas.openxmlformats.org/drawingml/2006/main">
+          <a:prstGeom prst="rect">
+            <a:avLst/>
+          </a:prstGeom>
+          <a:noFill/>
+          <a:ln w="0">
+            <a:noFill/>
+          </a:ln>
+        </p:spPr>
+        <p:txBody>
+          <a:bodyPr>
             <a:noAutofit/>
           </a:bodyPr>
-          <a:lstStyle xmlns:a="http://schemas.openxmlformats.org/drawingml/2006/main"/>
-          <a:p xmlns:a="http://schemas.openxmlformats.org/drawingml/2006/main">
+          <a:lstStyle/>
+          <a:p>
             <a:pPr>
               <a:defRPr sz="1950" b="0">
                 <a:solidFill>
@@ -4449,67 +4437,74 @@
       </p:sp>
       <p:sp>
         <p:nvSpPr>
-          <p:cNvPr id="8" name="">
-            <a:extLst xmlns:a="http://schemas.openxmlformats.org/drawingml/2006/main">
+          <p:cNvPr id="8" name="Rectangle 7">
+            <a:extLst>
               <a:ext uri="{FF2B5EF4-FFF2-40B4-BE49-F238E27FC236}">
                 <a16:creationId xmlns:a16="http://schemas.microsoft.com/office/drawing/2014/main" id="{97B47681-96C0-41B5-98A1-96605B606494}"/>
               </a:ext>
             </a:extLst>
           </p:cNvPr>
           <p:cNvSpPr>
-            <a:spLocks xmlns:a="http://schemas.openxmlformats.org/drawingml/2006/main" noGrp="1"/>
-          </p:cNvSpPr>
-          <p:nvPr/>
-        </p:nvSpPr>
-        <p:spPr>
-          <a:xfrm xmlns:a="http://schemas.openxmlformats.org/drawingml/2006/main">
+            <a:spLocks noGrp="1"/>
+          </p:cNvSpPr>
+          <p:nvPr/>
+        </p:nvSpPr>
+        <p:spPr>
+          <a:xfrm>
             <a:off x="609600" y="4381500"/>
             <a:ext cx="4953000" cy="19050"/>
           </a:xfrm>
-          <a:prstGeom xmlns:a="http://schemas.openxmlformats.org/drawingml/2006/main" prst="rect">
-            <a:avLst/>
-          </a:prstGeom>
-          <a:solidFill xmlns:a="http://schemas.openxmlformats.org/drawingml/2006/main">
+          <a:prstGeom prst="rect">
+            <a:avLst/>
+          </a:prstGeom>
+          <a:solidFill>
             <a:srgbClr val="D5D8D3"/>
           </a:solidFill>
-          <a:ln xmlns:a="http://schemas.openxmlformats.org/drawingml/2006/main" w="0">
-            <a:noFill/>
-          </a:ln>
-        </p:spPr>
-      </p:sp>
-      <p:sp>
-        <p:nvSpPr>
-          <p:cNvPr id="9" name="">
-            <a:extLst xmlns:a="http://schemas.openxmlformats.org/drawingml/2006/main">
+          <a:ln w="0">
+            <a:noFill/>
+          </a:ln>
+        </p:spPr>
+        <p:txBody>
+          <a:bodyPr/>
+          <a:lstStyle/>
+          <a:p>
+            <a:endParaRPr lang="en-US"/>
+          </a:p>
+        </p:txBody>
+      </p:sp>
+      <p:sp>
+        <p:nvSpPr>
+          <p:cNvPr id="9" name="Rectangle 8">
+            <a:extLst>
               <a:ext uri="{FF2B5EF4-FFF2-40B4-BE49-F238E27FC236}">
                 <a16:creationId xmlns:a16="http://schemas.microsoft.com/office/drawing/2014/main" id="{5C21A5C6-1ADC-4539-9FD4-678CE027599B}"/>
               </a:ext>
             </a:extLst>
           </p:cNvPr>
           <p:cNvSpPr>
-            <a:spLocks xmlns:a="http://schemas.openxmlformats.org/drawingml/2006/main" noGrp="1"/>
-          </p:cNvSpPr>
-          <p:nvPr/>
-        </p:nvSpPr>
-        <p:spPr>
-          <a:xfrm xmlns:a="http://schemas.openxmlformats.org/drawingml/2006/main">
+            <a:spLocks noGrp="1"/>
+          </p:cNvSpPr>
+          <p:nvPr/>
+        </p:nvSpPr>
+        <p:spPr>
+          <a:xfrm>
             <a:off x="609600" y="4629150"/>
             <a:ext cx="4000500" cy="361950"/>
           </a:xfrm>
-          <a:prstGeom xmlns:a="http://schemas.openxmlformats.org/drawingml/2006/main" prst="rect">
-            <a:avLst/>
-          </a:prstGeom>
-          <a:noFill xmlns:a="http://schemas.openxmlformats.org/drawingml/2006/main"/>
-          <a:ln xmlns:a="http://schemas.openxmlformats.org/drawingml/2006/main" w="0">
-            <a:noFill/>
-          </a:ln>
-        </p:spPr>
-        <p:txBody>
-          <a:bodyPr xmlns:a="http://schemas.openxmlformats.org/drawingml/2006/main">
+          <a:prstGeom prst="rect">
+            <a:avLst/>
+          </a:prstGeom>
+          <a:noFill/>
+          <a:ln w="0">
+            <a:noFill/>
+          </a:ln>
+        </p:spPr>
+        <p:txBody>
+          <a:bodyPr>
             <a:noAutofit/>
           </a:bodyPr>
-          <a:lstStyle xmlns:a="http://schemas.openxmlformats.org/drawingml/2006/main"/>
-          <a:p xmlns:a="http://schemas.openxmlformats.org/drawingml/2006/main">
+          <a:lstStyle/>
+          <a:p>
             <a:pPr>
               <a:defRPr sz="2250" b="1">
                 <a:solidFill>
@@ -4536,37 +4531,37 @@
       </p:sp>
       <p:sp>
         <p:nvSpPr>
-          <p:cNvPr id="10" name="">
-            <a:extLst xmlns:a="http://schemas.openxmlformats.org/drawingml/2006/main">
+          <p:cNvPr id="10" name="Rectangle 9">
+            <a:extLst>
               <a:ext uri="{FF2B5EF4-FFF2-40B4-BE49-F238E27FC236}">
                 <a16:creationId xmlns:a16="http://schemas.microsoft.com/office/drawing/2014/main" id="{8A19C4D6-021F-4A02-B01E-893A7A7EC661}"/>
               </a:ext>
             </a:extLst>
           </p:cNvPr>
           <p:cNvSpPr>
-            <a:spLocks xmlns:a="http://schemas.openxmlformats.org/drawingml/2006/main" noGrp="1"/>
-          </p:cNvSpPr>
-          <p:nvPr/>
-        </p:nvSpPr>
-        <p:spPr>
-          <a:xfrm xmlns:a="http://schemas.openxmlformats.org/drawingml/2006/main">
+            <a:spLocks noGrp="1"/>
+          </p:cNvSpPr>
+          <p:nvPr/>
+        </p:nvSpPr>
+        <p:spPr>
+          <a:xfrm>
             <a:off x="609600" y="5067300"/>
             <a:ext cx="4953000" cy="781050"/>
           </a:xfrm>
-          <a:prstGeom xmlns:a="http://schemas.openxmlformats.org/drawingml/2006/main" prst="rect">
-            <a:avLst/>
-          </a:prstGeom>
-          <a:noFill xmlns:a="http://schemas.openxmlformats.org/drawingml/2006/main"/>
-          <a:ln xmlns:a="http://schemas.openxmlformats.org/drawingml/2006/main" w="0">
-            <a:noFill/>
-          </a:ln>
-        </p:spPr>
-        <p:txBody>
-          <a:bodyPr xmlns:a="http://schemas.openxmlformats.org/drawingml/2006/main">
+          <a:prstGeom prst="rect">
+            <a:avLst/>
+          </a:prstGeom>
+          <a:noFill/>
+          <a:ln w="0">
+            <a:noFill/>
+          </a:ln>
+        </p:spPr>
+        <p:txBody>
+          <a:bodyPr>
             <a:noAutofit/>
           </a:bodyPr>
-          <a:lstStyle xmlns:a="http://schemas.openxmlformats.org/drawingml/2006/main"/>
-          <a:p xmlns:a="http://schemas.openxmlformats.org/drawingml/2006/main">
+          <a:lstStyle/>
+          <a:p>
             <a:pPr>
               <a:defRPr sz="1950" b="0">
                 <a:solidFill>
@@ -4593,57 +4588,64 @@
       </p:sp>
       <p:sp>
         <p:nvSpPr>
-          <p:cNvPr id="11" name="">
-            <a:extLst xmlns:a="http://schemas.openxmlformats.org/drawingml/2006/main">
+          <p:cNvPr id="11" name="Rounded Rectangle 10">
+            <a:extLst>
               <a:ext uri="{FF2B5EF4-FFF2-40B4-BE49-F238E27FC236}">
                 <a16:creationId xmlns:a16="http://schemas.microsoft.com/office/drawing/2014/main" id="{E7E166EA-AEE1-4429-B4A6-1759398E727D}"/>
               </a:ext>
             </a:extLst>
           </p:cNvPr>
           <p:cNvSpPr>
-            <a:spLocks xmlns:a="http://schemas.openxmlformats.org/drawingml/2006/main" noGrp="1"/>
-          </p:cNvSpPr>
-          <p:nvPr/>
-        </p:nvSpPr>
-        <p:spPr>
-          <a:xfrm xmlns:a="http://schemas.openxmlformats.org/drawingml/2006/main">
+            <a:spLocks noGrp="1"/>
+          </p:cNvSpPr>
+          <p:nvPr/>
+        </p:nvSpPr>
+        <p:spPr>
+          <a:xfrm>
             <a:off x="6115050" y="1257300"/>
             <a:ext cx="5467350" cy="4857750"/>
           </a:xfrm>
-          <a:prstGeom xmlns:a="http://schemas.openxmlformats.org/drawingml/2006/main" prst="roundRect">
+          <a:prstGeom prst="roundRect">
             <a:avLst>
               <a:gd name="adj" fmla="val 1569"/>
             </a:avLst>
           </a:prstGeom>
-          <a:solidFill xmlns:a="http://schemas.openxmlformats.org/drawingml/2006/main">
+          <a:solidFill>
             <a:srgbClr val="FFFDF9"/>
           </a:solidFill>
-          <a:ln xmlns:a="http://schemas.openxmlformats.org/drawingml/2006/main" w="0">
-            <a:noFill/>
-          </a:ln>
-        </p:spPr>
+          <a:ln w="0">
+            <a:noFill/>
+          </a:ln>
+        </p:spPr>
+        <p:txBody>
+          <a:bodyPr/>
+          <a:lstStyle/>
+          <a:p>
+            <a:endParaRPr lang="en-US"/>
+          </a:p>
+        </p:txBody>
       </p:sp>
       <p:pic>
         <p:nvPicPr>
-          <p:cNvPr id="24" name=""/>
+          <p:cNvPr id="24" name="Picture 23"/>
           <p:cNvPicPr>
-            <a:picLocks xmlns:a="http://schemas.openxmlformats.org/drawingml/2006/main" noChangeAspect="1"/>
+            <a:picLocks noChangeAspect="1"/>
           </p:cNvPicPr>
           <p:nvPr/>
         </p:nvPicPr>
         <p:blipFill>
-          <a:blip xmlns:r="http://schemas.openxmlformats.org/officeDocument/2006/relationships" xmlns:a="http://schemas.openxmlformats.org/drawingml/2006/main" r:embed="R030e8e77d3784319"/>
-          <a:srcRect xmlns:a="http://schemas.openxmlformats.org/drawingml/2006/main" l="0" t="6328" r="0" b="6328"/>
-          <a:stretch xmlns:a="http://schemas.openxmlformats.org/drawingml/2006/main">
-            <a:fillRect l="0" t="0" r="0" b="0"/>
+          <a:blip r:embed="rId3"/>
+          <a:srcRect t="6328" b="6328"/>
+          <a:stretch>
+            <a:fillRect/>
           </a:stretch>
         </p:blipFill>
         <p:spPr>
-          <a:xfrm xmlns:a="http://schemas.openxmlformats.org/drawingml/2006/main">
+          <a:xfrm>
             <a:off x="6362700" y="1447800"/>
             <a:ext cx="4972050" cy="4457700"/>
           </a:xfrm>
-          <a:prstGeom xmlns:a="http://schemas.openxmlformats.org/drawingml/2006/main" prst="roundRect">
+          <a:prstGeom prst="roundRect">
             <a:avLst>
               <a:gd name="adj" fmla="val 1709"/>
             </a:avLst>
@@ -4657,17 +4659,21 @@
       </p:ext>
     </p:extLst>
   </p:cSld>
+  <p:clrMapOvr>
+    <a:masterClrMapping/>
+  </p:clrMapOvr>
 </p:sld>
 </file>
 
 <file path=ppt/slides/slide6.xml><?xml version="1.0" encoding="utf-8"?>
-<p:sld xmlns:p="http://schemas.openxmlformats.org/presentationml/2006/main">
+<p:sld xmlns:a="http://schemas.openxmlformats.org/drawingml/2006/main" xmlns:r="http://schemas.openxmlformats.org/officeDocument/2006/relationships" xmlns:p="http://schemas.openxmlformats.org/presentationml/2006/main">
   <p:cSld>
     <p:bg>
       <p:bgPr>
-        <a:solidFill xmlns:a="http://schemas.openxmlformats.org/drawingml/2006/main">
+        <a:solidFill>
           <a:srgbClr val="F6F5F1"/>
         </a:solidFill>
+        <a:effectLst/>
       </p:bgPr>
     </p:bg>
     <p:spTree>
@@ -4677,41 +4683,46 @@
         <p:nvPr/>
       </p:nvGrpSpPr>
       <p:grpSpPr>
-        <a:xfrm xmlns:a="http://schemas.openxmlformats.org/drawingml/2006/main"/>
+        <a:xfrm>
+          <a:off x="0" y="0"/>
+          <a:ext cx="0" cy="0"/>
+          <a:chOff x="0" y="0"/>
+          <a:chExt cx="0" cy="0"/>
+        </a:xfrm>
       </p:grpSpPr>
       <p:sp>
         <p:nvSpPr>
-          <p:cNvPr id="15" name="">
-            <a:extLst xmlns:a="http://schemas.openxmlformats.org/drawingml/2006/main">
+          <p:cNvPr id="15" name="Rectangle 14">
+            <a:extLst>
               <a:ext uri="{FF2B5EF4-FFF2-40B4-BE49-F238E27FC236}">
                 <a16:creationId xmlns:a16="http://schemas.microsoft.com/office/drawing/2014/main" id="{D983269A-7D10-4D33-9DE6-A76944842CBA}"/>
               </a:ext>
             </a:extLst>
           </p:cNvPr>
           <p:cNvSpPr>
-            <a:spLocks xmlns:a="http://schemas.openxmlformats.org/drawingml/2006/main" noGrp="1"/>
-          </p:cNvSpPr>
-          <p:nvPr/>
-        </p:nvSpPr>
-        <p:spPr>
-          <a:xfrm xmlns:a="http://schemas.openxmlformats.org/drawingml/2006/main">
+            <a:spLocks noGrp="1"/>
+          </p:cNvSpPr>
+          <p:nvPr/>
+        </p:nvSpPr>
+        <p:spPr>
+          <a:xfrm>
             <a:off x="609600" y="361950"/>
             <a:ext cx="10477500" cy="552450"/>
           </a:xfrm>
-          <a:prstGeom xmlns:a="http://schemas.openxmlformats.org/drawingml/2006/main" prst="rect">
-            <a:avLst/>
-          </a:prstGeom>
-          <a:noFill xmlns:a="http://schemas.openxmlformats.org/drawingml/2006/main"/>
-          <a:ln xmlns:a="http://schemas.openxmlformats.org/drawingml/2006/main" w="0">
-            <a:noFill/>
-          </a:ln>
-        </p:spPr>
-        <p:txBody>
-          <a:bodyPr xmlns:a="http://schemas.openxmlformats.org/drawingml/2006/main">
+          <a:prstGeom prst="rect">
+            <a:avLst/>
+          </a:prstGeom>
+          <a:noFill/>
+          <a:ln w="0">
+            <a:noFill/>
+          </a:ln>
+        </p:spPr>
+        <p:txBody>
+          <a:bodyPr>
             <a:noAutofit/>
           </a:bodyPr>
-          <a:lstStyle xmlns:a="http://schemas.openxmlformats.org/drawingml/2006/main"/>
-          <a:p xmlns:a="http://schemas.openxmlformats.org/drawingml/2006/main">
+          <a:lstStyle/>
+          <a:p>
             <a:pPr>
               <a:defRPr sz="3150" b="1">
                 <a:solidFill>
@@ -4738,67 +4749,74 @@
       </p:sp>
       <p:sp>
         <p:nvSpPr>
-          <p:cNvPr id="2" name="">
-            <a:extLst xmlns:a="http://schemas.openxmlformats.org/drawingml/2006/main">
+          <p:cNvPr id="2" name="Rectangle 1">
+            <a:extLst>
               <a:ext uri="{FF2B5EF4-FFF2-40B4-BE49-F238E27FC236}">
                 <a16:creationId xmlns:a16="http://schemas.microsoft.com/office/drawing/2014/main" id="{ADD2EDB3-81F2-49E1-AFB2-22350A2A1F2D}"/>
               </a:ext>
             </a:extLst>
           </p:cNvPr>
           <p:cNvSpPr>
-            <a:spLocks xmlns:a="http://schemas.openxmlformats.org/drawingml/2006/main" noGrp="1"/>
-          </p:cNvSpPr>
-          <p:nvPr/>
-        </p:nvSpPr>
-        <p:spPr>
-          <a:xfrm xmlns:a="http://schemas.openxmlformats.org/drawingml/2006/main">
+            <a:spLocks noGrp="1"/>
+          </p:cNvSpPr>
+          <p:nvPr/>
+        </p:nvSpPr>
+        <p:spPr>
+          <a:xfrm>
             <a:off x="609600" y="971550"/>
             <a:ext cx="914400" cy="57150"/>
           </a:xfrm>
-          <a:prstGeom xmlns:a="http://schemas.openxmlformats.org/drawingml/2006/main" prst="rect">
-            <a:avLst/>
-          </a:prstGeom>
-          <a:solidFill xmlns:a="http://schemas.openxmlformats.org/drawingml/2006/main">
+          <a:prstGeom prst="rect">
+            <a:avLst/>
+          </a:prstGeom>
+          <a:solidFill>
             <a:srgbClr val="EDB86C"/>
           </a:solidFill>
-          <a:ln xmlns:a="http://schemas.openxmlformats.org/drawingml/2006/main" w="0">
-            <a:noFill/>
-          </a:ln>
-        </p:spPr>
-      </p:sp>
-      <p:sp>
-        <p:nvSpPr>
-          <p:cNvPr id="3" name="">
-            <a:extLst xmlns:a="http://schemas.openxmlformats.org/drawingml/2006/main">
+          <a:ln w="0">
+            <a:noFill/>
+          </a:ln>
+        </p:spPr>
+        <p:txBody>
+          <a:bodyPr/>
+          <a:lstStyle/>
+          <a:p>
+            <a:endParaRPr lang="en-US"/>
+          </a:p>
+        </p:txBody>
+      </p:sp>
+      <p:sp>
+        <p:nvSpPr>
+          <p:cNvPr id="3" name="Rectangle 2">
+            <a:extLst>
               <a:ext uri="{FF2B5EF4-FFF2-40B4-BE49-F238E27FC236}">
                 <a16:creationId xmlns:a16="http://schemas.microsoft.com/office/drawing/2014/main" id="{49EF3BAB-6C28-4C5D-A135-56861D048258}"/>
               </a:ext>
             </a:extLst>
           </p:cNvPr>
           <p:cNvSpPr>
-            <a:spLocks xmlns:a="http://schemas.openxmlformats.org/drawingml/2006/main" noGrp="1"/>
-          </p:cNvSpPr>
-          <p:nvPr/>
-        </p:nvSpPr>
-        <p:spPr>
-          <a:xfrm xmlns:a="http://schemas.openxmlformats.org/drawingml/2006/main">
+            <a:spLocks noGrp="1"/>
+          </p:cNvSpPr>
+          <p:nvPr/>
+        </p:nvSpPr>
+        <p:spPr>
+          <a:xfrm>
             <a:off x="609600" y="1352550"/>
             <a:ext cx="6286500" cy="400050"/>
           </a:xfrm>
-          <a:prstGeom xmlns:a="http://schemas.openxmlformats.org/drawingml/2006/main" prst="rect">
-            <a:avLst/>
-          </a:prstGeom>
-          <a:noFill xmlns:a="http://schemas.openxmlformats.org/drawingml/2006/main"/>
-          <a:ln xmlns:a="http://schemas.openxmlformats.org/drawingml/2006/main" w="0">
-            <a:noFill/>
-          </a:ln>
-        </p:spPr>
-        <p:txBody>
-          <a:bodyPr xmlns:a="http://schemas.openxmlformats.org/drawingml/2006/main">
+          <a:prstGeom prst="rect">
+            <a:avLst/>
+          </a:prstGeom>
+          <a:noFill/>
+          <a:ln w="0">
+            <a:noFill/>
+          </a:ln>
+        </p:spPr>
+        <p:txBody>
+          <a:bodyPr>
             <a:noAutofit/>
           </a:bodyPr>
-          <a:lstStyle xmlns:a="http://schemas.openxmlformats.org/drawingml/2006/main"/>
-          <a:p xmlns:a="http://schemas.openxmlformats.org/drawingml/2006/main">
+          <a:lstStyle/>
+          <a:p>
             <a:pPr>
               <a:defRPr sz="2100" b="1">
                 <a:solidFill>
@@ -4810,7 +4828,7 @@
               </a:defRPr>
             </a:pPr>
             <a:r>
-              <a:rPr sz="2100" b="1">
+              <a:rPr sz="2100" b="1" dirty="0" err="1">
                 <a:solidFill>
                   <a:srgbClr val="0E3C75"/>
                 </a:solidFill>
@@ -4818,44 +4836,55 @@
                 <a:ea typeface="Arial"/>
                 <a:cs typeface="Arial"/>
               </a:rPr>
-              <a:t>MockAPI allowed two resources</a:t>
-            </a:r>
-          </a:p>
-        </p:txBody>
-      </p:sp>
-      <p:sp>
-        <p:nvSpPr>
-          <p:cNvPr id="4" name="">
-            <a:extLst xmlns:a="http://schemas.openxmlformats.org/drawingml/2006/main">
+              <a:t>MockAPI</a:t>
+            </a:r>
+            <a:r>
+              <a:rPr sz="2100" b="1" dirty="0">
+                <a:solidFill>
+                  <a:srgbClr val="0E3C75"/>
+                </a:solidFill>
+                <a:latin typeface="Arial"/>
+                <a:ea typeface="Arial"/>
+                <a:cs typeface="Arial"/>
+              </a:rPr>
+              <a:t> allowed two resources</a:t>
+            </a:r>
+          </a:p>
+        </p:txBody>
+      </p:sp>
+      <p:sp>
+        <p:nvSpPr>
+          <p:cNvPr id="4" name="Rectangle 3">
+            <a:extLst>
               <a:ext uri="{FF2B5EF4-FFF2-40B4-BE49-F238E27FC236}">
                 <a16:creationId xmlns:a16="http://schemas.microsoft.com/office/drawing/2014/main" id="{99F6B2A0-7EB8-49C4-9558-8DDC309345D0}"/>
               </a:ext>
             </a:extLst>
           </p:cNvPr>
           <p:cNvSpPr>
-            <a:spLocks xmlns:a="http://schemas.openxmlformats.org/drawingml/2006/main" noGrp="1"/>
-          </p:cNvSpPr>
-          <p:nvPr/>
-        </p:nvSpPr>
-        <p:spPr>
-          <a:xfrm xmlns:a="http://schemas.openxmlformats.org/drawingml/2006/main">
+            <a:spLocks noGrp="1"/>
+          </p:cNvSpPr>
+          <p:nvPr/>
+        </p:nvSpPr>
+        <p:spPr>
+          <a:xfrm>
             <a:off x="609600" y="1790700"/>
             <a:ext cx="6191250" cy="590550"/>
           </a:xfrm>
-          <a:prstGeom xmlns:a="http://schemas.openxmlformats.org/drawingml/2006/main" prst="rect">
-            <a:avLst/>
-          </a:prstGeom>
-          <a:noFill xmlns:a="http://schemas.openxmlformats.org/drawingml/2006/main"/>
-          <a:ln xmlns:a="http://schemas.openxmlformats.org/drawingml/2006/main" w="0">
-            <a:noFill/>
-          </a:ln>
-        </p:spPr>
-        <p:txBody>
-          <a:bodyPr xmlns:a="http://schemas.openxmlformats.org/drawingml/2006/main">
+          <a:prstGeom prst="rect">
+            <a:avLst/>
+          </a:prstGeom>
+          <a:noFill/>
+          <a:ln w="0">
+            <a:noFill/>
+          </a:ln>
+        </p:spPr>
+        <p:txBody>
+          <a:bodyPr>
             <a:noAutofit/>
           </a:bodyPr>
-          <a:lstStyle xmlns:a="http://schemas.openxmlformats.org/drawingml/2006/main"/>
-          <a:p xmlns:a="http://schemas.openxmlformats.org/drawingml/2006/main">
+          <a:lstStyle/>
+          <a:p>
             <a:pPr>
               <a:defRPr sz="1800" b="0">
                 <a:solidFill>
@@ -4867,7 +4896,7 @@
               </a:defRPr>
             </a:pPr>
             <a:r>
-              <a:rPr sz="1800" b="0">
+              <a:rPr sz="1800" b="0" dirty="0">
                 <a:solidFill>
                   <a:srgbClr val="1B211F"/>
                 </a:solidFill>
@@ -4875,74 +4904,122 @@
                 <a:ea typeface="Arial"/>
                 <a:cs typeface="Arial"/>
               </a:rPr>
-              <a:t>Customers and products share a typed referenceData resource</a:t>
-            </a:r>
-          </a:p>
-        </p:txBody>
-      </p:sp>
-      <p:sp>
-        <p:nvSpPr>
-          <p:cNvPr id="5" name="">
-            <a:extLst xmlns:a="http://schemas.openxmlformats.org/drawingml/2006/main">
+              <a:t>Customers and products share a typed </a:t>
+            </a:r>
+            <a:r>
+              <a:rPr sz="1800" b="0" dirty="0" err="1">
+                <a:solidFill>
+                  <a:srgbClr val="1B211F"/>
+                </a:solidFill>
+                <a:latin typeface="Arial"/>
+                <a:ea typeface="Arial"/>
+                <a:cs typeface="Arial"/>
+              </a:rPr>
+              <a:t>referenceData</a:t>
+            </a:r>
+            <a:r>
+              <a:rPr sz="1800" b="0" dirty="0">
+                <a:solidFill>
+                  <a:srgbClr val="1B211F"/>
+                </a:solidFill>
+                <a:latin typeface="Arial"/>
+                <a:ea typeface="Arial"/>
+                <a:cs typeface="Arial"/>
+              </a:rPr>
+              <a:t> resource</a:t>
+            </a:r>
+            <a:r>
+              <a:rPr lang="en-US" sz="1800" b="0" dirty="0">
+                <a:solidFill>
+                  <a:srgbClr val="1B211F"/>
+                </a:solidFill>
+                <a:latin typeface="Arial"/>
+                <a:ea typeface="Arial"/>
+                <a:cs typeface="Arial"/>
+              </a:rPr>
+              <a:t> </a:t>
+            </a:r>
+            <a:endParaRPr sz="1800" b="0" dirty="0">
+              <a:solidFill>
+                <a:srgbClr val="1B211F"/>
+              </a:solidFill>
+              <a:latin typeface="Arial"/>
+              <a:ea typeface="Arial"/>
+              <a:cs typeface="Arial"/>
+            </a:endParaRPr>
+          </a:p>
+        </p:txBody>
+      </p:sp>
+      <p:sp>
+        <p:nvSpPr>
+          <p:cNvPr id="5" name="Rectangle 4">
+            <a:extLst>
               <a:ext uri="{FF2B5EF4-FFF2-40B4-BE49-F238E27FC236}">
                 <a16:creationId xmlns:a16="http://schemas.microsoft.com/office/drawing/2014/main" id="{9665B90D-9152-4EC3-9A92-5AFD7C788F99}"/>
               </a:ext>
             </a:extLst>
           </p:cNvPr>
           <p:cNvSpPr>
-            <a:spLocks xmlns:a="http://schemas.openxmlformats.org/drawingml/2006/main" noGrp="1"/>
-          </p:cNvSpPr>
-          <p:nvPr/>
-        </p:nvSpPr>
-        <p:spPr>
-          <a:xfrm xmlns:a="http://schemas.openxmlformats.org/drawingml/2006/main">
+            <a:spLocks noGrp="1"/>
+          </p:cNvSpPr>
+          <p:nvPr/>
+        </p:nvSpPr>
+        <p:spPr>
+          <a:xfrm>
             <a:off x="609600" y="2495550"/>
             <a:ext cx="6191250" cy="19050"/>
           </a:xfrm>
-          <a:prstGeom xmlns:a="http://schemas.openxmlformats.org/drawingml/2006/main" prst="rect">
-            <a:avLst/>
-          </a:prstGeom>
-          <a:solidFill xmlns:a="http://schemas.openxmlformats.org/drawingml/2006/main">
+          <a:prstGeom prst="rect">
+            <a:avLst/>
+          </a:prstGeom>
+          <a:solidFill>
             <a:srgbClr val="D5D8D3"/>
           </a:solidFill>
-          <a:ln xmlns:a="http://schemas.openxmlformats.org/drawingml/2006/main" w="0">
-            <a:noFill/>
-          </a:ln>
-        </p:spPr>
-      </p:sp>
-      <p:sp>
-        <p:nvSpPr>
-          <p:cNvPr id="6" name="">
-            <a:extLst xmlns:a="http://schemas.openxmlformats.org/drawingml/2006/main">
+          <a:ln w="0">
+            <a:noFill/>
+          </a:ln>
+        </p:spPr>
+        <p:txBody>
+          <a:bodyPr/>
+          <a:lstStyle/>
+          <a:p>
+            <a:endParaRPr lang="en-US"/>
+          </a:p>
+        </p:txBody>
+      </p:sp>
+      <p:sp>
+        <p:nvSpPr>
+          <p:cNvPr id="6" name="Rectangle 5">
+            <a:extLst>
               <a:ext uri="{FF2B5EF4-FFF2-40B4-BE49-F238E27FC236}">
                 <a16:creationId xmlns:a16="http://schemas.microsoft.com/office/drawing/2014/main" id="{956FEE38-12C3-4DC2-A0A0-70E6EFAD4B99}"/>
               </a:ext>
             </a:extLst>
           </p:cNvPr>
           <p:cNvSpPr>
-            <a:spLocks xmlns:a="http://schemas.openxmlformats.org/drawingml/2006/main" noGrp="1"/>
-          </p:cNvSpPr>
-          <p:nvPr/>
-        </p:nvSpPr>
-        <p:spPr>
-          <a:xfrm xmlns:a="http://schemas.openxmlformats.org/drawingml/2006/main">
+            <a:spLocks noGrp="1"/>
+          </p:cNvSpPr>
+          <p:nvPr/>
+        </p:nvSpPr>
+        <p:spPr>
+          <a:xfrm>
             <a:off x="609600" y="2667000"/>
             <a:ext cx="6286500" cy="400050"/>
           </a:xfrm>
-          <a:prstGeom xmlns:a="http://schemas.openxmlformats.org/drawingml/2006/main" prst="rect">
-            <a:avLst/>
-          </a:prstGeom>
-          <a:noFill xmlns:a="http://schemas.openxmlformats.org/drawingml/2006/main"/>
-          <a:ln xmlns:a="http://schemas.openxmlformats.org/drawingml/2006/main" w="0">
-            <a:noFill/>
-          </a:ln>
-        </p:spPr>
-        <p:txBody>
-          <a:bodyPr xmlns:a="http://schemas.openxmlformats.org/drawingml/2006/main">
+          <a:prstGeom prst="rect">
+            <a:avLst/>
+          </a:prstGeom>
+          <a:noFill/>
+          <a:ln w="0">
+            <a:noFill/>
+          </a:ln>
+        </p:spPr>
+        <p:txBody>
+          <a:bodyPr>
             <a:noAutofit/>
           </a:bodyPr>
-          <a:lstStyle xmlns:a="http://schemas.openxmlformats.org/drawingml/2006/main"/>
-          <a:p xmlns:a="http://schemas.openxmlformats.org/drawingml/2006/main">
+          <a:lstStyle/>
+          <a:p>
             <a:pPr>
               <a:defRPr sz="2100" b="1">
                 <a:solidFill>
@@ -4969,37 +5046,37 @@
       </p:sp>
       <p:sp>
         <p:nvSpPr>
-          <p:cNvPr id="7" name="">
-            <a:extLst xmlns:a="http://schemas.openxmlformats.org/drawingml/2006/main">
+          <p:cNvPr id="7" name="Rectangle 6">
+            <a:extLst>
               <a:ext uri="{FF2B5EF4-FFF2-40B4-BE49-F238E27FC236}">
                 <a16:creationId xmlns:a16="http://schemas.microsoft.com/office/drawing/2014/main" id="{14783393-4D07-448C-8253-D93C5D8300C7}"/>
               </a:ext>
             </a:extLst>
           </p:cNvPr>
           <p:cNvSpPr>
-            <a:spLocks xmlns:a="http://schemas.openxmlformats.org/drawingml/2006/main" noGrp="1"/>
-          </p:cNvSpPr>
-          <p:nvPr/>
-        </p:nvSpPr>
-        <p:spPr>
-          <a:xfrm xmlns:a="http://schemas.openxmlformats.org/drawingml/2006/main">
+            <a:spLocks noGrp="1"/>
+          </p:cNvSpPr>
+          <p:nvPr/>
+        </p:nvSpPr>
+        <p:spPr>
+          <a:xfrm>
             <a:off x="609600" y="3105150"/>
             <a:ext cx="6191250" cy="590550"/>
           </a:xfrm>
-          <a:prstGeom xmlns:a="http://schemas.openxmlformats.org/drawingml/2006/main" prst="rect">
-            <a:avLst/>
-          </a:prstGeom>
-          <a:noFill xmlns:a="http://schemas.openxmlformats.org/drawingml/2006/main"/>
-          <a:ln xmlns:a="http://schemas.openxmlformats.org/drawingml/2006/main" w="0">
-            <a:noFill/>
-          </a:ln>
-        </p:spPr>
-        <p:txBody>
-          <a:bodyPr xmlns:a="http://schemas.openxmlformats.org/drawingml/2006/main">
+          <a:prstGeom prst="rect">
+            <a:avLst/>
+          </a:prstGeom>
+          <a:noFill/>
+          <a:ln w="0">
+            <a:noFill/>
+          </a:ln>
+        </p:spPr>
+        <p:txBody>
+          <a:bodyPr>
             <a:noAutofit/>
           </a:bodyPr>
-          <a:lstStyle xmlns:a="http://schemas.openxmlformats.org/drawingml/2006/main"/>
-          <a:p xmlns:a="http://schemas.openxmlformats.org/drawingml/2006/main">
+          <a:lstStyle/>
+          <a:p>
             <a:pPr>
               <a:defRPr sz="1800" b="0">
                 <a:solidFill>
@@ -5026,67 +5103,74 @@
       </p:sp>
       <p:sp>
         <p:nvSpPr>
-          <p:cNvPr id="8" name="">
-            <a:extLst xmlns:a="http://schemas.openxmlformats.org/drawingml/2006/main">
+          <p:cNvPr id="8" name="Rectangle 7">
+            <a:extLst>
               <a:ext uri="{FF2B5EF4-FFF2-40B4-BE49-F238E27FC236}">
                 <a16:creationId xmlns:a16="http://schemas.microsoft.com/office/drawing/2014/main" id="{01E8E665-3C8B-47AB-84AD-0D368BC87C3E}"/>
               </a:ext>
             </a:extLst>
           </p:cNvPr>
           <p:cNvSpPr>
-            <a:spLocks xmlns:a="http://schemas.openxmlformats.org/drawingml/2006/main" noGrp="1"/>
-          </p:cNvSpPr>
-          <p:nvPr/>
-        </p:nvSpPr>
-        <p:spPr>
-          <a:xfrm xmlns:a="http://schemas.openxmlformats.org/drawingml/2006/main">
+            <a:spLocks noGrp="1"/>
+          </p:cNvSpPr>
+          <p:nvPr/>
+        </p:nvSpPr>
+        <p:spPr>
+          <a:xfrm>
             <a:off x="609600" y="3810000"/>
             <a:ext cx="6191250" cy="19050"/>
           </a:xfrm>
-          <a:prstGeom xmlns:a="http://schemas.openxmlformats.org/drawingml/2006/main" prst="rect">
-            <a:avLst/>
-          </a:prstGeom>
-          <a:solidFill xmlns:a="http://schemas.openxmlformats.org/drawingml/2006/main">
+          <a:prstGeom prst="rect">
+            <a:avLst/>
+          </a:prstGeom>
+          <a:solidFill>
             <a:srgbClr val="D5D8D3"/>
           </a:solidFill>
-          <a:ln xmlns:a="http://schemas.openxmlformats.org/drawingml/2006/main" w="0">
-            <a:noFill/>
-          </a:ln>
-        </p:spPr>
-      </p:sp>
-      <p:sp>
-        <p:nvSpPr>
-          <p:cNvPr id="9" name="">
-            <a:extLst xmlns:a="http://schemas.openxmlformats.org/drawingml/2006/main">
+          <a:ln w="0">
+            <a:noFill/>
+          </a:ln>
+        </p:spPr>
+        <p:txBody>
+          <a:bodyPr/>
+          <a:lstStyle/>
+          <a:p>
+            <a:endParaRPr lang="en-US"/>
+          </a:p>
+        </p:txBody>
+      </p:sp>
+      <p:sp>
+        <p:nvSpPr>
+          <p:cNvPr id="9" name="Rectangle 8">
+            <a:extLst>
               <a:ext uri="{FF2B5EF4-FFF2-40B4-BE49-F238E27FC236}">
                 <a16:creationId xmlns:a16="http://schemas.microsoft.com/office/drawing/2014/main" id="{36311749-DB51-4E9F-BF4E-ECACAF508E40}"/>
               </a:ext>
             </a:extLst>
           </p:cNvPr>
           <p:cNvSpPr>
-            <a:spLocks xmlns:a="http://schemas.openxmlformats.org/drawingml/2006/main" noGrp="1"/>
-          </p:cNvSpPr>
-          <p:nvPr/>
-        </p:nvSpPr>
-        <p:spPr>
-          <a:xfrm xmlns:a="http://schemas.openxmlformats.org/drawingml/2006/main">
+            <a:spLocks noGrp="1"/>
+          </p:cNvSpPr>
+          <p:nvPr/>
+        </p:nvSpPr>
+        <p:spPr>
+          <a:xfrm>
             <a:off x="609600" y="3981450"/>
             <a:ext cx="6286500" cy="400050"/>
           </a:xfrm>
-          <a:prstGeom xmlns:a="http://schemas.openxmlformats.org/drawingml/2006/main" prst="rect">
-            <a:avLst/>
-          </a:prstGeom>
-          <a:noFill xmlns:a="http://schemas.openxmlformats.org/drawingml/2006/main"/>
-          <a:ln xmlns:a="http://schemas.openxmlformats.org/drawingml/2006/main" w="0">
-            <a:noFill/>
-          </a:ln>
-        </p:spPr>
-        <p:txBody>
-          <a:bodyPr xmlns:a="http://schemas.openxmlformats.org/drawingml/2006/main">
+          <a:prstGeom prst="rect">
+            <a:avLst/>
+          </a:prstGeom>
+          <a:noFill/>
+          <a:ln w="0">
+            <a:noFill/>
+          </a:ln>
+        </p:spPr>
+        <p:txBody>
+          <a:bodyPr>
             <a:noAutofit/>
           </a:bodyPr>
-          <a:lstStyle xmlns:a="http://schemas.openxmlformats.org/drawingml/2006/main"/>
-          <a:p xmlns:a="http://schemas.openxmlformats.org/drawingml/2006/main">
+          <a:lstStyle/>
+          <a:p>
             <a:pPr>
               <a:defRPr sz="2100" b="1">
                 <a:solidFill>
@@ -5113,37 +5197,37 @@
       </p:sp>
       <p:sp>
         <p:nvSpPr>
-          <p:cNvPr id="10" name="">
-            <a:extLst xmlns:a="http://schemas.openxmlformats.org/drawingml/2006/main">
+          <p:cNvPr id="10" name="Rectangle 9">
+            <a:extLst>
               <a:ext uri="{FF2B5EF4-FFF2-40B4-BE49-F238E27FC236}">
                 <a16:creationId xmlns:a16="http://schemas.microsoft.com/office/drawing/2014/main" id="{BF1363C9-3476-424F-B01A-E2550D706A33}"/>
               </a:ext>
             </a:extLst>
           </p:cNvPr>
           <p:cNvSpPr>
-            <a:spLocks xmlns:a="http://schemas.openxmlformats.org/drawingml/2006/main" noGrp="1"/>
-          </p:cNvSpPr>
-          <p:nvPr/>
-        </p:nvSpPr>
-        <p:spPr>
-          <a:xfrm xmlns:a="http://schemas.openxmlformats.org/drawingml/2006/main">
+            <a:spLocks noGrp="1"/>
+          </p:cNvSpPr>
+          <p:nvPr/>
+        </p:nvSpPr>
+        <p:spPr>
+          <a:xfrm>
             <a:off x="609600" y="4419600"/>
             <a:ext cx="6191250" cy="590550"/>
           </a:xfrm>
-          <a:prstGeom xmlns:a="http://schemas.openxmlformats.org/drawingml/2006/main" prst="rect">
-            <a:avLst/>
-          </a:prstGeom>
-          <a:noFill xmlns:a="http://schemas.openxmlformats.org/drawingml/2006/main"/>
-          <a:ln xmlns:a="http://schemas.openxmlformats.org/drawingml/2006/main" w="0">
-            <a:noFill/>
-          </a:ln>
-        </p:spPr>
-        <p:txBody>
-          <a:bodyPr xmlns:a="http://schemas.openxmlformats.org/drawingml/2006/main">
+          <a:prstGeom prst="rect">
+            <a:avLst/>
+          </a:prstGeom>
+          <a:noFill/>
+          <a:ln w="0">
+            <a:noFill/>
+          </a:ln>
+        </p:spPr>
+        <p:txBody>
+          <a:bodyPr>
             <a:noAutofit/>
           </a:bodyPr>
-          <a:lstStyle xmlns:a="http://schemas.openxmlformats.org/drawingml/2006/main"/>
-          <a:p xmlns:a="http://schemas.openxmlformats.org/drawingml/2006/main">
+          <a:lstStyle/>
+          <a:p>
             <a:pPr>
               <a:defRPr sz="1800" b="0">
                 <a:solidFill>
@@ -5170,57 +5254,64 @@
       </p:sp>
       <p:sp>
         <p:nvSpPr>
-          <p:cNvPr id="11" name="">
-            <a:extLst xmlns:a="http://schemas.openxmlformats.org/drawingml/2006/main">
+          <p:cNvPr id="11" name="Rounded Rectangle 10">
+            <a:extLst>
               <a:ext uri="{FF2B5EF4-FFF2-40B4-BE49-F238E27FC236}">
                 <a16:creationId xmlns:a16="http://schemas.microsoft.com/office/drawing/2014/main" id="{439966EE-B6E6-4D31-B5A1-2FCFE4F255EF}"/>
               </a:ext>
             </a:extLst>
           </p:cNvPr>
           <p:cNvSpPr>
-            <a:spLocks xmlns:a="http://schemas.openxmlformats.org/drawingml/2006/main" noGrp="1"/>
-          </p:cNvSpPr>
-          <p:nvPr/>
-        </p:nvSpPr>
-        <p:spPr>
-          <a:xfrm xmlns:a="http://schemas.openxmlformats.org/drawingml/2006/main">
+            <a:spLocks noGrp="1"/>
+          </p:cNvSpPr>
+          <p:nvPr/>
+        </p:nvSpPr>
+        <p:spPr>
+          <a:xfrm>
             <a:off x="7334250" y="1257300"/>
             <a:ext cx="4248150" cy="4095750"/>
           </a:xfrm>
-          <a:prstGeom xmlns:a="http://schemas.openxmlformats.org/drawingml/2006/main" prst="roundRect">
+          <a:prstGeom prst="roundRect">
             <a:avLst>
               <a:gd name="adj" fmla="val 1860"/>
             </a:avLst>
           </a:prstGeom>
-          <a:solidFill xmlns:a="http://schemas.openxmlformats.org/drawingml/2006/main">
+          <a:solidFill>
             <a:srgbClr val="FFFDF9"/>
           </a:solidFill>
-          <a:ln xmlns:a="http://schemas.openxmlformats.org/drawingml/2006/main" w="0">
-            <a:noFill/>
-          </a:ln>
-        </p:spPr>
+          <a:ln w="0">
+            <a:noFill/>
+          </a:ln>
+        </p:spPr>
+        <p:txBody>
+          <a:bodyPr/>
+          <a:lstStyle/>
+          <a:p>
+            <a:endParaRPr lang="en-US"/>
+          </a:p>
+        </p:txBody>
       </p:sp>
       <p:pic>
         <p:nvPicPr>
-          <p:cNvPr id="26" name=""/>
+          <p:cNvPr id="26" name="Picture 25"/>
           <p:cNvPicPr>
-            <a:picLocks xmlns:a="http://schemas.openxmlformats.org/drawingml/2006/main" noChangeAspect="1"/>
+            <a:picLocks noChangeAspect="1"/>
           </p:cNvPicPr>
           <p:nvPr/>
         </p:nvPicPr>
         <p:blipFill>
-          <a:blip xmlns:r="http://schemas.openxmlformats.org/officeDocument/2006/relationships" xmlns:a="http://schemas.openxmlformats.org/drawingml/2006/main" r:embed="R6466c0a9a2dd4804"/>
-          <a:srcRect xmlns:a="http://schemas.openxmlformats.org/drawingml/2006/main" l="265" t="0" r="265" b="0"/>
-          <a:stretch xmlns:a="http://schemas.openxmlformats.org/drawingml/2006/main">
-            <a:fillRect l="0" t="0" r="0" b="0"/>
+          <a:blip r:embed="rId3"/>
+          <a:srcRect l="265" r="265"/>
+          <a:stretch>
+            <a:fillRect/>
           </a:stretch>
         </p:blipFill>
         <p:spPr>
-          <a:xfrm xmlns:a="http://schemas.openxmlformats.org/drawingml/2006/main">
+          <a:xfrm>
             <a:off x="7562850" y="1466850"/>
             <a:ext cx="3790950" cy="3676650"/>
           </a:xfrm>
-          <a:prstGeom xmlns:a="http://schemas.openxmlformats.org/drawingml/2006/main" prst="roundRect">
+          <a:prstGeom prst="roundRect">
             <a:avLst>
               <a:gd name="adj" fmla="val 2073"/>
             </a:avLst>
@@ -5229,69 +5320,76 @@
       </p:pic>
       <p:sp>
         <p:nvSpPr>
-          <p:cNvPr id="13" name="">
-            <a:extLst xmlns:a="http://schemas.openxmlformats.org/drawingml/2006/main">
+          <p:cNvPr id="13" name="Rounded Rectangle 12">
+            <a:extLst>
               <a:ext uri="{FF2B5EF4-FFF2-40B4-BE49-F238E27FC236}">
                 <a16:creationId xmlns:a16="http://schemas.microsoft.com/office/drawing/2014/main" id="{526525C6-574F-4285-A2EC-477F077B8CC7}"/>
               </a:ext>
             </a:extLst>
           </p:cNvPr>
           <p:cNvSpPr>
-            <a:spLocks xmlns:a="http://schemas.openxmlformats.org/drawingml/2006/main" noGrp="1"/>
-          </p:cNvSpPr>
-          <p:nvPr/>
-        </p:nvSpPr>
-        <p:spPr>
-          <a:xfrm xmlns:a="http://schemas.openxmlformats.org/drawingml/2006/main">
+            <a:spLocks noGrp="1"/>
+          </p:cNvSpPr>
+          <p:nvPr/>
+        </p:nvSpPr>
+        <p:spPr>
+          <a:xfrm>
             <a:off x="609600" y="5657850"/>
             <a:ext cx="10972800" cy="685800"/>
           </a:xfrm>
-          <a:prstGeom xmlns:a="http://schemas.openxmlformats.org/drawingml/2006/main" prst="roundRect">
+          <a:prstGeom prst="roundRect">
             <a:avLst>
               <a:gd name="adj" fmla="val 11111"/>
             </a:avLst>
           </a:prstGeom>
-          <a:solidFill xmlns:a="http://schemas.openxmlformats.org/drawingml/2006/main">
+          <a:solidFill>
             <a:srgbClr val="EDB86C"/>
           </a:solidFill>
-          <a:ln xmlns:a="http://schemas.openxmlformats.org/drawingml/2006/main" w="0">
-            <a:noFill/>
-          </a:ln>
-        </p:spPr>
-      </p:sp>
-      <p:sp>
-        <p:nvSpPr>
-          <p:cNvPr id="14" name="">
-            <a:extLst xmlns:a="http://schemas.openxmlformats.org/drawingml/2006/main">
+          <a:ln w="0">
+            <a:noFill/>
+          </a:ln>
+        </p:spPr>
+        <p:txBody>
+          <a:bodyPr/>
+          <a:lstStyle/>
+          <a:p>
+            <a:endParaRPr lang="en-US"/>
+          </a:p>
+        </p:txBody>
+      </p:sp>
+      <p:sp>
+        <p:nvSpPr>
+          <p:cNvPr id="14" name="Rectangle 13">
+            <a:extLst>
               <a:ext uri="{FF2B5EF4-FFF2-40B4-BE49-F238E27FC236}">
                 <a16:creationId xmlns:a16="http://schemas.microsoft.com/office/drawing/2014/main" id="{68F5D15A-74CB-42D7-A293-B40758883536}"/>
               </a:ext>
             </a:extLst>
           </p:cNvPr>
           <p:cNvSpPr>
-            <a:spLocks xmlns:a="http://schemas.openxmlformats.org/drawingml/2006/main" noGrp="1"/>
-          </p:cNvSpPr>
-          <p:nvPr/>
-        </p:nvSpPr>
-        <p:spPr>
-          <a:xfrm xmlns:a="http://schemas.openxmlformats.org/drawingml/2006/main">
+            <a:spLocks noGrp="1"/>
+          </p:cNvSpPr>
+          <p:nvPr/>
+        </p:nvSpPr>
+        <p:spPr>
+          <a:xfrm>
             <a:off x="876300" y="5819775"/>
             <a:ext cx="10477500" cy="381000"/>
           </a:xfrm>
-          <a:prstGeom xmlns:a="http://schemas.openxmlformats.org/drawingml/2006/main" prst="rect">
-            <a:avLst/>
-          </a:prstGeom>
-          <a:noFill xmlns:a="http://schemas.openxmlformats.org/drawingml/2006/main"/>
-          <a:ln xmlns:a="http://schemas.openxmlformats.org/drawingml/2006/main" w="0">
-            <a:noFill/>
-          </a:ln>
-        </p:spPr>
-        <p:txBody>
-          <a:bodyPr xmlns:a="http://schemas.openxmlformats.org/drawingml/2006/main">
+          <a:prstGeom prst="rect">
+            <a:avLst/>
+          </a:prstGeom>
+          <a:noFill/>
+          <a:ln w="0">
+            <a:noFill/>
+          </a:ln>
+        </p:spPr>
+        <p:txBody>
+          <a:bodyPr>
             <a:noAutofit/>
           </a:bodyPr>
-          <a:lstStyle xmlns:a="http://schemas.openxmlformats.org/drawingml/2006/main"/>
-          <a:p xmlns:a="http://schemas.openxmlformats.org/drawingml/2006/main">
+          <a:lstStyle/>
+          <a:p>
             <a:pPr>
               <a:defRPr sz="2100" b="1">
                 <a:solidFill>
@@ -5323,6 +5421,9 @@
       </p:ext>
     </p:extLst>
   </p:cSld>
+  <p:clrMapOvr>
+    <a:masterClrMapping/>
+  </p:clrMapOvr>
 </p:sld>
 </file>
 
@@ -5568,5 +5669,254 @@
       </a:bgFillStyleLst>
     </a:fmtScheme>
   </a:themeElements>
+  <a:objectDefaults/>
+  <a:extraClrSchemeLst/>
+</a:theme>
+</file>
+
+<file path=ppt/theme/theme2.xml><?xml version="1.0" encoding="utf-8"?>
+<a:theme xmlns:a="http://schemas.openxmlformats.org/drawingml/2006/main" name="ChatGPT">
+  <a:themeElements>
+    <a:clrScheme name="ChatGPT">
+      <a:dk1>
+        <a:srgbClr val="000000"/>
+      </a:dk1>
+      <a:lt1>
+        <a:srgbClr val="FFFFFF"/>
+      </a:lt1>
+      <a:dk2>
+        <a:srgbClr val="0E2841"/>
+      </a:dk2>
+      <a:lt2>
+        <a:srgbClr val="E8E8E8"/>
+      </a:lt2>
+      <a:accent1>
+        <a:srgbClr val="156082"/>
+      </a:accent1>
+      <a:accent2>
+        <a:srgbClr val="E97132"/>
+      </a:accent2>
+      <a:accent3>
+        <a:srgbClr val="196B24"/>
+      </a:accent3>
+      <a:accent4>
+        <a:srgbClr val="0F9ED5"/>
+      </a:accent4>
+      <a:accent5>
+        <a:srgbClr val="A02B93"/>
+      </a:accent5>
+      <a:accent6>
+        <a:srgbClr val="4EA72E"/>
+      </a:accent6>
+      <a:hlink>
+        <a:srgbClr val="467886"/>
+      </a:hlink>
+      <a:folHlink>
+        <a:srgbClr val="96607D"/>
+      </a:folHlink>
+    </a:clrScheme>
+    <a:fontScheme name="Office">
+      <a:majorFont>
+        <a:latin typeface="Calibri Light"/>
+        <a:ea typeface="Calibri Light"/>
+        <a:cs typeface="Calibri Light"/>
+      </a:majorFont>
+      <a:minorFont>
+        <a:latin typeface="Calibri"/>
+        <a:ea typeface="Calibri"/>
+        <a:cs typeface="Calibri"/>
+      </a:minorFont>
+    </a:fontScheme>
+    <a:fmtScheme name="ChatGPT">
+      <a:fillStyleLst>
+        <a:solidFill>
+          <a:schemeClr val="phClr"/>
+        </a:solidFill>
+        <a:gradFill>
+          <a:gsLst>
+            <a:gs pos="0">
+              <a:schemeClr val="phClr">
+                <a:tint val="67000"/>
+                <a:lumMod val="110000"/>
+                <a:satMod val="105000"/>
+              </a:schemeClr>
+            </a:gs>
+            <a:gs pos="50000">
+              <a:schemeClr val="phClr">
+                <a:tint val="73000"/>
+                <a:lumMod val="105000"/>
+                <a:satMod val="103000"/>
+              </a:schemeClr>
+            </a:gs>
+            <a:gs pos="100000">
+              <a:schemeClr val="phClr">
+                <a:tint val="81000"/>
+                <a:lumMod val="105000"/>
+                <a:satMod val="109000"/>
+              </a:schemeClr>
+            </a:gs>
+          </a:gsLst>
+          <a:lin ang="5400000" scaled="0"/>
+        </a:gradFill>
+        <a:gradFill>
+          <a:gsLst>
+            <a:gs pos="0">
+              <a:schemeClr val="phClr">
+                <a:tint val="94000"/>
+                <a:lumMod val="102000"/>
+                <a:satMod val="103000"/>
+              </a:schemeClr>
+            </a:gs>
+            <a:gs pos="50000">
+              <a:schemeClr val="phClr">
+                <a:shade val="100000"/>
+                <a:lumMod val="100000"/>
+                <a:satMod val="110000"/>
+              </a:schemeClr>
+            </a:gs>
+            <a:gs pos="100000">
+              <a:schemeClr val="phClr">
+                <a:shade val="78000"/>
+                <a:lumMod val="99000"/>
+                <a:satMod val="120000"/>
+              </a:schemeClr>
+            </a:gs>
+          </a:gsLst>
+          <a:lin ang="5400000" scaled="0"/>
+        </a:gradFill>
+      </a:fillStyleLst>
+      <a:lnStyleLst>
+        <a:ln w="12700">
+          <a:solidFill>
+            <a:schemeClr val="phClr"/>
+          </a:solidFill>
+          <a:prstDash val="solid"/>
+        </a:ln>
+        <a:ln w="19050">
+          <a:solidFill>
+            <a:schemeClr val="phClr"/>
+          </a:solidFill>
+          <a:prstDash val="solid"/>
+        </a:ln>
+        <a:ln w="25400">
+          <a:solidFill>
+            <a:schemeClr val="phClr"/>
+          </a:solidFill>
+          <a:prstDash val="solid"/>
+        </a:ln>
+      </a:lnStyleLst>
+      <a:effectStyleLst>
+        <a:effectStyle>
+          <a:effectLst/>
+        </a:effectStyle>
+        <a:effectStyle>
+          <a:effectLst/>
+        </a:effectStyle>
+        <a:effectStyle>
+          <a:effectLst>
+            <a:outerShdw blurRad="57150" dist="19050" dir="5400000">
+              <a:srgbClr val="000000">
+                <a:alpha val="16000"/>
+              </a:srgbClr>
+            </a:outerShdw>
+          </a:effectLst>
+        </a:effectStyle>
+        <a:effectStyle>
+          <a:effectLst>
+            <a:outerShdw blurRad="19050" dist="9525" dir="5400000">
+              <a:srgbClr val="000000">
+                <a:alpha val="6000"/>
+              </a:srgbClr>
+            </a:outerShdw>
+          </a:effectLst>
+        </a:effectStyle>
+        <a:effectStyle>
+          <a:effectLst>
+            <a:outerShdw blurRad="28575" dist="9525" dir="5400000">
+              <a:srgbClr val="000000">
+                <a:alpha val="8000"/>
+              </a:srgbClr>
+            </a:outerShdw>
+          </a:effectLst>
+        </a:effectStyle>
+        <a:effectStyle>
+          <a:effectLst>
+            <a:outerShdw blurRad="57150" dist="19050" dir="5400000">
+              <a:srgbClr val="000000">
+                <a:alpha val="10000"/>
+              </a:srgbClr>
+            </a:outerShdw>
+          </a:effectLst>
+        </a:effectStyle>
+        <a:effectStyle>
+          <a:effectLst>
+            <a:outerShdw blurRad="114300" dist="38100" dir="5400000">
+              <a:srgbClr val="000000">
+                <a:alpha val="12000"/>
+              </a:srgbClr>
+            </a:outerShdw>
+          </a:effectLst>
+        </a:effectStyle>
+        <a:effectStyle>
+          <a:effectLst>
+            <a:outerShdw blurRad="171450" dist="57150" dir="5400000">
+              <a:srgbClr val="000000">
+                <a:alpha val="16000"/>
+              </a:srgbClr>
+            </a:outerShdw>
+          </a:effectLst>
+        </a:effectStyle>
+        <a:effectStyle>
+          <a:effectLst>
+            <a:outerShdw blurRad="266700" dist="95250" dir="5400000">
+              <a:srgbClr val="000000">
+                <a:alpha val="24000"/>
+              </a:srgbClr>
+            </a:outerShdw>
+          </a:effectLst>
+        </a:effectStyle>
+      </a:effectStyleLst>
+      <a:bgFillStyleLst>
+        <a:solidFill>
+          <a:schemeClr val="phClr"/>
+        </a:solidFill>
+        <a:solidFill>
+          <a:schemeClr val="phClr">
+            <a:tint val="95000"/>
+            <a:satMod val="170000"/>
+          </a:schemeClr>
+        </a:solidFill>
+        <a:gradFill>
+          <a:gsLst>
+            <a:gs pos="0">
+              <a:schemeClr val="phClr">
+                <a:tint val="93000"/>
+                <a:shade val="98000"/>
+                <a:lumMod val="102000"/>
+                <a:satMod val="150000"/>
+              </a:schemeClr>
+            </a:gs>
+            <a:gs pos="50000">
+              <a:schemeClr val="phClr">
+                <a:tint val="98000"/>
+                <a:shade val="90000"/>
+                <a:lumMod val="103000"/>
+                <a:satMod val="130000"/>
+              </a:schemeClr>
+            </a:gs>
+            <a:gs pos="100000">
+              <a:schemeClr val="phClr">
+                <a:shade val="63000"/>
+                <a:satMod val="120000"/>
+              </a:schemeClr>
+            </a:gs>
+          </a:gsLst>
+          <a:lin ang="5400000" scaled="0"/>
+        </a:gradFill>
+      </a:bgFillStyleLst>
+    </a:fmtScheme>
+  </a:themeElements>
+  <a:objectDefaults/>
+  <a:extraClrSchemeLst/>
 </a:theme>
 </file>